--- a/neurips/neurips.pptx
+++ b/neurips/neurips.pptx
@@ -30,9 +30,17 @@
     <p:sldId id="278" r:id="rId24"/>
     <p:sldId id="279" r:id="rId25"/>
     <p:sldId id="280" r:id="rId26"/>
+    <p:sldId id="281" r:id="rId27"/>
+    <p:sldId id="282" r:id="rId28"/>
+    <p:sldId id="283" r:id="rId29"/>
+    <p:sldId id="284" r:id="rId30"/>
+    <p:sldId id="285" r:id="rId31"/>
+    <p:sldId id="286" r:id="rId32"/>
+    <p:sldId id="287" r:id="rId33"/>
+    <p:sldId id="288" r:id="rId34"/>
   </p:sldIdLst>
   <p:notesMasterIdLst>
-    <p:notesMasterId r:id="rId27"/>
+    <p:notesMasterId r:id="rId35"/>
   </p:notesMasterIdLst>
   <p:sldSz cx="12192000" cy="6858000"/>
   <p:notesSz cx="6858000" cy="12192000"/>
@@ -614,7 +622,7 @@
           <a:p>
             <a:r>
               <a:rPr lang="en-US" dirty="0"/>
-              <a:t>arXiv v1（2025-05-10）を本文と Limitations まで読了。受賞は NeurIPS 公式ブログ（2025-11-26）と Fact Sheet の検索結果で確認。</a:t>
+              <a:t>arXiv v1（2025-05-10）を本文と Limitations まで読了。受賞区分は NeurIPS 公式の受賞一覧（https://neurips.cc/virtual/2025/awards_detail）で確認（2026-10-28）。選考委員会のコメント（公式ブログ）は到達できず未確認。</a:t>
             </a:r>
             <a:endParaRPr lang="en-US" dirty="0"/>
           </a:p>
@@ -790,7 +798,7 @@
           <a:p>
             <a:r>
               <a:rPr lang="en-US" dirty="0"/>
-              <a:t>arXiv v5（2026-10-05）を本文 Sec. 1–4 まで読了。受賞は公式ブログの検索結果と arXiv コメント（Best Paper Award）で確認。</a:t>
+              <a:t>arXiv v5（2026-10-05）を本文 Sec. 1–4 まで読了。受賞区分は NeurIPS 公式の受賞一覧（https://neurips.cc/virtual/2025/awards_detail）で確認（2026-10-28）。選考委員会のコメント（公式ブログ）は到達できず未確認。</a:t>
             </a:r>
             <a:endParaRPr lang="en-US" dirty="0"/>
           </a:p>
@@ -966,7 +974,7 @@
           <a:p>
             <a:r>
               <a:rPr lang="en-US" dirty="0"/>
-              <a:t>arXiv v2（2025-10-28）を本文 Sec. 1–4 まで読了。付録の証明は未精読。</a:t>
+              <a:t>arXiv v2（2025-10-28）を本文 Sec. 1–4 まで読了。付録の証明は未精読。受賞区分は NeurIPS 公式の受賞一覧（https://neurips.cc/virtual/2025/awards_detail）で確認（2026-10-28）。選考委員会のコメント（公式ブログ）は到達できず未確認。</a:t>
             </a:r>
             <a:endParaRPr lang="en-US" dirty="0"/>
           </a:p>
@@ -1142,7 +1150,7 @@
           <a:p>
             <a:r>
               <a:rPr lang="en-US" dirty="0"/>
-              <a:t>arXiv v2（2026-10-06, camera-ready）を本文まで読了。D&amp;B トラックからの Best Paper（4本中1本）。</a:t>
+              <a:t>arXiv v2（2026-10-06, camera-ready）を本文まで読了。D&amp;B トラックからの Best Paper（4本中1本）。受賞区分は NeurIPS 公式の受賞一覧（https://neurips.cc/virtual/2025/awards_detail）で確認（2026-10-28）。選考委員会のコメント（公式ブログ）は到達できず未確認。</a:t>
             </a:r>
             <a:endParaRPr lang="en-US" dirty="0"/>
           </a:p>
@@ -1318,7 +1326,7 @@
           <a:p>
             <a:r>
               <a:rPr lang="en-US" dirty="0"/>
-              <a:t>arXiv v5（2025-11-24）を本文 Sec. 1–4 まで読了。</a:t>
+              <a:t>arXiv v5（2025-11-24）を本文 Sec. 1–4 まで読了。受賞区分は NeurIPS 公式の受賞一覧（https://neurips.cc/virtual/2025/awards_detail）で確認（2026-10-28）。選考委員会のコメント（公式ブログ）は到達できず未確認。</a:t>
             </a:r>
             <a:endParaRPr lang="en-US" dirty="0"/>
           </a:p>
@@ -1494,7 +1502,7 @@
           <a:p>
             <a:r>
               <a:rPr lang="en-US" dirty="0"/>
-              <a:t>arXiv v2（2026-09-30）を本文と付録 A まで読了。Oral 区分は著者の arXiv コメント（NeurIPS 2026 Oral, 0.36% acceptance）による。</a:t>
+              <a:t>arXiv v2（2026-09-30）を本文と付録 A まで読了。Oral 区分は NeurIPS 公式の Oral 一覧（Atlanta 会場, https://neurips.cc/virtual/2026/oral/154465）で確認（2026-10-28）。</a:t>
             </a:r>
             <a:endParaRPr lang="en-US" dirty="0"/>
           </a:p>
@@ -1582,7 +1590,7 @@
           <a:p>
             <a:r>
               <a:rPr lang="en-US" dirty="0"/>
-              <a:t>arXiv v1（2025-12-14）を Sec. 1–2（主結果と証明の概要）まで読了。Sec. 6–8 の厳密な証明は未精読。</a:t>
+              <a:t>arXiv v1（2025-12-14）を Sec. 1–2（主結果と証明の概要）まで読了。Sec. 6–8 の厳密な証明は未精読。受賞区分は NeurIPS 公式の受賞一覧（https://neurips.cc/virtual/2025/awards_detail）で確認（2026-10-28）。選考委員会のコメント（公式ブログ）は到達できず未確認。</a:t>
             </a:r>
             <a:endParaRPr lang="en-US" dirty="0"/>
           </a:p>
@@ -1758,7 +1766,7 @@
           <a:p>
             <a:r>
               <a:rPr lang="en-US" dirty="0"/>
-              <a:t>arXiv v4（2025-11-29）を本文と Discussion まで読了。arXiv コメントに Best Paper Runner-up の記載あり。</a:t>
+              <a:t>arXiv v4（2025-11-29）を本文と Discussion まで読了。arXiv コメントに Best Paper Runner-up の記載あり。受賞区分は NeurIPS 公式の受賞一覧（https://neurips.cc/virtual/2025/awards_detail）で確認（2026-10-28）。選考委員会のコメント（公式ブログ）は到達できず未確認。</a:t>
             </a:r>
             <a:endParaRPr lang="en-US" dirty="0"/>
           </a:p>
@@ -1934,7 +1942,7 @@
           <a:p>
             <a:r>
               <a:rPr lang="en-US" dirty="0"/>
-              <a:t>NIPS 2015 論文集版（proceedings.neurips.cc, 9ページ）を全文読了。arXiv 1506.01497 は TPAMI 拡張版。受賞は NeurIPS 公式ブログ（2025-11-26）の検索結果で確認。</a:t>
+              <a:t>NIPS 2015 論文集版（proceedings.neurips.cc, 9ページ）を全文読了。arXiv 1506.01497 は TPAMI 拡張版。受賞区分は NeurIPS 公式の受賞一覧（https://neurips.cc/virtual/2025/awards_detail）で確認（2026-10-28）。選考委員会のコメント（公式ブログ）は到達できず未確認。</a:t>
             </a:r>
             <a:endParaRPr lang="en-US" dirty="0"/>
           </a:p>
@@ -2064,6 +2072,358 @@
 </p:notes>
 </file>
 
+<file path=ppt/notesSlides/notesSlide26.xml><?xml version="1.0" encoding="utf-8"?>
+<p:notes xmlns:a="http://schemas.openxmlformats.org/drawingml/2006/main" xmlns:r="http://schemas.openxmlformats.org/officeDocument/2006/relationships" xmlns:p="http://schemas.openxmlformats.org/presentationml/2006/main">
+  <p:cSld>
+    <p:spTree>
+      <p:nvGrpSpPr>
+        <p:cNvPr id="1" name=""/>
+        <p:cNvGrpSpPr/>
+        <p:nvPr/>
+      </p:nvGrpSpPr>
+      <p:grpSpPr>
+        <a:xfrm>
+          <a:off x="0" y="0"/>
+          <a:ext cx="0" cy="0"/>
+          <a:chOff x="0" y="0"/>
+          <a:chExt cx="0" cy="0"/>
+        </a:xfrm>
+      </p:grpSpPr>
+      <p:sp>
+        <p:nvSpPr>
+          <p:cNvPr id="2" name="Slide Image Placeholder 1"/>
+          <p:cNvSpPr>
+            <a:spLocks noGrp="1" noRot="1" noChangeAspect="1"/>
+          </p:cNvSpPr>
+          <p:nvPr>
+            <p:ph type="sldImg"/>
+          </p:nvPr>
+        </p:nvSpPr>
+        <p:spPr/>
+      </p:sp>
+      <p:sp>
+        <p:nvSpPr>
+          <p:cNvPr id="3" name="Notes Placeholder 2"/>
+          <p:cNvSpPr>
+            <a:spLocks noGrp="1"/>
+          </p:cNvSpPr>
+          <p:nvPr>
+            <p:ph type="body" idx="1"/>
+          </p:nvPr>
+        </p:nvSpPr>
+        <p:spPr/>
+        <p:txBody>
+          <a:bodyPr/>
+          <a:lstStyle/>
+          <a:p>
+            <a:r>
+              <a:rPr lang="en-US" dirty="0"/>
+              <a:t>arXiv v2（2024-06-10）を本文（Sec. 1–9）まで読了。https://neurips.cc/virtual/2024/awards_detail で受賞区分を確認（2026-10-28）。選考委員会のコメント（公式ブログ）は到達できず未確認。</a:t>
+            </a:r>
+            <a:endParaRPr lang="en-US" dirty="0"/>
+          </a:p>
+        </p:txBody>
+      </p:sp>
+      <p:sp>
+        <p:nvSpPr>
+          <p:cNvPr id="4" name="Slide Number Placeholder 3"/>
+          <p:cNvSpPr>
+            <a:spLocks noGrp="1"/>
+          </p:cNvSpPr>
+          <p:nvPr>
+            <p:ph type="sldNum" sz="quarter" idx="10"/>
+          </p:nvPr>
+        </p:nvSpPr>
+        <p:spPr/>
+        <p:txBody>
+          <a:bodyPr/>
+          <a:lstStyle/>
+          <a:p>
+            <a:fld id="{F7021451-1387-4CA6-816F-3879F97B5CBC}" type="slidenum">
+              <a:rPr lang="en-US"/>
+              <a:t>26</a:t>
+            </a:fld>
+            <a:endParaRPr lang="en-US"/>
+          </a:p>
+        </p:txBody>
+      </p:sp>
+    </p:spTree>
+    <p:extLst>
+      <p:ext uri="{BB962C8B-B14F-4D97-AF65-F5344CB8AC3E}">
+        <p14:creationId xmlns:p14="http://schemas.microsoft.com/office/powerpoint/2010/main" val="1024086991"/>
+      </p:ext>
+    </p:extLst>
+  </p:cSld>
+  <p:clrMapOvr>
+    <a:masterClrMapping/>
+  </p:clrMapOvr>
+</p:notes>
+</file>
+
+<file path=ppt/notesSlides/notesSlide27.xml><?xml version="1.0" encoding="utf-8"?>
+<p:notes xmlns:a="http://schemas.openxmlformats.org/drawingml/2006/main" xmlns:r="http://schemas.openxmlformats.org/officeDocument/2006/relationships" xmlns:p="http://schemas.openxmlformats.org/presentationml/2006/main">
+  <p:cSld>
+    <p:spTree>
+      <p:nvGrpSpPr>
+        <p:cNvPr id="1" name=""/>
+        <p:cNvGrpSpPr/>
+        <p:nvPr/>
+      </p:nvGrpSpPr>
+      <p:grpSpPr>
+        <a:xfrm>
+          <a:off x="0" y="0"/>
+          <a:ext cx="0" cy="0"/>
+          <a:chOff x="0" y="0"/>
+          <a:chExt cx="0" cy="0"/>
+        </a:xfrm>
+      </p:grpSpPr>
+      <p:sp>
+        <p:nvSpPr>
+          <p:cNvPr id="2" name="Slide Image Placeholder 1"/>
+          <p:cNvSpPr>
+            <a:spLocks noGrp="1" noRot="1" noChangeAspect="1"/>
+          </p:cNvSpPr>
+          <p:nvPr>
+            <p:ph type="sldImg"/>
+          </p:nvPr>
+        </p:nvSpPr>
+        <p:spPr/>
+      </p:sp>
+      <p:sp>
+        <p:nvSpPr>
+          <p:cNvPr id="3" name="Notes Placeholder 2"/>
+          <p:cNvSpPr>
+            <a:spLocks noGrp="1"/>
+          </p:cNvSpPr>
+          <p:nvPr>
+            <p:ph type="body" idx="1"/>
+          </p:nvPr>
+        </p:nvSpPr>
+        <p:spPr/>
+        <p:txBody>
+          <a:bodyPr/>
+          <a:lstStyle/>
+          <a:p>
+            <a:r>
+              <a:rPr lang="en-US" dirty="0"/>
+              <a:t/>
+            </a:r>
+            <a:endParaRPr lang="en-US" dirty="0"/>
+          </a:p>
+        </p:txBody>
+      </p:sp>
+      <p:sp>
+        <p:nvSpPr>
+          <p:cNvPr id="4" name="Slide Number Placeholder 3"/>
+          <p:cNvSpPr>
+            <a:spLocks noGrp="1"/>
+          </p:cNvSpPr>
+          <p:nvPr>
+            <p:ph type="sldNum" sz="quarter" idx="10"/>
+          </p:nvPr>
+        </p:nvSpPr>
+        <p:spPr/>
+        <p:txBody>
+          <a:bodyPr/>
+          <a:lstStyle/>
+          <a:p>
+            <a:fld id="{F7021451-1387-4CA6-816F-3879F97B5CBC}" type="slidenum">
+              <a:rPr lang="en-US"/>
+              <a:t>27</a:t>
+            </a:fld>
+            <a:endParaRPr lang="en-US"/>
+          </a:p>
+        </p:txBody>
+      </p:sp>
+    </p:spTree>
+    <p:extLst>
+      <p:ext uri="{BB962C8B-B14F-4D97-AF65-F5344CB8AC3E}">
+        <p14:creationId xmlns:p14="http://schemas.microsoft.com/office/powerpoint/2010/main" val="1024086991"/>
+      </p:ext>
+    </p:extLst>
+  </p:cSld>
+  <p:clrMapOvr>
+    <a:masterClrMapping/>
+  </p:clrMapOvr>
+</p:notes>
+</file>
+
+<file path=ppt/notesSlides/notesSlide28.xml><?xml version="1.0" encoding="utf-8"?>
+<p:notes xmlns:a="http://schemas.openxmlformats.org/drawingml/2006/main" xmlns:r="http://schemas.openxmlformats.org/officeDocument/2006/relationships" xmlns:p="http://schemas.openxmlformats.org/presentationml/2006/main">
+  <p:cSld>
+    <p:spTree>
+      <p:nvGrpSpPr>
+        <p:cNvPr id="1" name=""/>
+        <p:cNvGrpSpPr/>
+        <p:nvPr/>
+      </p:nvGrpSpPr>
+      <p:grpSpPr>
+        <a:xfrm>
+          <a:off x="0" y="0"/>
+          <a:ext cx="0" cy="0"/>
+          <a:chOff x="0" y="0"/>
+          <a:chExt cx="0" cy="0"/>
+        </a:xfrm>
+      </p:grpSpPr>
+      <p:sp>
+        <p:nvSpPr>
+          <p:cNvPr id="2" name="Slide Image Placeholder 1"/>
+          <p:cNvSpPr>
+            <a:spLocks noGrp="1" noRot="1" noChangeAspect="1"/>
+          </p:cNvSpPr>
+          <p:nvPr>
+            <p:ph type="sldImg"/>
+          </p:nvPr>
+        </p:nvSpPr>
+        <p:spPr/>
+      </p:sp>
+      <p:sp>
+        <p:nvSpPr>
+          <p:cNvPr id="3" name="Notes Placeholder 2"/>
+          <p:cNvSpPr>
+            <a:spLocks noGrp="1"/>
+          </p:cNvSpPr>
+          <p:nvPr>
+            <p:ph type="body" idx="1"/>
+          </p:nvPr>
+        </p:nvSpPr>
+        <p:spPr/>
+        <p:txBody>
+          <a:bodyPr/>
+          <a:lstStyle/>
+          <a:p>
+            <a:r>
+              <a:rPr lang="en-US" dirty="0"/>
+              <a:t>arXiv v2（2025-01-13）を本文（Sec. 1–6）と付録 I の主要な表まで読了。https://neurips.cc/virtual/2024/awards_detail で受賞区分を確認（2026-10-28）。選考委員会のコメント（公式ブログ）は到達できず未確認。</a:t>
+            </a:r>
+            <a:endParaRPr lang="en-US" dirty="0"/>
+          </a:p>
+        </p:txBody>
+      </p:sp>
+      <p:sp>
+        <p:nvSpPr>
+          <p:cNvPr id="4" name="Slide Number Placeholder 3"/>
+          <p:cNvSpPr>
+            <a:spLocks noGrp="1"/>
+          </p:cNvSpPr>
+          <p:nvPr>
+            <p:ph type="sldNum" sz="quarter" idx="10"/>
+          </p:nvPr>
+        </p:nvSpPr>
+        <p:spPr/>
+        <p:txBody>
+          <a:bodyPr/>
+          <a:lstStyle/>
+          <a:p>
+            <a:fld id="{F7021451-1387-4CA6-816F-3879F97B5CBC}" type="slidenum">
+              <a:rPr lang="en-US"/>
+              <a:t>28</a:t>
+            </a:fld>
+            <a:endParaRPr lang="en-US"/>
+          </a:p>
+        </p:txBody>
+      </p:sp>
+    </p:spTree>
+    <p:extLst>
+      <p:ext uri="{BB962C8B-B14F-4D97-AF65-F5344CB8AC3E}">
+        <p14:creationId xmlns:p14="http://schemas.microsoft.com/office/powerpoint/2010/main" val="1024086991"/>
+      </p:ext>
+    </p:extLst>
+  </p:cSld>
+  <p:clrMapOvr>
+    <a:masterClrMapping/>
+  </p:clrMapOvr>
+</p:notes>
+</file>
+
+<file path=ppt/notesSlides/notesSlide29.xml><?xml version="1.0" encoding="utf-8"?>
+<p:notes xmlns:a="http://schemas.openxmlformats.org/drawingml/2006/main" xmlns:r="http://schemas.openxmlformats.org/officeDocument/2006/relationships" xmlns:p="http://schemas.openxmlformats.org/presentationml/2006/main">
+  <p:cSld>
+    <p:spTree>
+      <p:nvGrpSpPr>
+        <p:cNvPr id="1" name=""/>
+        <p:cNvGrpSpPr/>
+        <p:nvPr/>
+      </p:nvGrpSpPr>
+      <p:grpSpPr>
+        <a:xfrm>
+          <a:off x="0" y="0"/>
+          <a:ext cx="0" cy="0"/>
+          <a:chOff x="0" y="0"/>
+          <a:chExt cx="0" cy="0"/>
+        </a:xfrm>
+      </p:grpSpPr>
+      <p:sp>
+        <p:nvSpPr>
+          <p:cNvPr id="2" name="Slide Image Placeholder 1"/>
+          <p:cNvSpPr>
+            <a:spLocks noGrp="1" noRot="1" noChangeAspect="1"/>
+          </p:cNvSpPr>
+          <p:nvPr>
+            <p:ph type="sldImg"/>
+          </p:nvPr>
+        </p:nvSpPr>
+        <p:spPr/>
+      </p:sp>
+      <p:sp>
+        <p:nvSpPr>
+          <p:cNvPr id="3" name="Notes Placeholder 2"/>
+          <p:cNvSpPr>
+            <a:spLocks noGrp="1"/>
+          </p:cNvSpPr>
+          <p:nvPr>
+            <p:ph type="body" idx="1"/>
+          </p:nvPr>
+        </p:nvSpPr>
+        <p:spPr/>
+        <p:txBody>
+          <a:bodyPr/>
+          <a:lstStyle/>
+          <a:p>
+            <a:r>
+              <a:rPr lang="en-US" dirty="0"/>
+              <a:t/>
+            </a:r>
+            <a:endParaRPr lang="en-US" dirty="0"/>
+          </a:p>
+        </p:txBody>
+      </p:sp>
+      <p:sp>
+        <p:nvSpPr>
+          <p:cNvPr id="4" name="Slide Number Placeholder 3"/>
+          <p:cNvSpPr>
+            <a:spLocks noGrp="1"/>
+          </p:cNvSpPr>
+          <p:nvPr>
+            <p:ph type="sldNum" sz="quarter" idx="10"/>
+          </p:nvPr>
+        </p:nvSpPr>
+        <p:spPr/>
+        <p:txBody>
+          <a:bodyPr/>
+          <a:lstStyle/>
+          <a:p>
+            <a:fld id="{F7021451-1387-4CA6-816F-3879F97B5CBC}" type="slidenum">
+              <a:rPr lang="en-US"/>
+              <a:t>29</a:t>
+            </a:fld>
+            <a:endParaRPr lang="en-US"/>
+          </a:p>
+        </p:txBody>
+      </p:sp>
+    </p:spTree>
+    <p:extLst>
+      <p:ext uri="{BB962C8B-B14F-4D97-AF65-F5344CB8AC3E}">
+        <p14:creationId xmlns:p14="http://schemas.microsoft.com/office/powerpoint/2010/main" val="1024086991"/>
+      </p:ext>
+    </p:extLst>
+  </p:cSld>
+  <p:clrMapOvr>
+    <a:masterClrMapping/>
+  </p:clrMapOvr>
+</p:notes>
+</file>
+
 <file path=ppt/notesSlides/notesSlide3.xml><?xml version="1.0" encoding="utf-8"?>
 <p:notes xmlns:a="http://schemas.openxmlformats.org/drawingml/2006/main" xmlns:r="http://schemas.openxmlformats.org/officeDocument/2006/relationships" xmlns:p="http://schemas.openxmlformats.org/presentationml/2006/main">
   <p:cSld>
@@ -2134,6 +2494,358 @@
             <a:fld id="{F7021451-1387-4CA6-816F-3879F97B5CBC}" type="slidenum">
               <a:rPr lang="en-US"/>
               <a:t>3</a:t>
+            </a:fld>
+            <a:endParaRPr lang="en-US"/>
+          </a:p>
+        </p:txBody>
+      </p:sp>
+    </p:spTree>
+    <p:extLst>
+      <p:ext uri="{BB962C8B-B14F-4D97-AF65-F5344CB8AC3E}">
+        <p14:creationId xmlns:p14="http://schemas.microsoft.com/office/powerpoint/2010/main" val="1024086991"/>
+      </p:ext>
+    </p:extLst>
+  </p:cSld>
+  <p:clrMapOvr>
+    <a:masterClrMapping/>
+  </p:clrMapOvr>
+</p:notes>
+</file>
+
+<file path=ppt/notesSlides/notesSlide30.xml><?xml version="1.0" encoding="utf-8"?>
+<p:notes xmlns:a="http://schemas.openxmlformats.org/drawingml/2006/main" xmlns:r="http://schemas.openxmlformats.org/officeDocument/2006/relationships" xmlns:p="http://schemas.openxmlformats.org/presentationml/2006/main">
+  <p:cSld>
+    <p:spTree>
+      <p:nvGrpSpPr>
+        <p:cNvPr id="1" name=""/>
+        <p:cNvGrpSpPr/>
+        <p:nvPr/>
+      </p:nvGrpSpPr>
+      <p:grpSpPr>
+        <a:xfrm>
+          <a:off x="0" y="0"/>
+          <a:ext cx="0" cy="0"/>
+          <a:chOff x="0" y="0"/>
+          <a:chExt cx="0" cy="0"/>
+        </a:xfrm>
+      </p:grpSpPr>
+      <p:sp>
+        <p:nvSpPr>
+          <p:cNvPr id="2" name="Slide Image Placeholder 1"/>
+          <p:cNvSpPr>
+            <a:spLocks noGrp="1" noRot="1" noChangeAspect="1"/>
+          </p:cNvSpPr>
+          <p:nvPr>
+            <p:ph type="sldImg"/>
+          </p:nvPr>
+        </p:nvSpPr>
+        <p:spPr/>
+      </p:sp>
+      <p:sp>
+        <p:nvSpPr>
+          <p:cNvPr id="3" name="Notes Placeholder 2"/>
+          <p:cNvSpPr>
+            <a:spLocks noGrp="1"/>
+          </p:cNvSpPr>
+          <p:nvPr>
+            <p:ph type="body" idx="1"/>
+          </p:nvPr>
+        </p:nvSpPr>
+        <p:spPr/>
+        <p:txBody>
+          <a:bodyPr/>
+          <a:lstStyle/>
+          <a:p>
+            <a:r>
+              <a:rPr lang="en-US" dirty="0"/>
+              <a:t>arXiv v3（2024-12-19）を本文（Sec. 1–6）まで読了。https://neurips.cc/virtual/2024/awards_detail で受賞区分を確認（2026-10-28）。選考委員会のコメント（公式ブログ）は到達できず未確認。</a:t>
+            </a:r>
+            <a:endParaRPr lang="en-US" dirty="0"/>
+          </a:p>
+        </p:txBody>
+      </p:sp>
+      <p:sp>
+        <p:nvSpPr>
+          <p:cNvPr id="4" name="Slide Number Placeholder 3"/>
+          <p:cNvSpPr>
+            <a:spLocks noGrp="1"/>
+          </p:cNvSpPr>
+          <p:nvPr>
+            <p:ph type="sldNum" sz="quarter" idx="10"/>
+          </p:nvPr>
+        </p:nvSpPr>
+        <p:spPr/>
+        <p:txBody>
+          <a:bodyPr/>
+          <a:lstStyle/>
+          <a:p>
+            <a:fld id="{F7021451-1387-4CA6-816F-3879F97B5CBC}" type="slidenum">
+              <a:rPr lang="en-US"/>
+              <a:t>30</a:t>
+            </a:fld>
+            <a:endParaRPr lang="en-US"/>
+          </a:p>
+        </p:txBody>
+      </p:sp>
+    </p:spTree>
+    <p:extLst>
+      <p:ext uri="{BB962C8B-B14F-4D97-AF65-F5344CB8AC3E}">
+        <p14:creationId xmlns:p14="http://schemas.microsoft.com/office/powerpoint/2010/main" val="1024086991"/>
+      </p:ext>
+    </p:extLst>
+  </p:cSld>
+  <p:clrMapOvr>
+    <a:masterClrMapping/>
+  </p:clrMapOvr>
+</p:notes>
+</file>
+
+<file path=ppt/notesSlides/notesSlide31.xml><?xml version="1.0" encoding="utf-8"?>
+<p:notes xmlns:a="http://schemas.openxmlformats.org/drawingml/2006/main" xmlns:r="http://schemas.openxmlformats.org/officeDocument/2006/relationships" xmlns:p="http://schemas.openxmlformats.org/presentationml/2006/main">
+  <p:cSld>
+    <p:spTree>
+      <p:nvGrpSpPr>
+        <p:cNvPr id="1" name=""/>
+        <p:cNvGrpSpPr/>
+        <p:nvPr/>
+      </p:nvGrpSpPr>
+      <p:grpSpPr>
+        <a:xfrm>
+          <a:off x="0" y="0"/>
+          <a:ext cx="0" cy="0"/>
+          <a:chOff x="0" y="0"/>
+          <a:chExt cx="0" cy="0"/>
+        </a:xfrm>
+      </p:grpSpPr>
+      <p:sp>
+        <p:nvSpPr>
+          <p:cNvPr id="2" name="Slide Image Placeholder 1"/>
+          <p:cNvSpPr>
+            <a:spLocks noGrp="1" noRot="1" noChangeAspect="1"/>
+          </p:cNvSpPr>
+          <p:nvPr>
+            <p:ph type="sldImg"/>
+          </p:nvPr>
+        </p:nvSpPr>
+        <p:spPr/>
+      </p:sp>
+      <p:sp>
+        <p:nvSpPr>
+          <p:cNvPr id="3" name="Notes Placeholder 2"/>
+          <p:cNvSpPr>
+            <a:spLocks noGrp="1"/>
+          </p:cNvSpPr>
+          <p:nvPr>
+            <p:ph type="body" idx="1"/>
+          </p:nvPr>
+        </p:nvSpPr>
+        <p:spPr/>
+        <p:txBody>
+          <a:bodyPr/>
+          <a:lstStyle/>
+          <a:p>
+            <a:r>
+              <a:rPr lang="en-US" dirty="0"/>
+              <a:t/>
+            </a:r>
+            <a:endParaRPr lang="en-US" dirty="0"/>
+          </a:p>
+        </p:txBody>
+      </p:sp>
+      <p:sp>
+        <p:nvSpPr>
+          <p:cNvPr id="4" name="Slide Number Placeholder 3"/>
+          <p:cNvSpPr>
+            <a:spLocks noGrp="1"/>
+          </p:cNvSpPr>
+          <p:nvPr>
+            <p:ph type="sldNum" sz="quarter" idx="10"/>
+          </p:nvPr>
+        </p:nvSpPr>
+        <p:spPr/>
+        <p:txBody>
+          <a:bodyPr/>
+          <a:lstStyle/>
+          <a:p>
+            <a:fld id="{F7021451-1387-4CA6-816F-3879F97B5CBC}" type="slidenum">
+              <a:rPr lang="en-US"/>
+              <a:t>31</a:t>
+            </a:fld>
+            <a:endParaRPr lang="en-US"/>
+          </a:p>
+        </p:txBody>
+      </p:sp>
+    </p:spTree>
+    <p:extLst>
+      <p:ext uri="{BB962C8B-B14F-4D97-AF65-F5344CB8AC3E}">
+        <p14:creationId xmlns:p14="http://schemas.microsoft.com/office/powerpoint/2010/main" val="1024086991"/>
+      </p:ext>
+    </p:extLst>
+  </p:cSld>
+  <p:clrMapOvr>
+    <a:masterClrMapping/>
+  </p:clrMapOvr>
+</p:notes>
+</file>
+
+<file path=ppt/notesSlides/notesSlide32.xml><?xml version="1.0" encoding="utf-8"?>
+<p:notes xmlns:a="http://schemas.openxmlformats.org/drawingml/2006/main" xmlns:r="http://schemas.openxmlformats.org/officeDocument/2006/relationships" xmlns:p="http://schemas.openxmlformats.org/presentationml/2006/main">
+  <p:cSld>
+    <p:spTree>
+      <p:nvGrpSpPr>
+        <p:cNvPr id="1" name=""/>
+        <p:cNvGrpSpPr/>
+        <p:nvPr/>
+      </p:nvGrpSpPr>
+      <p:grpSpPr>
+        <a:xfrm>
+          <a:off x="0" y="0"/>
+          <a:ext cx="0" cy="0"/>
+          <a:chOff x="0" y="0"/>
+          <a:chExt cx="0" cy="0"/>
+        </a:xfrm>
+      </p:grpSpPr>
+      <p:sp>
+        <p:nvSpPr>
+          <p:cNvPr id="2" name="Slide Image Placeholder 1"/>
+          <p:cNvSpPr>
+            <a:spLocks noGrp="1" noRot="1" noChangeAspect="1"/>
+          </p:cNvSpPr>
+          <p:nvPr>
+            <p:ph type="sldImg"/>
+          </p:nvPr>
+        </p:nvSpPr>
+        <p:spPr/>
+      </p:sp>
+      <p:sp>
+        <p:nvSpPr>
+          <p:cNvPr id="3" name="Notes Placeholder 2"/>
+          <p:cNvSpPr>
+            <a:spLocks noGrp="1"/>
+          </p:cNvSpPr>
+          <p:nvPr>
+            <p:ph type="body" idx="1"/>
+          </p:nvPr>
+        </p:nvSpPr>
+        <p:spPr/>
+        <p:txBody>
+          <a:bodyPr/>
+          <a:lstStyle/>
+          <a:p>
+            <a:r>
+              <a:rPr lang="en-US" dirty="0"/>
+              <a:t>arXiv v4（2025-01-08）を本文（Sec. 1–4）と付録 C（Limitations）まで読了。公式の題名は「Not All Tokens Are What You Need for Pretraining」（arXiv 版は「Rho-1: Not All Tokens Are What You Need」）。https://neurips.cc/virtual/2024/awards_detail で受賞区分を確認（2026-10-28）。選考委員会のコメント（公式ブログ）は到達できず未確認。</a:t>
+            </a:r>
+            <a:endParaRPr lang="en-US" dirty="0"/>
+          </a:p>
+        </p:txBody>
+      </p:sp>
+      <p:sp>
+        <p:nvSpPr>
+          <p:cNvPr id="4" name="Slide Number Placeholder 3"/>
+          <p:cNvSpPr>
+            <a:spLocks noGrp="1"/>
+          </p:cNvSpPr>
+          <p:nvPr>
+            <p:ph type="sldNum" sz="quarter" idx="10"/>
+          </p:nvPr>
+        </p:nvSpPr>
+        <p:spPr/>
+        <p:txBody>
+          <a:bodyPr/>
+          <a:lstStyle/>
+          <a:p>
+            <a:fld id="{F7021451-1387-4CA6-816F-3879F97B5CBC}" type="slidenum">
+              <a:rPr lang="en-US"/>
+              <a:t>32</a:t>
+            </a:fld>
+            <a:endParaRPr lang="en-US"/>
+          </a:p>
+        </p:txBody>
+      </p:sp>
+    </p:spTree>
+    <p:extLst>
+      <p:ext uri="{BB962C8B-B14F-4D97-AF65-F5344CB8AC3E}">
+        <p14:creationId xmlns:p14="http://schemas.microsoft.com/office/powerpoint/2010/main" val="1024086991"/>
+      </p:ext>
+    </p:extLst>
+  </p:cSld>
+  <p:clrMapOvr>
+    <a:masterClrMapping/>
+  </p:clrMapOvr>
+</p:notes>
+</file>
+
+<file path=ppt/notesSlides/notesSlide33.xml><?xml version="1.0" encoding="utf-8"?>
+<p:notes xmlns:a="http://schemas.openxmlformats.org/drawingml/2006/main" xmlns:r="http://schemas.openxmlformats.org/officeDocument/2006/relationships" xmlns:p="http://schemas.openxmlformats.org/presentationml/2006/main">
+  <p:cSld>
+    <p:spTree>
+      <p:nvGrpSpPr>
+        <p:cNvPr id="1" name=""/>
+        <p:cNvGrpSpPr/>
+        <p:nvPr/>
+      </p:nvGrpSpPr>
+      <p:grpSpPr>
+        <a:xfrm>
+          <a:off x="0" y="0"/>
+          <a:ext cx="0" cy="0"/>
+          <a:chOff x="0" y="0"/>
+          <a:chExt cx="0" cy="0"/>
+        </a:xfrm>
+      </p:grpSpPr>
+      <p:sp>
+        <p:nvSpPr>
+          <p:cNvPr id="2" name="Slide Image Placeholder 1"/>
+          <p:cNvSpPr>
+            <a:spLocks noGrp="1" noRot="1" noChangeAspect="1"/>
+          </p:cNvSpPr>
+          <p:nvPr>
+            <p:ph type="sldImg"/>
+          </p:nvPr>
+        </p:nvSpPr>
+        <p:spPr/>
+      </p:sp>
+      <p:sp>
+        <p:nvSpPr>
+          <p:cNvPr id="3" name="Notes Placeholder 2"/>
+          <p:cNvSpPr>
+            <a:spLocks noGrp="1"/>
+          </p:cNvSpPr>
+          <p:nvPr>
+            <p:ph type="body" idx="1"/>
+          </p:nvPr>
+        </p:nvSpPr>
+        <p:spPr/>
+        <p:txBody>
+          <a:bodyPr/>
+          <a:lstStyle/>
+          <a:p>
+            <a:r>
+              <a:rPr lang="en-US" dirty="0"/>
+              <a:t/>
+            </a:r>
+            <a:endParaRPr lang="en-US" dirty="0"/>
+          </a:p>
+        </p:txBody>
+      </p:sp>
+      <p:sp>
+        <p:nvSpPr>
+          <p:cNvPr id="4" name="Slide Number Placeholder 3"/>
+          <p:cNvSpPr>
+            <a:spLocks noGrp="1"/>
+          </p:cNvSpPr>
+          <p:nvPr>
+            <p:ph type="sldNum" sz="quarter" idx="10"/>
+          </p:nvPr>
+        </p:nvSpPr>
+        <p:spPr/>
+        <p:txBody>
+          <a:bodyPr/>
+          <a:lstStyle/>
+          <a:p>
+            <a:fld id="{F7021451-1387-4CA6-816F-3879F97B5CBC}" type="slidenum">
+              <a:rPr lang="en-US"/>
+              <a:t>33</a:t>
             </a:fld>
             <a:endParaRPr lang="en-US"/>
           </a:p>
@@ -2198,7 +2910,7 @@
           <a:p>
             <a:r>
               <a:rPr lang="en-US" dirty="0"/>
-              <a:t>arXiv v2（2026-10-22）を本文（Sec. 1–7）まで読了。証明（付録）は未精読。Oral 区分は著者の arXiv コメントによる。</a:t>
+              <a:t>arXiv v2（2026-10-22）を本文（Sec. 1–7）まで読了。証明（付録）は未精読。Oral 区分は NeurIPS 公式の Oral 一覧（Paris 会場, https://neurips.cc/virtual/2026/oral/153301）で確認（2026-10-28）。</a:t>
             </a:r>
             <a:endParaRPr lang="en-US" dirty="0"/>
           </a:p>
@@ -2374,7 +3086,7 @@
           <a:p>
             <a:r>
               <a:rPr lang="en-US" dirty="0"/>
-              <a:t>arXiv v4（2026-09-29）を本文まで読了。Oral 区分は著者の arXiv コメントによる。</a:t>
+              <a:t>arXiv v4（2026-09-29）を本文まで読了。Oral 区分は NeurIPS 公式の Oral 一覧（Sydney 会場, https://neurips.cc/virtual/2026/oral/153424）で確認（2026-10-28）。公式の題名は「ProCompNav:」を付けない「Proactive Instance Navigation with Comparative Judgment for Ambiguous User Queries」。</a:t>
             </a:r>
             <a:endParaRPr lang="en-US" dirty="0"/>
           </a:p>
@@ -2550,7 +3262,7 @@
           <a:p>
             <a:r>
               <a:rPr lang="en-US" dirty="0"/>
-              <a:t>arXiv v2（2026-10-15）を本文まで読了。Oral 区分は著者の arXiv コメント（Oral, Top 0.4%）による。</a:t>
+              <a:t>arXiv v2（2026-10-15）を本文まで読了。Oral 区分は NeurIPS 公式の Oral 一覧（Sydney 会場, https://neurips.cc/virtual/2026/oral/150086）で確認（2026-10-28）。公式の題名は「Thinking with Images as Continuous Policy: Numerical Visual Chain-of-Thought」（arXiv 版は Continuous Actions）。</a:t>
             </a:r>
             <a:endParaRPr lang="en-US" dirty="0"/>
           </a:p>
@@ -5110,7 +5822,7 @@
                 <a:ea typeface="Meiryo" pitchFamily="34" charset="-122"/>
                 <a:cs typeface="Meiryo" pitchFamily="34" charset="-120"/>
               </a:rPr>
-              <a:t>学会調査 ｜ 先行研究調査（2026-10-27）</a:t>
+              <a:t>学会調査 ｜ 先行研究調査（2026-10-28）</a:t>
             </a:r>
             <a:endParaRPr lang="en-US" sz="1200" dirty="0"/>
           </a:p>
@@ -5195,7 +5907,7 @@
                 <a:ea typeface="Meiryo" pitchFamily="34" charset="-122"/>
                 <a:cs typeface="Meiryo" pitchFamily="34" charset="-120"/>
               </a:rPr>
-              <a:t>NeurIPS は NeurIPS Foundation が主催する機械学習最大級の学会。投稿は 2024 の 15,671 本から 2026 の 30,709 本へ倍増し、採択率は約25%。2025 の受賞は LLM の注意機構・RL の限界・スケーリング則・拡散モデルの汎化など「なぜ効くか」を問う研究と、学習理論の難問の解決が並んだ。2026 の受賞は 12 月の会期直前に発表予定のため、本資料では Oral 採択論文を「話題」として載せる。</a:t>
+              <a:t>NeurIPS は NeurIPS Foundation が主催する機械学習最大級の学会。投稿は 2024 の 15,671 本から 2026 の 30,709 本へ倍増し、採択率は約25%。2024〜2025 の受賞は画像生成・LLM の学習法・RL の限界・スケーリング則など「なぜ効くか」を問う研究と、学習理論の難問の解決が並んだ。2026 の受賞は会期直前に発表予定のため、公式 Oral 一覧で確認した論文を「話題」として載せる。</a:t>
             </a:r>
             <a:endParaRPr lang="en-US" sz="1300" dirty="0"/>
           </a:p>
@@ -5271,7 +5983,7 @@
                 <a:gridCol w="1828800"/>
                 <a:gridCol w="1401775"/>
               </a:tblGrid>
-              <a:tr h="295422">
+              <a:tr h="225911">
                 <a:tc>
                   <a:txBody>
                     <a:bodyPr/>
@@ -5281,7 +5993,7 @@
                         <a:buNone/>
                       </a:pPr>
                       <a:r>
-                        <a:rPr lang="en-US" sz="1000" b="1" dirty="0">
+                        <a:rPr lang="en-US" sz="900" b="1" dirty="0">
                           <a:solidFill>
                             <a:srgbClr val="FFFFFF"/>
                           </a:solidFill>
@@ -5291,7 +6003,7 @@
                         </a:rPr>
                         <a:t>#</a:t>
                       </a:r>
-                      <a:endParaRPr lang="en-US" sz="1000" dirty="0">
+                      <a:endParaRPr lang="en-US" sz="900" dirty="0">
                         <a:latin typeface="Meiryo" charset="0"/>
                         <a:ea typeface="Meiryo" charset="0"/>
                         <a:cs typeface="Meiryo" charset="0"/>
@@ -5349,7 +6061,7 @@
                         <a:buNone/>
                       </a:pPr>
                       <a:r>
-                        <a:rPr lang="en-US" sz="1000" b="1" dirty="0">
+                        <a:rPr lang="en-US" sz="900" b="1" dirty="0">
                           <a:solidFill>
                             <a:srgbClr val="FFFFFF"/>
                           </a:solidFill>
@@ -5359,7 +6071,7 @@
                         </a:rPr>
                         <a:t>年</a:t>
                       </a:r>
-                      <a:endParaRPr lang="en-US" sz="1000" dirty="0">
+                      <a:endParaRPr lang="en-US" sz="900" dirty="0">
                         <a:latin typeface="Meiryo" charset="0"/>
                         <a:ea typeface="Meiryo" charset="0"/>
                         <a:cs typeface="Meiryo" charset="0"/>
@@ -5417,7 +6129,7 @@
                         <a:buNone/>
                       </a:pPr>
                       <a:r>
-                        <a:rPr lang="en-US" sz="1000" b="1" dirty="0">
+                        <a:rPr lang="en-US" sz="900" b="1" dirty="0">
                           <a:solidFill>
                             <a:srgbClr val="FFFFFF"/>
                           </a:solidFill>
@@ -5427,7 +6139,7 @@
                         </a:rPr>
                         <a:t>論文</a:t>
                       </a:r>
-                      <a:endParaRPr lang="en-US" sz="1000" dirty="0">
+                      <a:endParaRPr lang="en-US" sz="900" dirty="0">
                         <a:latin typeface="Meiryo" charset="0"/>
                         <a:ea typeface="Meiryo" charset="0"/>
                         <a:cs typeface="Meiryo" charset="0"/>
@@ -5485,7 +6197,7 @@
                         <a:buNone/>
                       </a:pPr>
                       <a:r>
-                        <a:rPr lang="en-US" sz="1000" b="1" dirty="0">
+                        <a:rPr lang="en-US" sz="900" b="1" dirty="0">
                           <a:solidFill>
                             <a:srgbClr val="FFFFFF"/>
                           </a:solidFill>
@@ -5495,7 +6207,7 @@
                         </a:rPr>
                         <a:t>発表</a:t>
                       </a:r>
-                      <a:endParaRPr lang="en-US" sz="1000" dirty="0">
+                      <a:endParaRPr lang="en-US" sz="900" dirty="0">
                         <a:latin typeface="Meiryo" charset="0"/>
                         <a:ea typeface="Meiryo" charset="0"/>
                         <a:cs typeface="Meiryo" charset="0"/>
@@ -5553,7 +6265,7 @@
                         <a:buNone/>
                       </a:pPr>
                       <a:r>
-                        <a:rPr lang="en-US" sz="1000" b="1" dirty="0">
+                        <a:rPr lang="en-US" sz="900" b="1" dirty="0">
                           <a:solidFill>
                             <a:srgbClr val="FFFFFF"/>
                           </a:solidFill>
@@ -5563,7 +6275,7 @@
                         </a:rPr>
                         <a:t>区分</a:t>
                       </a:r>
-                      <a:endParaRPr lang="en-US" sz="1000" dirty="0">
+                      <a:endParaRPr lang="en-US" sz="900" dirty="0">
                         <a:latin typeface="Meiryo" charset="0"/>
                         <a:ea typeface="Meiryo" charset="0"/>
                         <a:cs typeface="Meiryo" charset="0"/>
@@ -5613,7 +6325,7 @@
                   </a:tcPr>
                 </a:tc>
               </a:tr>
-              <a:tr h="295422">
+              <a:tr h="225911">
                 <a:tc>
                   <a:txBody>
                     <a:bodyPr/>
@@ -5623,7 +6335,7 @@
                         <a:buNone/>
                       </a:pPr>
                       <a:r>
-                        <a:rPr lang="en-US" sz="1000" dirty="0">
+                        <a:rPr lang="en-US" sz="900" dirty="0">
                           <a:solidFill>
                             <a:srgbClr val="1E2433"/>
                           </a:solidFill>
@@ -5633,7 +6345,7 @@
                         </a:rPr>
                         <a:t>1</a:t>
                       </a:r>
-                      <a:endParaRPr lang="en-US" sz="1000" dirty="0">
+                      <a:endParaRPr lang="en-US" sz="900" dirty="0">
                         <a:latin typeface="Meiryo" charset="0"/>
                         <a:ea typeface="Meiryo" charset="0"/>
                         <a:cs typeface="Meiryo" charset="0"/>
@@ -5691,7 +6403,7 @@
                         <a:buNone/>
                       </a:pPr>
                       <a:r>
-                        <a:rPr lang="en-US" sz="1000" dirty="0">
+                        <a:rPr lang="en-US" sz="900" dirty="0">
                           <a:solidFill>
                             <a:srgbClr val="1E2433"/>
                           </a:solidFill>
@@ -5701,7 +6413,7 @@
                         </a:rPr>
                         <a:t>2026</a:t>
                       </a:r>
-                      <a:endParaRPr lang="en-US" sz="1000" dirty="0">
+                      <a:endParaRPr lang="en-US" sz="900" dirty="0">
                         <a:latin typeface="Meiryo" charset="0"/>
                         <a:ea typeface="Meiryo" charset="0"/>
                         <a:cs typeface="Meiryo" charset="0"/>
@@ -5759,7 +6471,7 @@
                         <a:buNone/>
                       </a:pPr>
                       <a:r>
-                        <a:rPr lang="en-US" sz="1000" dirty="0">
+                        <a:rPr lang="en-US" sz="900" dirty="0">
                           <a:solidFill>
                             <a:srgbClr val="1E2433"/>
                           </a:solidFill>
@@ -5769,7 +6481,7 @@
                         </a:rPr>
                         <a:t>LCVN (Dong+ 2026)</a:t>
                       </a:r>
-                      <a:endParaRPr lang="en-US" sz="1000" dirty="0">
+                      <a:endParaRPr lang="en-US" sz="900" dirty="0">
                         <a:latin typeface="Meiryo" charset="0"/>
                         <a:ea typeface="Meiryo" charset="0"/>
                         <a:cs typeface="Meiryo" charset="0"/>
@@ -5827,7 +6539,7 @@
                         <a:buNone/>
                       </a:pPr>
                       <a:r>
-                        <a:rPr lang="en-US" sz="1000" dirty="0">
+                        <a:rPr lang="en-US" sz="900" dirty="0">
                           <a:solidFill>
                             <a:srgbClr val="1E2433"/>
                           </a:solidFill>
@@ -5837,7 +6549,7 @@
                         </a:rPr>
                         <a:t>NeurIPS 2026</a:t>
                       </a:r>
-                      <a:endParaRPr lang="en-US" sz="1000" dirty="0">
+                      <a:endParaRPr lang="en-US" sz="900" dirty="0">
                         <a:latin typeface="Meiryo" charset="0"/>
                         <a:ea typeface="Meiryo" charset="0"/>
                         <a:cs typeface="Meiryo" charset="0"/>
@@ -5895,7 +6607,7 @@
                         <a:buNone/>
                       </a:pPr>
                       <a:r>
-                        <a:rPr lang="en-US" sz="1000" dirty="0">
+                        <a:rPr lang="en-US" sz="900" dirty="0">
                           <a:solidFill>
                             <a:srgbClr val="1E2433"/>
                           </a:solidFill>
@@ -5905,7 +6617,7 @@
                         </a:rPr>
                         <a:t>話題</a:t>
                       </a:r>
-                      <a:endParaRPr lang="en-US" sz="1000" dirty="0">
+                      <a:endParaRPr lang="en-US" sz="900" dirty="0">
                         <a:latin typeface="Meiryo" charset="0"/>
                         <a:ea typeface="Meiryo" charset="0"/>
                         <a:cs typeface="Meiryo" charset="0"/>
@@ -5955,7 +6667,7 @@
                   </a:tcPr>
                 </a:tc>
               </a:tr>
-              <a:tr h="295422">
+              <a:tr h="225911">
                 <a:tc>
                   <a:txBody>
                     <a:bodyPr/>
@@ -5965,7 +6677,7 @@
                         <a:buNone/>
                       </a:pPr>
                       <a:r>
-                        <a:rPr lang="en-US" sz="1000" dirty="0">
+                        <a:rPr lang="en-US" sz="900" dirty="0">
                           <a:solidFill>
                             <a:srgbClr val="1E2433"/>
                           </a:solidFill>
@@ -5975,7 +6687,7 @@
                         </a:rPr>
                         <a:t>2</a:t>
                       </a:r>
-                      <a:endParaRPr lang="en-US" sz="1000" dirty="0">
+                      <a:endParaRPr lang="en-US" sz="900" dirty="0">
                         <a:latin typeface="Meiryo" charset="0"/>
                         <a:ea typeface="Meiryo" charset="0"/>
                         <a:cs typeface="Meiryo" charset="0"/>
@@ -6033,7 +6745,7 @@
                         <a:buNone/>
                       </a:pPr>
                       <a:r>
-                        <a:rPr lang="en-US" sz="1000" dirty="0">
+                        <a:rPr lang="en-US" sz="900" dirty="0">
                           <a:solidFill>
                             <a:srgbClr val="1E2433"/>
                           </a:solidFill>
@@ -6043,7 +6755,7 @@
                         </a:rPr>
                         <a:t>2026</a:t>
                       </a:r>
-                      <a:endParaRPr lang="en-US" sz="1000" dirty="0">
+                      <a:endParaRPr lang="en-US" sz="900" dirty="0">
                         <a:latin typeface="Meiryo" charset="0"/>
                         <a:ea typeface="Meiryo" charset="0"/>
                         <a:cs typeface="Meiryo" charset="0"/>
@@ -6101,7 +6813,7 @@
                         <a:buNone/>
                       </a:pPr>
                       <a:r>
-                        <a:rPr lang="en-US" sz="1000" dirty="0">
+                        <a:rPr lang="en-US" sz="900" dirty="0">
                           <a:solidFill>
                             <a:srgbClr val="1E2433"/>
                           </a:solidFill>
@@ -6111,7 +6823,7 @@
                         </a:rPr>
                         <a:t>Control-Maximization (Modirshanechi+ 2026)</a:t>
                       </a:r>
-                      <a:endParaRPr lang="en-US" sz="1000" dirty="0">
+                      <a:endParaRPr lang="en-US" sz="900" dirty="0">
                         <a:latin typeface="Meiryo" charset="0"/>
                         <a:ea typeface="Meiryo" charset="0"/>
                         <a:cs typeface="Meiryo" charset="0"/>
@@ -6169,7 +6881,7 @@
                         <a:buNone/>
                       </a:pPr>
                       <a:r>
-                        <a:rPr lang="en-US" sz="1000" dirty="0">
+                        <a:rPr lang="en-US" sz="900" dirty="0">
                           <a:solidFill>
                             <a:srgbClr val="1E2433"/>
                           </a:solidFill>
@@ -6179,7 +6891,7 @@
                         </a:rPr>
                         <a:t>NeurIPS 2026</a:t>
                       </a:r>
-                      <a:endParaRPr lang="en-US" sz="1000" dirty="0">
+                      <a:endParaRPr lang="en-US" sz="900" dirty="0">
                         <a:latin typeface="Meiryo" charset="0"/>
                         <a:ea typeface="Meiryo" charset="0"/>
                         <a:cs typeface="Meiryo" charset="0"/>
@@ -6237,7 +6949,7 @@
                         <a:buNone/>
                       </a:pPr>
                       <a:r>
-                        <a:rPr lang="en-US" sz="1000" dirty="0">
+                        <a:rPr lang="en-US" sz="900" dirty="0">
                           <a:solidFill>
                             <a:srgbClr val="1E2433"/>
                           </a:solidFill>
@@ -6247,7 +6959,7 @@
                         </a:rPr>
                         <a:t>話題</a:t>
                       </a:r>
-                      <a:endParaRPr lang="en-US" sz="1000" dirty="0">
+                      <a:endParaRPr lang="en-US" sz="900" dirty="0">
                         <a:latin typeface="Meiryo" charset="0"/>
                         <a:ea typeface="Meiryo" charset="0"/>
                         <a:cs typeface="Meiryo" charset="0"/>
@@ -6297,7 +7009,7 @@
                   </a:tcPr>
                 </a:tc>
               </a:tr>
-              <a:tr h="295422">
+              <a:tr h="225911">
                 <a:tc>
                   <a:txBody>
                     <a:bodyPr/>
@@ -6307,7 +7019,7 @@
                         <a:buNone/>
                       </a:pPr>
                       <a:r>
-                        <a:rPr lang="en-US" sz="1000" dirty="0">
+                        <a:rPr lang="en-US" sz="900" dirty="0">
                           <a:solidFill>
                             <a:srgbClr val="1E2433"/>
                           </a:solidFill>
@@ -6317,7 +7029,7 @@
                         </a:rPr>
                         <a:t>3</a:t>
                       </a:r>
-                      <a:endParaRPr lang="en-US" sz="1000" dirty="0">
+                      <a:endParaRPr lang="en-US" sz="900" dirty="0">
                         <a:latin typeface="Meiryo" charset="0"/>
                         <a:ea typeface="Meiryo" charset="0"/>
                         <a:cs typeface="Meiryo" charset="0"/>
@@ -6375,7 +7087,7 @@
                         <a:buNone/>
                       </a:pPr>
                       <a:r>
-                        <a:rPr lang="en-US" sz="1000" dirty="0">
+                        <a:rPr lang="en-US" sz="900" dirty="0">
                           <a:solidFill>
                             <a:srgbClr val="1E2433"/>
                           </a:solidFill>
@@ -6385,7 +7097,7 @@
                         </a:rPr>
                         <a:t>2026</a:t>
                       </a:r>
-                      <a:endParaRPr lang="en-US" sz="1000" dirty="0">
+                      <a:endParaRPr lang="en-US" sz="900" dirty="0">
                         <a:latin typeface="Meiryo" charset="0"/>
                         <a:ea typeface="Meiryo" charset="0"/>
                         <a:cs typeface="Meiryo" charset="0"/>
@@ -6443,7 +7155,7 @@
                         <a:buNone/>
                       </a:pPr>
                       <a:r>
-                        <a:rPr lang="en-US" sz="1000" dirty="0">
+                        <a:rPr lang="en-US" sz="900" dirty="0">
                           <a:solidFill>
                             <a:srgbClr val="1E2433"/>
                           </a:solidFill>
@@ -6453,7 +7165,7 @@
                         </a:rPr>
                         <a:t>ProCompNav (Kwon+ 2026)</a:t>
                       </a:r>
-                      <a:endParaRPr lang="en-US" sz="1000" dirty="0">
+                      <a:endParaRPr lang="en-US" sz="900" dirty="0">
                         <a:latin typeface="Meiryo" charset="0"/>
                         <a:ea typeface="Meiryo" charset="0"/>
                         <a:cs typeface="Meiryo" charset="0"/>
@@ -6511,7 +7223,7 @@
                         <a:buNone/>
                       </a:pPr>
                       <a:r>
-                        <a:rPr lang="en-US" sz="1000" dirty="0">
+                        <a:rPr lang="en-US" sz="900" dirty="0">
                           <a:solidFill>
                             <a:srgbClr val="1E2433"/>
                           </a:solidFill>
@@ -6521,7 +7233,7 @@
                         </a:rPr>
                         <a:t>NeurIPS 2026</a:t>
                       </a:r>
-                      <a:endParaRPr lang="en-US" sz="1000" dirty="0">
+                      <a:endParaRPr lang="en-US" sz="900" dirty="0">
                         <a:latin typeface="Meiryo" charset="0"/>
                         <a:ea typeface="Meiryo" charset="0"/>
                         <a:cs typeface="Meiryo" charset="0"/>
@@ -6579,7 +7291,7 @@
                         <a:buNone/>
                       </a:pPr>
                       <a:r>
-                        <a:rPr lang="en-US" sz="1000" dirty="0">
+                        <a:rPr lang="en-US" sz="900" dirty="0">
                           <a:solidFill>
                             <a:srgbClr val="1E2433"/>
                           </a:solidFill>
@@ -6589,7 +7301,7 @@
                         </a:rPr>
                         <a:t>話題</a:t>
                       </a:r>
-                      <a:endParaRPr lang="en-US" sz="1000" dirty="0">
+                      <a:endParaRPr lang="en-US" sz="900" dirty="0">
                         <a:latin typeface="Meiryo" charset="0"/>
                         <a:ea typeface="Meiryo" charset="0"/>
                         <a:cs typeface="Meiryo" charset="0"/>
@@ -6639,7 +7351,7 @@
                   </a:tcPr>
                 </a:tc>
               </a:tr>
-              <a:tr h="295422">
+              <a:tr h="225911">
                 <a:tc>
                   <a:txBody>
                     <a:bodyPr/>
@@ -6649,7 +7361,7 @@
                         <a:buNone/>
                       </a:pPr>
                       <a:r>
-                        <a:rPr lang="en-US" sz="1000" dirty="0">
+                        <a:rPr lang="en-US" sz="900" dirty="0">
                           <a:solidFill>
                             <a:srgbClr val="1E2433"/>
                           </a:solidFill>
@@ -6659,7 +7371,7 @@
                         </a:rPr>
                         <a:t>4</a:t>
                       </a:r>
-                      <a:endParaRPr lang="en-US" sz="1000" dirty="0">
+                      <a:endParaRPr lang="en-US" sz="900" dirty="0">
                         <a:latin typeface="Meiryo" charset="0"/>
                         <a:ea typeface="Meiryo" charset="0"/>
                         <a:cs typeface="Meiryo" charset="0"/>
@@ -6717,7 +7429,7 @@
                         <a:buNone/>
                       </a:pPr>
                       <a:r>
-                        <a:rPr lang="en-US" sz="1000" dirty="0">
+                        <a:rPr lang="en-US" sz="900" dirty="0">
                           <a:solidFill>
                             <a:srgbClr val="1E2433"/>
                           </a:solidFill>
@@ -6727,7 +7439,7 @@
                         </a:rPr>
                         <a:t>2026</a:t>
                       </a:r>
-                      <a:endParaRPr lang="en-US" sz="1000" dirty="0">
+                      <a:endParaRPr lang="en-US" sz="900" dirty="0">
                         <a:latin typeface="Meiryo" charset="0"/>
                         <a:ea typeface="Meiryo" charset="0"/>
                         <a:cs typeface="Meiryo" charset="0"/>
@@ -6785,7 +7497,7 @@
                         <a:buNone/>
                       </a:pPr>
                       <a:r>
-                        <a:rPr lang="en-US" sz="1000" dirty="0">
+                        <a:rPr lang="en-US" sz="900" dirty="0">
                           <a:solidFill>
                             <a:srgbClr val="1E2433"/>
                           </a:solidFill>
@@ -6795,7 +7507,7 @@
                         </a:rPr>
                         <a:t>NV-CoT (Zhao+ 2026)</a:t>
                       </a:r>
-                      <a:endParaRPr lang="en-US" sz="1000" dirty="0">
+                      <a:endParaRPr lang="en-US" sz="900" dirty="0">
                         <a:latin typeface="Meiryo" charset="0"/>
                         <a:ea typeface="Meiryo" charset="0"/>
                         <a:cs typeface="Meiryo" charset="0"/>
@@ -6853,7 +7565,7 @@
                         <a:buNone/>
                       </a:pPr>
                       <a:r>
-                        <a:rPr lang="en-US" sz="1000" dirty="0">
+                        <a:rPr lang="en-US" sz="900" dirty="0">
                           <a:solidFill>
                             <a:srgbClr val="1E2433"/>
                           </a:solidFill>
@@ -6863,7 +7575,7 @@
                         </a:rPr>
                         <a:t>NeurIPS 2026</a:t>
                       </a:r>
-                      <a:endParaRPr lang="en-US" sz="1000" dirty="0">
+                      <a:endParaRPr lang="en-US" sz="900" dirty="0">
                         <a:latin typeface="Meiryo" charset="0"/>
                         <a:ea typeface="Meiryo" charset="0"/>
                         <a:cs typeface="Meiryo" charset="0"/>
@@ -6921,7 +7633,7 @@
                         <a:buNone/>
                       </a:pPr>
                       <a:r>
-                        <a:rPr lang="en-US" sz="1000" dirty="0">
+                        <a:rPr lang="en-US" sz="900" dirty="0">
                           <a:solidFill>
                             <a:srgbClr val="1E2433"/>
                           </a:solidFill>
@@ -6931,7 +7643,7 @@
                         </a:rPr>
                         <a:t>話題</a:t>
                       </a:r>
-                      <a:endParaRPr lang="en-US" sz="1000" dirty="0">
+                      <a:endParaRPr lang="en-US" sz="900" dirty="0">
                         <a:latin typeface="Meiryo" charset="0"/>
                         <a:ea typeface="Meiryo" charset="0"/>
                         <a:cs typeface="Meiryo" charset="0"/>
@@ -6981,7 +7693,7 @@
                   </a:tcPr>
                 </a:tc>
               </a:tr>
-              <a:tr h="295422">
+              <a:tr h="225911">
                 <a:tc>
                   <a:txBody>
                     <a:bodyPr/>
@@ -6991,7 +7703,7 @@
                         <a:buNone/>
                       </a:pPr>
                       <a:r>
-                        <a:rPr lang="en-US" sz="1000" dirty="0">
+                        <a:rPr lang="en-US" sz="900" dirty="0">
                           <a:solidFill>
                             <a:srgbClr val="1E2433"/>
                           </a:solidFill>
@@ -7001,7 +7713,7 @@
                         </a:rPr>
                         <a:t>5</a:t>
                       </a:r>
-                      <a:endParaRPr lang="en-US" sz="1000" dirty="0">
+                      <a:endParaRPr lang="en-US" sz="900" dirty="0">
                         <a:latin typeface="Meiryo" charset="0"/>
                         <a:ea typeface="Meiryo" charset="0"/>
                         <a:cs typeface="Meiryo" charset="0"/>
@@ -7059,7 +7771,7 @@
                         <a:buNone/>
                       </a:pPr>
                       <a:r>
-                        <a:rPr lang="en-US" sz="1000" dirty="0">
+                        <a:rPr lang="en-US" sz="900" dirty="0">
                           <a:solidFill>
                             <a:srgbClr val="1E2433"/>
                           </a:solidFill>
@@ -7069,7 +7781,7 @@
                         </a:rPr>
                         <a:t>2025</a:t>
                       </a:r>
-                      <a:endParaRPr lang="en-US" sz="1000" dirty="0">
+                      <a:endParaRPr lang="en-US" sz="900" dirty="0">
                         <a:latin typeface="Meiryo" charset="0"/>
                         <a:ea typeface="Meiryo" charset="0"/>
                         <a:cs typeface="Meiryo" charset="0"/>
@@ -7127,7 +7839,7 @@
                         <a:buNone/>
                       </a:pPr>
                       <a:r>
-                        <a:rPr lang="en-US" sz="1000" dirty="0">
+                        <a:rPr lang="en-US" sz="900" dirty="0">
                           <a:solidFill>
                             <a:srgbClr val="1E2433"/>
                           </a:solidFill>
@@ -7137,7 +7849,7 @@
                         </a:rPr>
                         <a:t>Gated Attention (Qiu+ 2025)</a:t>
                       </a:r>
-                      <a:endParaRPr lang="en-US" sz="1000" dirty="0">
+                      <a:endParaRPr lang="en-US" sz="900" dirty="0">
                         <a:latin typeface="Meiryo" charset="0"/>
                         <a:ea typeface="Meiryo" charset="0"/>
                         <a:cs typeface="Meiryo" charset="0"/>
@@ -7195,7 +7907,7 @@
                         <a:buNone/>
                       </a:pPr>
                       <a:r>
-                        <a:rPr lang="en-US" sz="1000" dirty="0">
+                        <a:rPr lang="en-US" sz="900" dirty="0">
                           <a:solidFill>
                             <a:srgbClr val="1E2433"/>
                           </a:solidFill>
@@ -7205,7 +7917,7 @@
                         </a:rPr>
                         <a:t>NeurIPS 2025</a:t>
                       </a:r>
-                      <a:endParaRPr lang="en-US" sz="1000" dirty="0">
+                      <a:endParaRPr lang="en-US" sz="900" dirty="0">
                         <a:latin typeface="Meiryo" charset="0"/>
                         <a:ea typeface="Meiryo" charset="0"/>
                         <a:cs typeface="Meiryo" charset="0"/>
@@ -7263,7 +7975,7 @@
                         <a:buNone/>
                       </a:pPr>
                       <a:r>
-                        <a:rPr lang="en-US" sz="1000" dirty="0">
+                        <a:rPr lang="en-US" sz="900" dirty="0">
                           <a:solidFill>
                             <a:srgbClr val="1E2433"/>
                           </a:solidFill>
@@ -7273,7 +7985,7 @@
                         </a:rPr>
                         <a:t>受賞</a:t>
                       </a:r>
-                      <a:endParaRPr lang="en-US" sz="1000" dirty="0">
+                      <a:endParaRPr lang="en-US" sz="900" dirty="0">
                         <a:latin typeface="Meiryo" charset="0"/>
                         <a:ea typeface="Meiryo" charset="0"/>
                         <a:cs typeface="Meiryo" charset="0"/>
@@ -7323,7 +8035,7 @@
                   </a:tcPr>
                 </a:tc>
               </a:tr>
-              <a:tr h="295422">
+              <a:tr h="225911">
                 <a:tc>
                   <a:txBody>
                     <a:bodyPr/>
@@ -7333,7 +8045,7 @@
                         <a:buNone/>
                       </a:pPr>
                       <a:r>
-                        <a:rPr lang="en-US" sz="1000" dirty="0">
+                        <a:rPr lang="en-US" sz="900" dirty="0">
                           <a:solidFill>
                             <a:srgbClr val="1E2433"/>
                           </a:solidFill>
@@ -7343,7 +8055,7 @@
                         </a:rPr>
                         <a:t>6</a:t>
                       </a:r>
-                      <a:endParaRPr lang="en-US" sz="1000" dirty="0">
+                      <a:endParaRPr lang="en-US" sz="900" dirty="0">
                         <a:latin typeface="Meiryo" charset="0"/>
                         <a:ea typeface="Meiryo" charset="0"/>
                         <a:cs typeface="Meiryo" charset="0"/>
@@ -7401,7 +8113,7 @@
                         <a:buNone/>
                       </a:pPr>
                       <a:r>
-                        <a:rPr lang="en-US" sz="1000" dirty="0">
+                        <a:rPr lang="en-US" sz="900" dirty="0">
                           <a:solidFill>
                             <a:srgbClr val="1E2433"/>
                           </a:solidFill>
@@ -7411,7 +8123,7 @@
                         </a:rPr>
                         <a:t>2025</a:t>
                       </a:r>
-                      <a:endParaRPr lang="en-US" sz="1000" dirty="0">
+                      <a:endParaRPr lang="en-US" sz="900" dirty="0">
                         <a:latin typeface="Meiryo" charset="0"/>
                         <a:ea typeface="Meiryo" charset="0"/>
                         <a:cs typeface="Meiryo" charset="0"/>
@@ -7469,7 +8181,7 @@
                         <a:buNone/>
                       </a:pPr>
                       <a:r>
-                        <a:rPr lang="en-US" sz="1000" dirty="0">
+                        <a:rPr lang="en-US" sz="900" dirty="0">
                           <a:solidFill>
                             <a:srgbClr val="1E2433"/>
                           </a:solidFill>
@@ -7479,7 +8191,7 @@
                         </a:rPr>
                         <a:t>1000 Layer CRL (Wang+ 2025)</a:t>
                       </a:r>
-                      <a:endParaRPr lang="en-US" sz="1000" dirty="0">
+                      <a:endParaRPr lang="en-US" sz="900" dirty="0">
                         <a:latin typeface="Meiryo" charset="0"/>
                         <a:ea typeface="Meiryo" charset="0"/>
                         <a:cs typeface="Meiryo" charset="0"/>
@@ -7537,7 +8249,7 @@
                         <a:buNone/>
                       </a:pPr>
                       <a:r>
-                        <a:rPr lang="en-US" sz="1000" dirty="0">
+                        <a:rPr lang="en-US" sz="900" dirty="0">
                           <a:solidFill>
                             <a:srgbClr val="1E2433"/>
                           </a:solidFill>
@@ -7547,7 +8259,7 @@
                         </a:rPr>
                         <a:t>NeurIPS 2025</a:t>
                       </a:r>
-                      <a:endParaRPr lang="en-US" sz="1000" dirty="0">
+                      <a:endParaRPr lang="en-US" sz="900" dirty="0">
                         <a:latin typeface="Meiryo" charset="0"/>
                         <a:ea typeface="Meiryo" charset="0"/>
                         <a:cs typeface="Meiryo" charset="0"/>
@@ -7605,7 +8317,7 @@
                         <a:buNone/>
                       </a:pPr>
                       <a:r>
-                        <a:rPr lang="en-US" sz="1000" dirty="0">
+                        <a:rPr lang="en-US" sz="900" dirty="0">
                           <a:solidFill>
                             <a:srgbClr val="1E2433"/>
                           </a:solidFill>
@@ -7615,7 +8327,7 @@
                         </a:rPr>
                         <a:t>受賞</a:t>
                       </a:r>
-                      <a:endParaRPr lang="en-US" sz="1000" dirty="0">
+                      <a:endParaRPr lang="en-US" sz="900" dirty="0">
                         <a:latin typeface="Meiryo" charset="0"/>
                         <a:ea typeface="Meiryo" charset="0"/>
                         <a:cs typeface="Meiryo" charset="0"/>
@@ -7665,7 +8377,7 @@
                   </a:tcPr>
                 </a:tc>
               </a:tr>
-              <a:tr h="295422">
+              <a:tr h="225911">
                 <a:tc>
                   <a:txBody>
                     <a:bodyPr/>
@@ -7675,7 +8387,7 @@
                         <a:buNone/>
                       </a:pPr>
                       <a:r>
-                        <a:rPr lang="en-US" sz="1000" dirty="0">
+                        <a:rPr lang="en-US" sz="900" dirty="0">
                           <a:solidFill>
                             <a:srgbClr val="1E2433"/>
                           </a:solidFill>
@@ -7685,7 +8397,7 @@
                         </a:rPr>
                         <a:t>7</a:t>
                       </a:r>
-                      <a:endParaRPr lang="en-US" sz="1000" dirty="0">
+                      <a:endParaRPr lang="en-US" sz="900" dirty="0">
                         <a:latin typeface="Meiryo" charset="0"/>
                         <a:ea typeface="Meiryo" charset="0"/>
                         <a:cs typeface="Meiryo" charset="0"/>
@@ -7743,7 +8455,7 @@
                         <a:buNone/>
                       </a:pPr>
                       <a:r>
-                        <a:rPr lang="en-US" sz="1000" dirty="0">
+                        <a:rPr lang="en-US" sz="900" dirty="0">
                           <a:solidFill>
                             <a:srgbClr val="1E2433"/>
                           </a:solidFill>
@@ -7753,7 +8465,7 @@
                         </a:rPr>
                         <a:t>2025</a:t>
                       </a:r>
-                      <a:endParaRPr lang="en-US" sz="1000" dirty="0">
+                      <a:endParaRPr lang="en-US" sz="900" dirty="0">
                         <a:latin typeface="Meiryo" charset="0"/>
                         <a:ea typeface="Meiryo" charset="0"/>
                         <a:cs typeface="Meiryo" charset="0"/>
@@ -7811,7 +8523,7 @@
                         <a:buNone/>
                       </a:pPr>
                       <a:r>
-                        <a:rPr lang="en-US" sz="1000" dirty="0">
+                        <a:rPr lang="en-US" sz="900" dirty="0">
                           <a:solidFill>
                             <a:srgbClr val="1E2433"/>
                           </a:solidFill>
@@ -7821,7 +8533,7 @@
                         </a:rPr>
                         <a:t>Diffusion Memorization (Bonnaire+ 2025)</a:t>
                       </a:r>
-                      <a:endParaRPr lang="en-US" sz="1000" dirty="0">
+                      <a:endParaRPr lang="en-US" sz="900" dirty="0">
                         <a:latin typeface="Meiryo" charset="0"/>
                         <a:ea typeface="Meiryo" charset="0"/>
                         <a:cs typeface="Meiryo" charset="0"/>
@@ -7879,7 +8591,7 @@
                         <a:buNone/>
                       </a:pPr>
                       <a:r>
-                        <a:rPr lang="en-US" sz="1000" dirty="0">
+                        <a:rPr lang="en-US" sz="900" dirty="0">
                           <a:solidFill>
                             <a:srgbClr val="1E2433"/>
                           </a:solidFill>
@@ -7889,7 +8601,7 @@
                         </a:rPr>
                         <a:t>NeurIPS 2025</a:t>
                       </a:r>
-                      <a:endParaRPr lang="en-US" sz="1000" dirty="0">
+                      <a:endParaRPr lang="en-US" sz="900" dirty="0">
                         <a:latin typeface="Meiryo" charset="0"/>
                         <a:ea typeface="Meiryo" charset="0"/>
                         <a:cs typeface="Meiryo" charset="0"/>
@@ -7947,7 +8659,7 @@
                         <a:buNone/>
                       </a:pPr>
                       <a:r>
-                        <a:rPr lang="en-US" sz="1000" dirty="0">
+                        <a:rPr lang="en-US" sz="900" dirty="0">
                           <a:solidFill>
                             <a:srgbClr val="1E2433"/>
                           </a:solidFill>
@@ -7957,7 +8669,7 @@
                         </a:rPr>
                         <a:t>受賞</a:t>
                       </a:r>
-                      <a:endParaRPr lang="en-US" sz="1000" dirty="0">
+                      <a:endParaRPr lang="en-US" sz="900" dirty="0">
                         <a:latin typeface="Meiryo" charset="0"/>
                         <a:ea typeface="Meiryo" charset="0"/>
                         <a:cs typeface="Meiryo" charset="0"/>
@@ -8007,7 +8719,7 @@
                   </a:tcPr>
                 </a:tc>
               </a:tr>
-              <a:tr h="295422">
+              <a:tr h="225911">
                 <a:tc>
                   <a:txBody>
                     <a:bodyPr/>
@@ -8017,7 +8729,7 @@
                         <a:buNone/>
                       </a:pPr>
                       <a:r>
-                        <a:rPr lang="en-US" sz="1000" dirty="0">
+                        <a:rPr lang="en-US" sz="900" dirty="0">
                           <a:solidFill>
                             <a:srgbClr val="1E2433"/>
                           </a:solidFill>
@@ -8027,7 +8739,7 @@
                         </a:rPr>
                         <a:t>8</a:t>
                       </a:r>
-                      <a:endParaRPr lang="en-US" sz="1000" dirty="0">
+                      <a:endParaRPr lang="en-US" sz="900" dirty="0">
                         <a:latin typeface="Meiryo" charset="0"/>
                         <a:ea typeface="Meiryo" charset="0"/>
                         <a:cs typeface="Meiryo" charset="0"/>
@@ -8085,7 +8797,7 @@
                         <a:buNone/>
                       </a:pPr>
                       <a:r>
-                        <a:rPr lang="en-US" sz="1000" dirty="0">
+                        <a:rPr lang="en-US" sz="900" dirty="0">
                           <a:solidFill>
                             <a:srgbClr val="1E2433"/>
                           </a:solidFill>
@@ -8095,7 +8807,7 @@
                         </a:rPr>
                         <a:t>2025</a:t>
                       </a:r>
-                      <a:endParaRPr lang="en-US" sz="1000" dirty="0">
+                      <a:endParaRPr lang="en-US" sz="900" dirty="0">
                         <a:latin typeface="Meiryo" charset="0"/>
                         <a:ea typeface="Meiryo" charset="0"/>
                         <a:cs typeface="Meiryo" charset="0"/>
@@ -8153,7 +8865,7 @@
                         <a:buNone/>
                       </a:pPr>
                       <a:r>
-                        <a:rPr lang="en-US" sz="1000" dirty="0">
+                        <a:rPr lang="en-US" sz="900" dirty="0">
                           <a:solidFill>
                             <a:srgbClr val="1E2433"/>
                           </a:solidFill>
@@ -8163,7 +8875,7 @@
                         </a:rPr>
                         <a:t>Artificial Hivemind (Jiang+ 2025)</a:t>
                       </a:r>
-                      <a:endParaRPr lang="en-US" sz="1000" dirty="0">
+                      <a:endParaRPr lang="en-US" sz="900" dirty="0">
                         <a:latin typeface="Meiryo" charset="0"/>
                         <a:ea typeface="Meiryo" charset="0"/>
                         <a:cs typeface="Meiryo" charset="0"/>
@@ -8221,7 +8933,7 @@
                         <a:buNone/>
                       </a:pPr>
                       <a:r>
-                        <a:rPr lang="en-US" sz="1000" dirty="0">
+                        <a:rPr lang="en-US" sz="900" dirty="0">
                           <a:solidFill>
                             <a:srgbClr val="1E2433"/>
                           </a:solidFill>
@@ -8231,7 +8943,7 @@
                         </a:rPr>
                         <a:t>NeurIPS 2025 (D&amp;B)</a:t>
                       </a:r>
-                      <a:endParaRPr lang="en-US" sz="1000" dirty="0">
+                      <a:endParaRPr lang="en-US" sz="900" dirty="0">
                         <a:latin typeface="Meiryo" charset="0"/>
                         <a:ea typeface="Meiryo" charset="0"/>
                         <a:cs typeface="Meiryo" charset="0"/>
@@ -8289,7 +9001,7 @@
                         <a:buNone/>
                       </a:pPr>
                       <a:r>
-                        <a:rPr lang="en-US" sz="1000" dirty="0">
+                        <a:rPr lang="en-US" sz="900" dirty="0">
                           <a:solidFill>
                             <a:srgbClr val="1E2433"/>
                           </a:solidFill>
@@ -8299,7 +9011,7 @@
                         </a:rPr>
                         <a:t>受賞</a:t>
                       </a:r>
-                      <a:endParaRPr lang="en-US" sz="1000" dirty="0">
+                      <a:endParaRPr lang="en-US" sz="900" dirty="0">
                         <a:latin typeface="Meiryo" charset="0"/>
                         <a:ea typeface="Meiryo" charset="0"/>
                         <a:cs typeface="Meiryo" charset="0"/>
@@ -8349,7 +9061,7 @@
                   </a:tcPr>
                 </a:tc>
               </a:tr>
-              <a:tr h="295422">
+              <a:tr h="225911">
                 <a:tc>
                   <a:txBody>
                     <a:bodyPr/>
@@ -8359,7 +9071,7 @@
                         <a:buNone/>
                       </a:pPr>
                       <a:r>
-                        <a:rPr lang="en-US" sz="1000" dirty="0">
+                        <a:rPr lang="en-US" sz="900" dirty="0">
                           <a:solidFill>
                             <a:srgbClr val="1E2433"/>
                           </a:solidFill>
@@ -8369,7 +9081,7 @@
                         </a:rPr>
                         <a:t>9</a:t>
                       </a:r>
-                      <a:endParaRPr lang="en-US" sz="1000" dirty="0">
+                      <a:endParaRPr lang="en-US" sz="900" dirty="0">
                         <a:latin typeface="Meiryo" charset="0"/>
                         <a:ea typeface="Meiryo" charset="0"/>
                         <a:cs typeface="Meiryo" charset="0"/>
@@ -8427,7 +9139,7 @@
                         <a:buNone/>
                       </a:pPr>
                       <a:r>
-                        <a:rPr lang="en-US" sz="1000" dirty="0">
+                        <a:rPr lang="en-US" sz="900" dirty="0">
                           <a:solidFill>
                             <a:srgbClr val="1E2433"/>
                           </a:solidFill>
@@ -8437,7 +9149,7 @@
                         </a:rPr>
                         <a:t>2025</a:t>
                       </a:r>
-                      <a:endParaRPr lang="en-US" sz="1000" dirty="0">
+                      <a:endParaRPr lang="en-US" sz="900" dirty="0">
                         <a:latin typeface="Meiryo" charset="0"/>
                         <a:ea typeface="Meiryo" charset="0"/>
                         <a:cs typeface="Meiryo" charset="0"/>
@@ -8495,7 +9207,7 @@
                         <a:buNone/>
                       </a:pPr>
                       <a:r>
-                        <a:rPr lang="en-US" sz="1000" dirty="0">
+                        <a:rPr lang="en-US" sz="900" dirty="0">
                           <a:solidFill>
                             <a:srgbClr val="1E2433"/>
                           </a:solidFill>
@@ -8505,7 +9217,7 @@
                         </a:rPr>
                         <a:t>Limit of RLVR (Yue+ 2025)</a:t>
                       </a:r>
-                      <a:endParaRPr lang="en-US" sz="1000" dirty="0">
+                      <a:endParaRPr lang="en-US" sz="900" dirty="0">
                         <a:latin typeface="Meiryo" charset="0"/>
                         <a:ea typeface="Meiryo" charset="0"/>
                         <a:cs typeface="Meiryo" charset="0"/>
@@ -8563,7 +9275,7 @@
                         <a:buNone/>
                       </a:pPr>
                       <a:r>
-                        <a:rPr lang="en-US" sz="1000" dirty="0">
+                        <a:rPr lang="en-US" sz="900" dirty="0">
                           <a:solidFill>
                             <a:srgbClr val="1E2433"/>
                           </a:solidFill>
@@ -8573,7 +9285,7 @@
                         </a:rPr>
                         <a:t>NeurIPS 2025</a:t>
                       </a:r>
-                      <a:endParaRPr lang="en-US" sz="1000" dirty="0">
+                      <a:endParaRPr lang="en-US" sz="900" dirty="0">
                         <a:latin typeface="Meiryo" charset="0"/>
                         <a:ea typeface="Meiryo" charset="0"/>
                         <a:cs typeface="Meiryo" charset="0"/>
@@ -8631,7 +9343,7 @@
                         <a:buNone/>
                       </a:pPr>
                       <a:r>
-                        <a:rPr lang="en-US" sz="1000" dirty="0">
+                        <a:rPr lang="en-US" sz="900" dirty="0">
                           <a:solidFill>
                             <a:srgbClr val="1E2433"/>
                           </a:solidFill>
@@ -8641,7 +9353,7 @@
                         </a:rPr>
                         <a:t>受賞</a:t>
                       </a:r>
-                      <a:endParaRPr lang="en-US" sz="1000" dirty="0">
+                      <a:endParaRPr lang="en-US" sz="900" dirty="0">
                         <a:latin typeface="Meiryo" charset="0"/>
                         <a:ea typeface="Meiryo" charset="0"/>
                         <a:cs typeface="Meiryo" charset="0"/>
@@ -8691,7 +9403,7 @@
                   </a:tcPr>
                 </a:tc>
               </a:tr>
-              <a:tr h="295422">
+              <a:tr h="225911">
                 <a:tc>
                   <a:txBody>
                     <a:bodyPr/>
@@ -8701,7 +9413,7 @@
                         <a:buNone/>
                       </a:pPr>
                       <a:r>
-                        <a:rPr lang="en-US" sz="1000" dirty="0">
+                        <a:rPr lang="en-US" sz="900" dirty="0">
                           <a:solidFill>
                             <a:srgbClr val="1E2433"/>
                           </a:solidFill>
@@ -8711,7 +9423,7 @@
                         </a:rPr>
                         <a:t>10</a:t>
                       </a:r>
-                      <a:endParaRPr lang="en-US" sz="1000" dirty="0">
+                      <a:endParaRPr lang="en-US" sz="900" dirty="0">
                         <a:latin typeface="Meiryo" charset="0"/>
                         <a:ea typeface="Meiryo" charset="0"/>
                         <a:cs typeface="Meiryo" charset="0"/>
@@ -8769,7 +9481,7 @@
                         <a:buNone/>
                       </a:pPr>
                       <a:r>
-                        <a:rPr lang="en-US" sz="1000" dirty="0">
+                        <a:rPr lang="en-US" sz="900" dirty="0">
                           <a:solidFill>
                             <a:srgbClr val="1E2433"/>
                           </a:solidFill>
@@ -8779,7 +9491,7 @@
                         </a:rPr>
                         <a:t>2025</a:t>
                       </a:r>
-                      <a:endParaRPr lang="en-US" sz="1000" dirty="0">
+                      <a:endParaRPr lang="en-US" sz="900" dirty="0">
                         <a:latin typeface="Meiryo" charset="0"/>
                         <a:ea typeface="Meiryo" charset="0"/>
                         <a:cs typeface="Meiryo" charset="0"/>
@@ -8837,7 +9549,7 @@
                         <a:buNone/>
                       </a:pPr>
                       <a:r>
-                        <a:rPr lang="en-US" sz="1000" dirty="0">
+                        <a:rPr lang="en-US" sz="900" dirty="0">
                           <a:solidFill>
                             <a:srgbClr val="1E2433"/>
                           </a:solidFill>
@@ -8847,7 +9559,7 @@
                         </a:rPr>
                         <a:t>Transductive Mistake Bounds (Chase+ 2025)</a:t>
                       </a:r>
-                      <a:endParaRPr lang="en-US" sz="1000" dirty="0">
+                      <a:endParaRPr lang="en-US" sz="900" dirty="0">
                         <a:latin typeface="Meiryo" charset="0"/>
                         <a:ea typeface="Meiryo" charset="0"/>
                         <a:cs typeface="Meiryo" charset="0"/>
@@ -8905,7 +9617,7 @@
                         <a:buNone/>
                       </a:pPr>
                       <a:r>
-                        <a:rPr lang="en-US" sz="1000" dirty="0">
+                        <a:rPr lang="en-US" sz="900" dirty="0">
                           <a:solidFill>
                             <a:srgbClr val="1E2433"/>
                           </a:solidFill>
@@ -8915,7 +9627,7 @@
                         </a:rPr>
                         <a:t>NeurIPS 2025</a:t>
                       </a:r>
-                      <a:endParaRPr lang="en-US" sz="1000" dirty="0">
+                      <a:endParaRPr lang="en-US" sz="900" dirty="0">
                         <a:latin typeface="Meiryo" charset="0"/>
                         <a:ea typeface="Meiryo" charset="0"/>
                         <a:cs typeface="Meiryo" charset="0"/>
@@ -8973,7 +9685,7 @@
                         <a:buNone/>
                       </a:pPr>
                       <a:r>
-                        <a:rPr lang="en-US" sz="1000" dirty="0">
+                        <a:rPr lang="en-US" sz="900" dirty="0">
                           <a:solidFill>
                             <a:srgbClr val="1E2433"/>
                           </a:solidFill>
@@ -8983,7 +9695,7 @@
                         </a:rPr>
                         <a:t>受賞</a:t>
                       </a:r>
-                      <a:endParaRPr lang="en-US" sz="1000" dirty="0">
+                      <a:endParaRPr lang="en-US" sz="900" dirty="0">
                         <a:latin typeface="Meiryo" charset="0"/>
                         <a:ea typeface="Meiryo" charset="0"/>
                         <a:cs typeface="Meiryo" charset="0"/>
@@ -9033,7 +9745,7 @@
                   </a:tcPr>
                 </a:tc>
               </a:tr>
-              <a:tr h="295422">
+              <a:tr h="225911">
                 <a:tc>
                   <a:txBody>
                     <a:bodyPr/>
@@ -9043,7 +9755,7 @@
                         <a:buNone/>
                       </a:pPr>
                       <a:r>
-                        <a:rPr lang="en-US" sz="1000" dirty="0">
+                        <a:rPr lang="en-US" sz="900" dirty="0">
                           <a:solidFill>
                             <a:srgbClr val="1E2433"/>
                           </a:solidFill>
@@ -9053,7 +9765,7 @@
                         </a:rPr>
                         <a:t>11</a:t>
                       </a:r>
-                      <a:endParaRPr lang="en-US" sz="1000" dirty="0">
+                      <a:endParaRPr lang="en-US" sz="900" dirty="0">
                         <a:latin typeface="Meiryo" charset="0"/>
                         <a:ea typeface="Meiryo" charset="0"/>
                         <a:cs typeface="Meiryo" charset="0"/>
@@ -9111,7 +9823,7 @@
                         <a:buNone/>
                       </a:pPr>
                       <a:r>
-                        <a:rPr lang="en-US" sz="1000" dirty="0">
+                        <a:rPr lang="en-US" sz="900" dirty="0">
                           <a:solidFill>
                             <a:srgbClr val="1E2433"/>
                           </a:solidFill>
@@ -9121,7 +9833,7 @@
                         </a:rPr>
                         <a:t>2025</a:t>
                       </a:r>
-                      <a:endParaRPr lang="en-US" sz="1000" dirty="0">
+                      <a:endParaRPr lang="en-US" sz="900" dirty="0">
                         <a:latin typeface="Meiryo" charset="0"/>
                         <a:ea typeface="Meiryo" charset="0"/>
                         <a:cs typeface="Meiryo" charset="0"/>
@@ -9179,7 +9891,7 @@
                         <a:buNone/>
                       </a:pPr>
                       <a:r>
-                        <a:rPr lang="en-US" sz="1000" dirty="0">
+                        <a:rPr lang="en-US" sz="900" dirty="0">
                           <a:solidFill>
                             <a:srgbClr val="1E2433"/>
                           </a:solidFill>
@@ -9189,7 +9901,7 @@
                         </a:rPr>
                         <a:t>Superposition Scaling (Liu+ 2025)</a:t>
                       </a:r>
-                      <a:endParaRPr lang="en-US" sz="1000" dirty="0">
+                      <a:endParaRPr lang="en-US" sz="900" dirty="0">
                         <a:latin typeface="Meiryo" charset="0"/>
                         <a:ea typeface="Meiryo" charset="0"/>
                         <a:cs typeface="Meiryo" charset="0"/>
@@ -9247,7 +9959,7 @@
                         <a:buNone/>
                       </a:pPr>
                       <a:r>
-                        <a:rPr lang="en-US" sz="1000" dirty="0">
+                        <a:rPr lang="en-US" sz="900" dirty="0">
                           <a:solidFill>
                             <a:srgbClr val="1E2433"/>
                           </a:solidFill>
@@ -9257,7 +9969,7 @@
                         </a:rPr>
                         <a:t>NeurIPS 2025</a:t>
                       </a:r>
-                      <a:endParaRPr lang="en-US" sz="1000" dirty="0">
+                      <a:endParaRPr lang="en-US" sz="900" dirty="0">
                         <a:latin typeface="Meiryo" charset="0"/>
                         <a:ea typeface="Meiryo" charset="0"/>
                         <a:cs typeface="Meiryo" charset="0"/>
@@ -9315,7 +10027,7 @@
                         <a:buNone/>
                       </a:pPr>
                       <a:r>
-                        <a:rPr lang="en-US" sz="1000" dirty="0">
+                        <a:rPr lang="en-US" sz="900" dirty="0">
                           <a:solidFill>
                             <a:srgbClr val="1E2433"/>
                           </a:solidFill>
@@ -9325,7 +10037,7 @@
                         </a:rPr>
                         <a:t>受賞</a:t>
                       </a:r>
-                      <a:endParaRPr lang="en-US" sz="1000" dirty="0">
+                      <a:endParaRPr lang="en-US" sz="900" dirty="0">
                         <a:latin typeface="Meiryo" charset="0"/>
                         <a:ea typeface="Meiryo" charset="0"/>
                         <a:cs typeface="Meiryo" charset="0"/>
@@ -9375,7 +10087,7 @@
                   </a:tcPr>
                 </a:tc>
               </a:tr>
-              <a:tr h="295422">
+              <a:tr h="225911">
                 <a:tc>
                   <a:txBody>
                     <a:bodyPr/>
@@ -9385,7 +10097,7 @@
                         <a:buNone/>
                       </a:pPr>
                       <a:r>
-                        <a:rPr lang="en-US" sz="1000" dirty="0">
+                        <a:rPr lang="en-US" sz="900" dirty="0">
                           <a:solidFill>
                             <a:srgbClr val="1E2433"/>
                           </a:solidFill>
@@ -9395,7 +10107,7 @@
                         </a:rPr>
                         <a:t>12</a:t>
                       </a:r>
-                      <a:endParaRPr lang="en-US" sz="1000" dirty="0">
+                      <a:endParaRPr lang="en-US" sz="900" dirty="0">
                         <a:latin typeface="Meiryo" charset="0"/>
                         <a:ea typeface="Meiryo" charset="0"/>
                         <a:cs typeface="Meiryo" charset="0"/>
@@ -9453,7 +10165,7 @@
                         <a:buNone/>
                       </a:pPr>
                       <a:r>
-                        <a:rPr lang="en-US" sz="1000" dirty="0">
+                        <a:rPr lang="en-US" sz="900" dirty="0">
                           <a:solidFill>
                             <a:srgbClr val="1E2433"/>
                           </a:solidFill>
@@ -9463,7 +10175,7 @@
                         </a:rPr>
                         <a:t>2015</a:t>
                       </a:r>
-                      <a:endParaRPr lang="en-US" sz="1000" dirty="0">
+                      <a:endParaRPr lang="en-US" sz="900" dirty="0">
                         <a:latin typeface="Meiryo" charset="0"/>
                         <a:ea typeface="Meiryo" charset="0"/>
                         <a:cs typeface="Meiryo" charset="0"/>
@@ -9521,7 +10233,7 @@
                         <a:buNone/>
                       </a:pPr>
                       <a:r>
-                        <a:rPr lang="en-US" sz="1000" dirty="0">
+                        <a:rPr lang="en-US" sz="900" dirty="0">
                           <a:solidFill>
                             <a:srgbClr val="1E2433"/>
                           </a:solidFill>
@@ -9531,7 +10243,7 @@
                         </a:rPr>
                         <a:t>Faster R-CNN (Ren+ 2015)</a:t>
                       </a:r>
-                      <a:endParaRPr lang="en-US" sz="1000" dirty="0">
+                      <a:endParaRPr lang="en-US" sz="900" dirty="0">
                         <a:latin typeface="Meiryo" charset="0"/>
                         <a:ea typeface="Meiryo" charset="0"/>
                         <a:cs typeface="Meiryo" charset="0"/>
@@ -9589,7 +10301,7 @@
                         <a:buNone/>
                       </a:pPr>
                       <a:r>
-                        <a:rPr lang="en-US" sz="1000" dirty="0">
+                        <a:rPr lang="en-US" sz="900" dirty="0">
                           <a:solidFill>
                             <a:srgbClr val="1E2433"/>
                           </a:solidFill>
@@ -9599,7 +10311,7 @@
                         </a:rPr>
                         <a:t>NIPS 2015</a:t>
                       </a:r>
-                      <a:endParaRPr lang="en-US" sz="1000" dirty="0">
+                      <a:endParaRPr lang="en-US" sz="900" dirty="0">
                         <a:latin typeface="Meiryo" charset="0"/>
                         <a:ea typeface="Meiryo" charset="0"/>
                         <a:cs typeface="Meiryo" charset="0"/>
@@ -9657,7 +10369,7 @@
                         <a:buNone/>
                       </a:pPr>
                       <a:r>
-                        <a:rPr lang="en-US" sz="1000" dirty="0">
+                        <a:rPr lang="en-US" sz="900" dirty="0">
                           <a:solidFill>
                             <a:srgbClr val="1E2433"/>
                           </a:solidFill>
@@ -9667,7 +10379,1375 @@
                         </a:rPr>
                         <a:t>受賞</a:t>
                       </a:r>
-                      <a:endParaRPr lang="en-US" sz="1000" dirty="0">
+                      <a:endParaRPr lang="en-US" sz="900" dirty="0">
+                        <a:latin typeface="Meiryo" charset="0"/>
+                        <a:ea typeface="Meiryo" charset="0"/>
+                        <a:cs typeface="Meiryo" charset="0"/>
+                      </a:endParaRPr>
+                    </a:p>
+                  </a:txBody>
+                  <a:tcPr marL="73152" marR="73152" marT="27432" marB="27432" anchor="ctr">
+                    <a:lnL w="6350" cap="flat" cmpd="sng" algn="ctr">
+                      <a:solidFill>
+                        <a:srgbClr val="C9CFDB"/>
+                      </a:solidFill>
+                      <a:prstDash val="solid"/>
+                      <a:round/>
+                      <a:headEnd type="none" w="med" len="med"/>
+                      <a:tailEnd type="none" w="med" len="med"/>
+                    </a:lnL>
+                    <a:lnR w="6350" cap="flat" cmpd="sng" algn="ctr">
+                      <a:solidFill>
+                        <a:srgbClr val="C9CFDB"/>
+                      </a:solidFill>
+                      <a:prstDash val="solid"/>
+                      <a:round/>
+                      <a:headEnd type="none" w="med" len="med"/>
+                      <a:tailEnd type="none" w="med" len="med"/>
+                    </a:lnR>
+                    <a:lnT w="6350" cap="flat" cmpd="sng" algn="ctr">
+                      <a:solidFill>
+                        <a:srgbClr val="C9CFDB"/>
+                      </a:solidFill>
+                      <a:prstDash val="solid"/>
+                      <a:round/>
+                      <a:headEnd type="none" w="med" len="med"/>
+                      <a:tailEnd type="none" w="med" len="med"/>
+                    </a:lnT>
+                    <a:lnB w="6350" cap="flat" cmpd="sng" algn="ctr">
+                      <a:solidFill>
+                        <a:srgbClr val="C9CFDB"/>
+                      </a:solidFill>
+                      <a:prstDash val="solid"/>
+                      <a:round/>
+                      <a:headEnd type="none" w="med" len="med"/>
+                      <a:tailEnd type="none" w="med" len="med"/>
+                    </a:lnB>
+                    <a:solidFill>
+                      <a:srgbClr val="FFFFFF"/>
+                    </a:solidFill>
+                  </a:tcPr>
+                </a:tc>
+              </a:tr>
+              <a:tr h="225911">
+                <a:tc>
+                  <a:txBody>
+                    <a:bodyPr/>
+                    <a:lstStyle/>
+                    <a:p>
+                      <a:pPr indent="0" marL="0">
+                        <a:buNone/>
+                      </a:pPr>
+                      <a:r>
+                        <a:rPr lang="en-US" sz="900" dirty="0">
+                          <a:solidFill>
+                            <a:srgbClr val="1E2433"/>
+                          </a:solidFill>
+                          <a:latin typeface="Meiryo" pitchFamily="34" charset="0"/>
+                          <a:ea typeface="Meiryo" pitchFamily="34" charset="-122"/>
+                          <a:cs typeface="Meiryo" pitchFamily="34" charset="-120"/>
+                        </a:rPr>
+                        <a:t>13</a:t>
+                      </a:r>
+                      <a:endParaRPr lang="en-US" sz="900" dirty="0">
+                        <a:latin typeface="Meiryo" charset="0"/>
+                        <a:ea typeface="Meiryo" charset="0"/>
+                        <a:cs typeface="Meiryo" charset="0"/>
+                      </a:endParaRPr>
+                    </a:p>
+                  </a:txBody>
+                  <a:tcPr marL="73152" marR="73152" marT="27432" marB="27432" anchor="ctr">
+                    <a:lnL w="6350" cap="flat" cmpd="sng" algn="ctr">
+                      <a:solidFill>
+                        <a:srgbClr val="C9CFDB"/>
+                      </a:solidFill>
+                      <a:prstDash val="solid"/>
+                      <a:round/>
+                      <a:headEnd type="none" w="med" len="med"/>
+                      <a:tailEnd type="none" w="med" len="med"/>
+                    </a:lnL>
+                    <a:lnR w="6350" cap="flat" cmpd="sng" algn="ctr">
+                      <a:solidFill>
+                        <a:srgbClr val="C9CFDB"/>
+                      </a:solidFill>
+                      <a:prstDash val="solid"/>
+                      <a:round/>
+                      <a:headEnd type="none" w="med" len="med"/>
+                      <a:tailEnd type="none" w="med" len="med"/>
+                    </a:lnR>
+                    <a:lnT w="6350" cap="flat" cmpd="sng" algn="ctr">
+                      <a:solidFill>
+                        <a:srgbClr val="C9CFDB"/>
+                      </a:solidFill>
+                      <a:prstDash val="solid"/>
+                      <a:round/>
+                      <a:headEnd type="none" w="med" len="med"/>
+                      <a:tailEnd type="none" w="med" len="med"/>
+                    </a:lnT>
+                    <a:lnB w="6350" cap="flat" cmpd="sng" algn="ctr">
+                      <a:solidFill>
+                        <a:srgbClr val="C9CFDB"/>
+                      </a:solidFill>
+                      <a:prstDash val="solid"/>
+                      <a:round/>
+                      <a:headEnd type="none" w="med" len="med"/>
+                      <a:tailEnd type="none" w="med" len="med"/>
+                    </a:lnB>
+                    <a:solidFill>
+                      <a:srgbClr val="F2F4F8"/>
+                    </a:solidFill>
+                  </a:tcPr>
+                </a:tc>
+                <a:tc>
+                  <a:txBody>
+                    <a:bodyPr/>
+                    <a:lstStyle/>
+                    <a:p>
+                      <a:pPr indent="0" marL="0">
+                        <a:buNone/>
+                      </a:pPr>
+                      <a:r>
+                        <a:rPr lang="en-US" sz="900" dirty="0">
+                          <a:solidFill>
+                            <a:srgbClr val="1E2433"/>
+                          </a:solidFill>
+                          <a:latin typeface="Meiryo" pitchFamily="34" charset="0"/>
+                          <a:ea typeface="Meiryo" pitchFamily="34" charset="-122"/>
+                          <a:cs typeface="Meiryo" pitchFamily="34" charset="-120"/>
+                        </a:rPr>
+                        <a:t>2024</a:t>
+                      </a:r>
+                      <a:endParaRPr lang="en-US" sz="900" dirty="0">
+                        <a:latin typeface="Meiryo" charset="0"/>
+                        <a:ea typeface="Meiryo" charset="0"/>
+                        <a:cs typeface="Meiryo" charset="0"/>
+                      </a:endParaRPr>
+                    </a:p>
+                  </a:txBody>
+                  <a:tcPr marL="73152" marR="73152" marT="27432" marB="27432" anchor="ctr">
+                    <a:lnL w="6350" cap="flat" cmpd="sng" algn="ctr">
+                      <a:solidFill>
+                        <a:srgbClr val="C9CFDB"/>
+                      </a:solidFill>
+                      <a:prstDash val="solid"/>
+                      <a:round/>
+                      <a:headEnd type="none" w="med" len="med"/>
+                      <a:tailEnd type="none" w="med" len="med"/>
+                    </a:lnL>
+                    <a:lnR w="6350" cap="flat" cmpd="sng" algn="ctr">
+                      <a:solidFill>
+                        <a:srgbClr val="C9CFDB"/>
+                      </a:solidFill>
+                      <a:prstDash val="solid"/>
+                      <a:round/>
+                      <a:headEnd type="none" w="med" len="med"/>
+                      <a:tailEnd type="none" w="med" len="med"/>
+                    </a:lnR>
+                    <a:lnT w="6350" cap="flat" cmpd="sng" algn="ctr">
+                      <a:solidFill>
+                        <a:srgbClr val="C9CFDB"/>
+                      </a:solidFill>
+                      <a:prstDash val="solid"/>
+                      <a:round/>
+                      <a:headEnd type="none" w="med" len="med"/>
+                      <a:tailEnd type="none" w="med" len="med"/>
+                    </a:lnT>
+                    <a:lnB w="6350" cap="flat" cmpd="sng" algn="ctr">
+                      <a:solidFill>
+                        <a:srgbClr val="C9CFDB"/>
+                      </a:solidFill>
+                      <a:prstDash val="solid"/>
+                      <a:round/>
+                      <a:headEnd type="none" w="med" len="med"/>
+                      <a:tailEnd type="none" w="med" len="med"/>
+                    </a:lnB>
+                    <a:solidFill>
+                      <a:srgbClr val="F2F4F8"/>
+                    </a:solidFill>
+                  </a:tcPr>
+                </a:tc>
+                <a:tc>
+                  <a:txBody>
+                    <a:bodyPr/>
+                    <a:lstStyle/>
+                    <a:p>
+                      <a:pPr indent="0" marL="0">
+                        <a:buNone/>
+                      </a:pPr>
+                      <a:r>
+                        <a:rPr lang="en-US" sz="900" dirty="0">
+                          <a:solidFill>
+                            <a:srgbClr val="1E2433"/>
+                          </a:solidFill>
+                          <a:latin typeface="Meiryo" pitchFamily="34" charset="0"/>
+                          <a:ea typeface="Meiryo" pitchFamily="34" charset="-122"/>
+                          <a:cs typeface="Meiryo" pitchFamily="34" charset="-120"/>
+                        </a:rPr>
+                        <a:t>VAR (Tian+ 2024)</a:t>
+                      </a:r>
+                      <a:endParaRPr lang="en-US" sz="900" dirty="0">
+                        <a:latin typeface="Meiryo" charset="0"/>
+                        <a:ea typeface="Meiryo" charset="0"/>
+                        <a:cs typeface="Meiryo" charset="0"/>
+                      </a:endParaRPr>
+                    </a:p>
+                  </a:txBody>
+                  <a:tcPr marL="73152" marR="73152" marT="27432" marB="27432" anchor="ctr">
+                    <a:lnL w="6350" cap="flat" cmpd="sng" algn="ctr">
+                      <a:solidFill>
+                        <a:srgbClr val="C9CFDB"/>
+                      </a:solidFill>
+                      <a:prstDash val="solid"/>
+                      <a:round/>
+                      <a:headEnd type="none" w="med" len="med"/>
+                      <a:tailEnd type="none" w="med" len="med"/>
+                    </a:lnL>
+                    <a:lnR w="6350" cap="flat" cmpd="sng" algn="ctr">
+                      <a:solidFill>
+                        <a:srgbClr val="C9CFDB"/>
+                      </a:solidFill>
+                      <a:prstDash val="solid"/>
+                      <a:round/>
+                      <a:headEnd type="none" w="med" len="med"/>
+                      <a:tailEnd type="none" w="med" len="med"/>
+                    </a:lnR>
+                    <a:lnT w="6350" cap="flat" cmpd="sng" algn="ctr">
+                      <a:solidFill>
+                        <a:srgbClr val="C9CFDB"/>
+                      </a:solidFill>
+                      <a:prstDash val="solid"/>
+                      <a:round/>
+                      <a:headEnd type="none" w="med" len="med"/>
+                      <a:tailEnd type="none" w="med" len="med"/>
+                    </a:lnT>
+                    <a:lnB w="6350" cap="flat" cmpd="sng" algn="ctr">
+                      <a:solidFill>
+                        <a:srgbClr val="C9CFDB"/>
+                      </a:solidFill>
+                      <a:prstDash val="solid"/>
+                      <a:round/>
+                      <a:headEnd type="none" w="med" len="med"/>
+                      <a:tailEnd type="none" w="med" len="med"/>
+                    </a:lnB>
+                    <a:solidFill>
+                      <a:srgbClr val="F2F4F8"/>
+                    </a:solidFill>
+                  </a:tcPr>
+                </a:tc>
+                <a:tc>
+                  <a:txBody>
+                    <a:bodyPr/>
+                    <a:lstStyle/>
+                    <a:p>
+                      <a:pPr indent="0" marL="0">
+                        <a:buNone/>
+                      </a:pPr>
+                      <a:r>
+                        <a:rPr lang="en-US" sz="900" dirty="0">
+                          <a:solidFill>
+                            <a:srgbClr val="1E2433"/>
+                          </a:solidFill>
+                          <a:latin typeface="Meiryo" pitchFamily="34" charset="0"/>
+                          <a:ea typeface="Meiryo" pitchFamily="34" charset="-122"/>
+                          <a:cs typeface="Meiryo" pitchFamily="34" charset="-120"/>
+                        </a:rPr>
+                        <a:t>NeurIPS 2024</a:t>
+                      </a:r>
+                      <a:endParaRPr lang="en-US" sz="900" dirty="0">
+                        <a:latin typeface="Meiryo" charset="0"/>
+                        <a:ea typeface="Meiryo" charset="0"/>
+                        <a:cs typeface="Meiryo" charset="0"/>
+                      </a:endParaRPr>
+                    </a:p>
+                  </a:txBody>
+                  <a:tcPr marL="73152" marR="73152" marT="27432" marB="27432" anchor="ctr">
+                    <a:lnL w="6350" cap="flat" cmpd="sng" algn="ctr">
+                      <a:solidFill>
+                        <a:srgbClr val="C9CFDB"/>
+                      </a:solidFill>
+                      <a:prstDash val="solid"/>
+                      <a:round/>
+                      <a:headEnd type="none" w="med" len="med"/>
+                      <a:tailEnd type="none" w="med" len="med"/>
+                    </a:lnL>
+                    <a:lnR w="6350" cap="flat" cmpd="sng" algn="ctr">
+                      <a:solidFill>
+                        <a:srgbClr val="C9CFDB"/>
+                      </a:solidFill>
+                      <a:prstDash val="solid"/>
+                      <a:round/>
+                      <a:headEnd type="none" w="med" len="med"/>
+                      <a:tailEnd type="none" w="med" len="med"/>
+                    </a:lnR>
+                    <a:lnT w="6350" cap="flat" cmpd="sng" algn="ctr">
+                      <a:solidFill>
+                        <a:srgbClr val="C9CFDB"/>
+                      </a:solidFill>
+                      <a:prstDash val="solid"/>
+                      <a:round/>
+                      <a:headEnd type="none" w="med" len="med"/>
+                      <a:tailEnd type="none" w="med" len="med"/>
+                    </a:lnT>
+                    <a:lnB w="6350" cap="flat" cmpd="sng" algn="ctr">
+                      <a:solidFill>
+                        <a:srgbClr val="C9CFDB"/>
+                      </a:solidFill>
+                      <a:prstDash val="solid"/>
+                      <a:round/>
+                      <a:headEnd type="none" w="med" len="med"/>
+                      <a:tailEnd type="none" w="med" len="med"/>
+                    </a:lnB>
+                    <a:solidFill>
+                      <a:srgbClr val="F2F4F8"/>
+                    </a:solidFill>
+                  </a:tcPr>
+                </a:tc>
+                <a:tc>
+                  <a:txBody>
+                    <a:bodyPr/>
+                    <a:lstStyle/>
+                    <a:p>
+                      <a:pPr indent="0" marL="0">
+                        <a:buNone/>
+                      </a:pPr>
+                      <a:r>
+                        <a:rPr lang="en-US" sz="900" dirty="0">
+                          <a:solidFill>
+                            <a:srgbClr val="1E2433"/>
+                          </a:solidFill>
+                          <a:latin typeface="Meiryo" pitchFamily="34" charset="0"/>
+                          <a:ea typeface="Meiryo" pitchFamily="34" charset="-122"/>
+                          <a:cs typeface="Meiryo" pitchFamily="34" charset="-120"/>
+                        </a:rPr>
+                        <a:t>受賞</a:t>
+                      </a:r>
+                      <a:endParaRPr lang="en-US" sz="900" dirty="0">
+                        <a:latin typeface="Meiryo" charset="0"/>
+                        <a:ea typeface="Meiryo" charset="0"/>
+                        <a:cs typeface="Meiryo" charset="0"/>
+                      </a:endParaRPr>
+                    </a:p>
+                  </a:txBody>
+                  <a:tcPr marL="73152" marR="73152" marT="27432" marB="27432" anchor="ctr">
+                    <a:lnL w="6350" cap="flat" cmpd="sng" algn="ctr">
+                      <a:solidFill>
+                        <a:srgbClr val="C9CFDB"/>
+                      </a:solidFill>
+                      <a:prstDash val="solid"/>
+                      <a:round/>
+                      <a:headEnd type="none" w="med" len="med"/>
+                      <a:tailEnd type="none" w="med" len="med"/>
+                    </a:lnL>
+                    <a:lnR w="6350" cap="flat" cmpd="sng" algn="ctr">
+                      <a:solidFill>
+                        <a:srgbClr val="C9CFDB"/>
+                      </a:solidFill>
+                      <a:prstDash val="solid"/>
+                      <a:round/>
+                      <a:headEnd type="none" w="med" len="med"/>
+                      <a:tailEnd type="none" w="med" len="med"/>
+                    </a:lnR>
+                    <a:lnT w="6350" cap="flat" cmpd="sng" algn="ctr">
+                      <a:solidFill>
+                        <a:srgbClr val="C9CFDB"/>
+                      </a:solidFill>
+                      <a:prstDash val="solid"/>
+                      <a:round/>
+                      <a:headEnd type="none" w="med" len="med"/>
+                      <a:tailEnd type="none" w="med" len="med"/>
+                    </a:lnT>
+                    <a:lnB w="6350" cap="flat" cmpd="sng" algn="ctr">
+                      <a:solidFill>
+                        <a:srgbClr val="C9CFDB"/>
+                      </a:solidFill>
+                      <a:prstDash val="solid"/>
+                      <a:round/>
+                      <a:headEnd type="none" w="med" len="med"/>
+                      <a:tailEnd type="none" w="med" len="med"/>
+                    </a:lnB>
+                    <a:solidFill>
+                      <a:srgbClr val="F2F4F8"/>
+                    </a:solidFill>
+                  </a:tcPr>
+                </a:tc>
+              </a:tr>
+              <a:tr h="225911">
+                <a:tc>
+                  <a:txBody>
+                    <a:bodyPr/>
+                    <a:lstStyle/>
+                    <a:p>
+                      <a:pPr indent="0" marL="0">
+                        <a:buNone/>
+                      </a:pPr>
+                      <a:r>
+                        <a:rPr lang="en-US" sz="900" dirty="0">
+                          <a:solidFill>
+                            <a:srgbClr val="1E2433"/>
+                          </a:solidFill>
+                          <a:latin typeface="Meiryo" pitchFamily="34" charset="0"/>
+                          <a:ea typeface="Meiryo" pitchFamily="34" charset="-122"/>
+                          <a:cs typeface="Meiryo" pitchFamily="34" charset="-120"/>
+                        </a:rPr>
+                        <a:t>14</a:t>
+                      </a:r>
+                      <a:endParaRPr lang="en-US" sz="900" dirty="0">
+                        <a:latin typeface="Meiryo" charset="0"/>
+                        <a:ea typeface="Meiryo" charset="0"/>
+                        <a:cs typeface="Meiryo" charset="0"/>
+                      </a:endParaRPr>
+                    </a:p>
+                  </a:txBody>
+                  <a:tcPr marL="73152" marR="73152" marT="27432" marB="27432" anchor="ctr">
+                    <a:lnL w="6350" cap="flat" cmpd="sng" algn="ctr">
+                      <a:solidFill>
+                        <a:srgbClr val="C9CFDB"/>
+                      </a:solidFill>
+                      <a:prstDash val="solid"/>
+                      <a:round/>
+                      <a:headEnd type="none" w="med" len="med"/>
+                      <a:tailEnd type="none" w="med" len="med"/>
+                    </a:lnL>
+                    <a:lnR w="6350" cap="flat" cmpd="sng" algn="ctr">
+                      <a:solidFill>
+                        <a:srgbClr val="C9CFDB"/>
+                      </a:solidFill>
+                      <a:prstDash val="solid"/>
+                      <a:round/>
+                      <a:headEnd type="none" w="med" len="med"/>
+                      <a:tailEnd type="none" w="med" len="med"/>
+                    </a:lnR>
+                    <a:lnT w="6350" cap="flat" cmpd="sng" algn="ctr">
+                      <a:solidFill>
+                        <a:srgbClr val="C9CFDB"/>
+                      </a:solidFill>
+                      <a:prstDash val="solid"/>
+                      <a:round/>
+                      <a:headEnd type="none" w="med" len="med"/>
+                      <a:tailEnd type="none" w="med" len="med"/>
+                    </a:lnT>
+                    <a:lnB w="6350" cap="flat" cmpd="sng" algn="ctr">
+                      <a:solidFill>
+                        <a:srgbClr val="C9CFDB"/>
+                      </a:solidFill>
+                      <a:prstDash val="solid"/>
+                      <a:round/>
+                      <a:headEnd type="none" w="med" len="med"/>
+                      <a:tailEnd type="none" w="med" len="med"/>
+                    </a:lnB>
+                    <a:solidFill>
+                      <a:srgbClr val="FFFFFF"/>
+                    </a:solidFill>
+                  </a:tcPr>
+                </a:tc>
+                <a:tc>
+                  <a:txBody>
+                    <a:bodyPr/>
+                    <a:lstStyle/>
+                    <a:p>
+                      <a:pPr indent="0" marL="0">
+                        <a:buNone/>
+                      </a:pPr>
+                      <a:r>
+                        <a:rPr lang="en-US" sz="900" dirty="0">
+                          <a:solidFill>
+                            <a:srgbClr val="1E2433"/>
+                          </a:solidFill>
+                          <a:latin typeface="Meiryo" pitchFamily="34" charset="0"/>
+                          <a:ea typeface="Meiryo" pitchFamily="34" charset="-122"/>
+                          <a:cs typeface="Meiryo" pitchFamily="34" charset="-120"/>
+                        </a:rPr>
+                        <a:t>2024</a:t>
+                      </a:r>
+                      <a:endParaRPr lang="en-US" sz="900" dirty="0">
+                        <a:latin typeface="Meiryo" charset="0"/>
+                        <a:ea typeface="Meiryo" charset="0"/>
+                        <a:cs typeface="Meiryo" charset="0"/>
+                      </a:endParaRPr>
+                    </a:p>
+                  </a:txBody>
+                  <a:tcPr marL="73152" marR="73152" marT="27432" marB="27432" anchor="ctr">
+                    <a:lnL w="6350" cap="flat" cmpd="sng" algn="ctr">
+                      <a:solidFill>
+                        <a:srgbClr val="C9CFDB"/>
+                      </a:solidFill>
+                      <a:prstDash val="solid"/>
+                      <a:round/>
+                      <a:headEnd type="none" w="med" len="med"/>
+                      <a:tailEnd type="none" w="med" len="med"/>
+                    </a:lnL>
+                    <a:lnR w="6350" cap="flat" cmpd="sng" algn="ctr">
+                      <a:solidFill>
+                        <a:srgbClr val="C9CFDB"/>
+                      </a:solidFill>
+                      <a:prstDash val="solid"/>
+                      <a:round/>
+                      <a:headEnd type="none" w="med" len="med"/>
+                      <a:tailEnd type="none" w="med" len="med"/>
+                    </a:lnR>
+                    <a:lnT w="6350" cap="flat" cmpd="sng" algn="ctr">
+                      <a:solidFill>
+                        <a:srgbClr val="C9CFDB"/>
+                      </a:solidFill>
+                      <a:prstDash val="solid"/>
+                      <a:round/>
+                      <a:headEnd type="none" w="med" len="med"/>
+                      <a:tailEnd type="none" w="med" len="med"/>
+                    </a:lnT>
+                    <a:lnB w="6350" cap="flat" cmpd="sng" algn="ctr">
+                      <a:solidFill>
+                        <a:srgbClr val="C9CFDB"/>
+                      </a:solidFill>
+                      <a:prstDash val="solid"/>
+                      <a:round/>
+                      <a:headEnd type="none" w="med" len="med"/>
+                      <a:tailEnd type="none" w="med" len="med"/>
+                    </a:lnB>
+                    <a:solidFill>
+                      <a:srgbClr val="FFFFFF"/>
+                    </a:solidFill>
+                  </a:tcPr>
+                </a:tc>
+                <a:tc>
+                  <a:txBody>
+                    <a:bodyPr/>
+                    <a:lstStyle/>
+                    <a:p>
+                      <a:pPr indent="0" marL="0">
+                        <a:buNone/>
+                      </a:pPr>
+                      <a:r>
+                        <a:rPr lang="en-US" sz="900" dirty="0">
+                          <a:solidFill>
+                            <a:srgbClr val="1E2433"/>
+                          </a:solidFill>
+                          <a:latin typeface="Meiryo" pitchFamily="34" charset="0"/>
+                          <a:ea typeface="Meiryo" pitchFamily="34" charset="-122"/>
+                          <a:cs typeface="Meiryo" pitchFamily="34" charset="-120"/>
+                        </a:rPr>
+                        <a:t>STDE (Shi+ 2024)</a:t>
+                      </a:r>
+                      <a:endParaRPr lang="en-US" sz="900" dirty="0">
+                        <a:latin typeface="Meiryo" charset="0"/>
+                        <a:ea typeface="Meiryo" charset="0"/>
+                        <a:cs typeface="Meiryo" charset="0"/>
+                      </a:endParaRPr>
+                    </a:p>
+                  </a:txBody>
+                  <a:tcPr marL="73152" marR="73152" marT="27432" marB="27432" anchor="ctr">
+                    <a:lnL w="6350" cap="flat" cmpd="sng" algn="ctr">
+                      <a:solidFill>
+                        <a:srgbClr val="C9CFDB"/>
+                      </a:solidFill>
+                      <a:prstDash val="solid"/>
+                      <a:round/>
+                      <a:headEnd type="none" w="med" len="med"/>
+                      <a:tailEnd type="none" w="med" len="med"/>
+                    </a:lnL>
+                    <a:lnR w="6350" cap="flat" cmpd="sng" algn="ctr">
+                      <a:solidFill>
+                        <a:srgbClr val="C9CFDB"/>
+                      </a:solidFill>
+                      <a:prstDash val="solid"/>
+                      <a:round/>
+                      <a:headEnd type="none" w="med" len="med"/>
+                      <a:tailEnd type="none" w="med" len="med"/>
+                    </a:lnR>
+                    <a:lnT w="6350" cap="flat" cmpd="sng" algn="ctr">
+                      <a:solidFill>
+                        <a:srgbClr val="C9CFDB"/>
+                      </a:solidFill>
+                      <a:prstDash val="solid"/>
+                      <a:round/>
+                      <a:headEnd type="none" w="med" len="med"/>
+                      <a:tailEnd type="none" w="med" len="med"/>
+                    </a:lnT>
+                    <a:lnB w="6350" cap="flat" cmpd="sng" algn="ctr">
+                      <a:solidFill>
+                        <a:srgbClr val="C9CFDB"/>
+                      </a:solidFill>
+                      <a:prstDash val="solid"/>
+                      <a:round/>
+                      <a:headEnd type="none" w="med" len="med"/>
+                      <a:tailEnd type="none" w="med" len="med"/>
+                    </a:lnB>
+                    <a:solidFill>
+                      <a:srgbClr val="FFFFFF"/>
+                    </a:solidFill>
+                  </a:tcPr>
+                </a:tc>
+                <a:tc>
+                  <a:txBody>
+                    <a:bodyPr/>
+                    <a:lstStyle/>
+                    <a:p>
+                      <a:pPr indent="0" marL="0">
+                        <a:buNone/>
+                      </a:pPr>
+                      <a:r>
+                        <a:rPr lang="en-US" sz="900" dirty="0">
+                          <a:solidFill>
+                            <a:srgbClr val="1E2433"/>
+                          </a:solidFill>
+                          <a:latin typeface="Meiryo" pitchFamily="34" charset="0"/>
+                          <a:ea typeface="Meiryo" pitchFamily="34" charset="-122"/>
+                          <a:cs typeface="Meiryo" pitchFamily="34" charset="-120"/>
+                        </a:rPr>
+                        <a:t>NeurIPS 2024</a:t>
+                      </a:r>
+                      <a:endParaRPr lang="en-US" sz="900" dirty="0">
+                        <a:latin typeface="Meiryo" charset="0"/>
+                        <a:ea typeface="Meiryo" charset="0"/>
+                        <a:cs typeface="Meiryo" charset="0"/>
+                      </a:endParaRPr>
+                    </a:p>
+                  </a:txBody>
+                  <a:tcPr marL="73152" marR="73152" marT="27432" marB="27432" anchor="ctr">
+                    <a:lnL w="6350" cap="flat" cmpd="sng" algn="ctr">
+                      <a:solidFill>
+                        <a:srgbClr val="C9CFDB"/>
+                      </a:solidFill>
+                      <a:prstDash val="solid"/>
+                      <a:round/>
+                      <a:headEnd type="none" w="med" len="med"/>
+                      <a:tailEnd type="none" w="med" len="med"/>
+                    </a:lnL>
+                    <a:lnR w="6350" cap="flat" cmpd="sng" algn="ctr">
+                      <a:solidFill>
+                        <a:srgbClr val="C9CFDB"/>
+                      </a:solidFill>
+                      <a:prstDash val="solid"/>
+                      <a:round/>
+                      <a:headEnd type="none" w="med" len="med"/>
+                      <a:tailEnd type="none" w="med" len="med"/>
+                    </a:lnR>
+                    <a:lnT w="6350" cap="flat" cmpd="sng" algn="ctr">
+                      <a:solidFill>
+                        <a:srgbClr val="C9CFDB"/>
+                      </a:solidFill>
+                      <a:prstDash val="solid"/>
+                      <a:round/>
+                      <a:headEnd type="none" w="med" len="med"/>
+                      <a:tailEnd type="none" w="med" len="med"/>
+                    </a:lnT>
+                    <a:lnB w="6350" cap="flat" cmpd="sng" algn="ctr">
+                      <a:solidFill>
+                        <a:srgbClr val="C9CFDB"/>
+                      </a:solidFill>
+                      <a:prstDash val="solid"/>
+                      <a:round/>
+                      <a:headEnd type="none" w="med" len="med"/>
+                      <a:tailEnd type="none" w="med" len="med"/>
+                    </a:lnB>
+                    <a:solidFill>
+                      <a:srgbClr val="FFFFFF"/>
+                    </a:solidFill>
+                  </a:tcPr>
+                </a:tc>
+                <a:tc>
+                  <a:txBody>
+                    <a:bodyPr/>
+                    <a:lstStyle/>
+                    <a:p>
+                      <a:pPr indent="0" marL="0">
+                        <a:buNone/>
+                      </a:pPr>
+                      <a:r>
+                        <a:rPr lang="en-US" sz="900" dirty="0">
+                          <a:solidFill>
+                            <a:srgbClr val="1E2433"/>
+                          </a:solidFill>
+                          <a:latin typeface="Meiryo" pitchFamily="34" charset="0"/>
+                          <a:ea typeface="Meiryo" pitchFamily="34" charset="-122"/>
+                          <a:cs typeface="Meiryo" pitchFamily="34" charset="-120"/>
+                        </a:rPr>
+                        <a:t>受賞</a:t>
+                      </a:r>
+                      <a:endParaRPr lang="en-US" sz="900" dirty="0">
+                        <a:latin typeface="Meiryo" charset="0"/>
+                        <a:ea typeface="Meiryo" charset="0"/>
+                        <a:cs typeface="Meiryo" charset="0"/>
+                      </a:endParaRPr>
+                    </a:p>
+                  </a:txBody>
+                  <a:tcPr marL="73152" marR="73152" marT="27432" marB="27432" anchor="ctr">
+                    <a:lnL w="6350" cap="flat" cmpd="sng" algn="ctr">
+                      <a:solidFill>
+                        <a:srgbClr val="C9CFDB"/>
+                      </a:solidFill>
+                      <a:prstDash val="solid"/>
+                      <a:round/>
+                      <a:headEnd type="none" w="med" len="med"/>
+                      <a:tailEnd type="none" w="med" len="med"/>
+                    </a:lnL>
+                    <a:lnR w="6350" cap="flat" cmpd="sng" algn="ctr">
+                      <a:solidFill>
+                        <a:srgbClr val="C9CFDB"/>
+                      </a:solidFill>
+                      <a:prstDash val="solid"/>
+                      <a:round/>
+                      <a:headEnd type="none" w="med" len="med"/>
+                      <a:tailEnd type="none" w="med" len="med"/>
+                    </a:lnR>
+                    <a:lnT w="6350" cap="flat" cmpd="sng" algn="ctr">
+                      <a:solidFill>
+                        <a:srgbClr val="C9CFDB"/>
+                      </a:solidFill>
+                      <a:prstDash val="solid"/>
+                      <a:round/>
+                      <a:headEnd type="none" w="med" len="med"/>
+                      <a:tailEnd type="none" w="med" len="med"/>
+                    </a:lnT>
+                    <a:lnB w="6350" cap="flat" cmpd="sng" algn="ctr">
+                      <a:solidFill>
+                        <a:srgbClr val="C9CFDB"/>
+                      </a:solidFill>
+                      <a:prstDash val="solid"/>
+                      <a:round/>
+                      <a:headEnd type="none" w="med" len="med"/>
+                      <a:tailEnd type="none" w="med" len="med"/>
+                    </a:lnB>
+                    <a:solidFill>
+                      <a:srgbClr val="FFFFFF"/>
+                    </a:solidFill>
+                  </a:tcPr>
+                </a:tc>
+              </a:tr>
+              <a:tr h="225911">
+                <a:tc>
+                  <a:txBody>
+                    <a:bodyPr/>
+                    <a:lstStyle/>
+                    <a:p>
+                      <a:pPr indent="0" marL="0">
+                        <a:buNone/>
+                      </a:pPr>
+                      <a:r>
+                        <a:rPr lang="en-US" sz="900" dirty="0">
+                          <a:solidFill>
+                            <a:srgbClr val="1E2433"/>
+                          </a:solidFill>
+                          <a:latin typeface="Meiryo" pitchFamily="34" charset="0"/>
+                          <a:ea typeface="Meiryo" pitchFamily="34" charset="-122"/>
+                          <a:cs typeface="Meiryo" pitchFamily="34" charset="-120"/>
+                        </a:rPr>
+                        <a:t>15</a:t>
+                      </a:r>
+                      <a:endParaRPr lang="en-US" sz="900" dirty="0">
+                        <a:latin typeface="Meiryo" charset="0"/>
+                        <a:ea typeface="Meiryo" charset="0"/>
+                        <a:cs typeface="Meiryo" charset="0"/>
+                      </a:endParaRPr>
+                    </a:p>
+                  </a:txBody>
+                  <a:tcPr marL="73152" marR="73152" marT="27432" marB="27432" anchor="ctr">
+                    <a:lnL w="6350" cap="flat" cmpd="sng" algn="ctr">
+                      <a:solidFill>
+                        <a:srgbClr val="C9CFDB"/>
+                      </a:solidFill>
+                      <a:prstDash val="solid"/>
+                      <a:round/>
+                      <a:headEnd type="none" w="med" len="med"/>
+                      <a:tailEnd type="none" w="med" len="med"/>
+                    </a:lnL>
+                    <a:lnR w="6350" cap="flat" cmpd="sng" algn="ctr">
+                      <a:solidFill>
+                        <a:srgbClr val="C9CFDB"/>
+                      </a:solidFill>
+                      <a:prstDash val="solid"/>
+                      <a:round/>
+                      <a:headEnd type="none" w="med" len="med"/>
+                      <a:tailEnd type="none" w="med" len="med"/>
+                    </a:lnR>
+                    <a:lnT w="6350" cap="flat" cmpd="sng" algn="ctr">
+                      <a:solidFill>
+                        <a:srgbClr val="C9CFDB"/>
+                      </a:solidFill>
+                      <a:prstDash val="solid"/>
+                      <a:round/>
+                      <a:headEnd type="none" w="med" len="med"/>
+                      <a:tailEnd type="none" w="med" len="med"/>
+                    </a:lnT>
+                    <a:lnB w="6350" cap="flat" cmpd="sng" algn="ctr">
+                      <a:solidFill>
+                        <a:srgbClr val="C9CFDB"/>
+                      </a:solidFill>
+                      <a:prstDash val="solid"/>
+                      <a:round/>
+                      <a:headEnd type="none" w="med" len="med"/>
+                      <a:tailEnd type="none" w="med" len="med"/>
+                    </a:lnB>
+                    <a:solidFill>
+                      <a:srgbClr val="F2F4F8"/>
+                    </a:solidFill>
+                  </a:tcPr>
+                </a:tc>
+                <a:tc>
+                  <a:txBody>
+                    <a:bodyPr/>
+                    <a:lstStyle/>
+                    <a:p>
+                      <a:pPr indent="0" marL="0">
+                        <a:buNone/>
+                      </a:pPr>
+                      <a:r>
+                        <a:rPr lang="en-US" sz="900" dirty="0">
+                          <a:solidFill>
+                            <a:srgbClr val="1E2433"/>
+                          </a:solidFill>
+                          <a:latin typeface="Meiryo" pitchFamily="34" charset="0"/>
+                          <a:ea typeface="Meiryo" pitchFamily="34" charset="-122"/>
+                          <a:cs typeface="Meiryo" pitchFamily="34" charset="-120"/>
+                        </a:rPr>
+                        <a:t>2024</a:t>
+                      </a:r>
+                      <a:endParaRPr lang="en-US" sz="900" dirty="0">
+                        <a:latin typeface="Meiryo" charset="0"/>
+                        <a:ea typeface="Meiryo" charset="0"/>
+                        <a:cs typeface="Meiryo" charset="0"/>
+                      </a:endParaRPr>
+                    </a:p>
+                  </a:txBody>
+                  <a:tcPr marL="73152" marR="73152" marT="27432" marB="27432" anchor="ctr">
+                    <a:lnL w="6350" cap="flat" cmpd="sng" algn="ctr">
+                      <a:solidFill>
+                        <a:srgbClr val="C9CFDB"/>
+                      </a:solidFill>
+                      <a:prstDash val="solid"/>
+                      <a:round/>
+                      <a:headEnd type="none" w="med" len="med"/>
+                      <a:tailEnd type="none" w="med" len="med"/>
+                    </a:lnL>
+                    <a:lnR w="6350" cap="flat" cmpd="sng" algn="ctr">
+                      <a:solidFill>
+                        <a:srgbClr val="C9CFDB"/>
+                      </a:solidFill>
+                      <a:prstDash val="solid"/>
+                      <a:round/>
+                      <a:headEnd type="none" w="med" len="med"/>
+                      <a:tailEnd type="none" w="med" len="med"/>
+                    </a:lnR>
+                    <a:lnT w="6350" cap="flat" cmpd="sng" algn="ctr">
+                      <a:solidFill>
+                        <a:srgbClr val="C9CFDB"/>
+                      </a:solidFill>
+                      <a:prstDash val="solid"/>
+                      <a:round/>
+                      <a:headEnd type="none" w="med" len="med"/>
+                      <a:tailEnd type="none" w="med" len="med"/>
+                    </a:lnT>
+                    <a:lnB w="6350" cap="flat" cmpd="sng" algn="ctr">
+                      <a:solidFill>
+                        <a:srgbClr val="C9CFDB"/>
+                      </a:solidFill>
+                      <a:prstDash val="solid"/>
+                      <a:round/>
+                      <a:headEnd type="none" w="med" len="med"/>
+                      <a:tailEnd type="none" w="med" len="med"/>
+                    </a:lnB>
+                    <a:solidFill>
+                      <a:srgbClr val="F2F4F8"/>
+                    </a:solidFill>
+                  </a:tcPr>
+                </a:tc>
+                <a:tc>
+                  <a:txBody>
+                    <a:bodyPr/>
+                    <a:lstStyle/>
+                    <a:p>
+                      <a:pPr indent="0" marL="0">
+                        <a:buNone/>
+                      </a:pPr>
+                      <a:r>
+                        <a:rPr lang="en-US" sz="900" dirty="0">
+                          <a:solidFill>
+                            <a:srgbClr val="1E2433"/>
+                          </a:solidFill>
+                          <a:latin typeface="Meiryo" pitchFamily="34" charset="0"/>
+                          <a:ea typeface="Meiryo" pitchFamily="34" charset="-122"/>
+                          <a:cs typeface="Meiryo" pitchFamily="34" charset="-120"/>
+                        </a:rPr>
+                        <a:t>Autoguidance (Karras+ 2024)</a:t>
+                      </a:r>
+                      <a:endParaRPr lang="en-US" sz="900" dirty="0">
+                        <a:latin typeface="Meiryo" charset="0"/>
+                        <a:ea typeface="Meiryo" charset="0"/>
+                        <a:cs typeface="Meiryo" charset="0"/>
+                      </a:endParaRPr>
+                    </a:p>
+                  </a:txBody>
+                  <a:tcPr marL="73152" marR="73152" marT="27432" marB="27432" anchor="ctr">
+                    <a:lnL w="6350" cap="flat" cmpd="sng" algn="ctr">
+                      <a:solidFill>
+                        <a:srgbClr val="C9CFDB"/>
+                      </a:solidFill>
+                      <a:prstDash val="solid"/>
+                      <a:round/>
+                      <a:headEnd type="none" w="med" len="med"/>
+                      <a:tailEnd type="none" w="med" len="med"/>
+                    </a:lnL>
+                    <a:lnR w="6350" cap="flat" cmpd="sng" algn="ctr">
+                      <a:solidFill>
+                        <a:srgbClr val="C9CFDB"/>
+                      </a:solidFill>
+                      <a:prstDash val="solid"/>
+                      <a:round/>
+                      <a:headEnd type="none" w="med" len="med"/>
+                      <a:tailEnd type="none" w="med" len="med"/>
+                    </a:lnR>
+                    <a:lnT w="6350" cap="flat" cmpd="sng" algn="ctr">
+                      <a:solidFill>
+                        <a:srgbClr val="C9CFDB"/>
+                      </a:solidFill>
+                      <a:prstDash val="solid"/>
+                      <a:round/>
+                      <a:headEnd type="none" w="med" len="med"/>
+                      <a:tailEnd type="none" w="med" len="med"/>
+                    </a:lnT>
+                    <a:lnB w="6350" cap="flat" cmpd="sng" algn="ctr">
+                      <a:solidFill>
+                        <a:srgbClr val="C9CFDB"/>
+                      </a:solidFill>
+                      <a:prstDash val="solid"/>
+                      <a:round/>
+                      <a:headEnd type="none" w="med" len="med"/>
+                      <a:tailEnd type="none" w="med" len="med"/>
+                    </a:lnB>
+                    <a:solidFill>
+                      <a:srgbClr val="F2F4F8"/>
+                    </a:solidFill>
+                  </a:tcPr>
+                </a:tc>
+                <a:tc>
+                  <a:txBody>
+                    <a:bodyPr/>
+                    <a:lstStyle/>
+                    <a:p>
+                      <a:pPr indent="0" marL="0">
+                        <a:buNone/>
+                      </a:pPr>
+                      <a:r>
+                        <a:rPr lang="en-US" sz="900" dirty="0">
+                          <a:solidFill>
+                            <a:srgbClr val="1E2433"/>
+                          </a:solidFill>
+                          <a:latin typeface="Meiryo" pitchFamily="34" charset="0"/>
+                          <a:ea typeface="Meiryo" pitchFamily="34" charset="-122"/>
+                          <a:cs typeface="Meiryo" pitchFamily="34" charset="-120"/>
+                        </a:rPr>
+                        <a:t>NeurIPS 2024</a:t>
+                      </a:r>
+                      <a:endParaRPr lang="en-US" sz="900" dirty="0">
+                        <a:latin typeface="Meiryo" charset="0"/>
+                        <a:ea typeface="Meiryo" charset="0"/>
+                        <a:cs typeface="Meiryo" charset="0"/>
+                      </a:endParaRPr>
+                    </a:p>
+                  </a:txBody>
+                  <a:tcPr marL="73152" marR="73152" marT="27432" marB="27432" anchor="ctr">
+                    <a:lnL w="6350" cap="flat" cmpd="sng" algn="ctr">
+                      <a:solidFill>
+                        <a:srgbClr val="C9CFDB"/>
+                      </a:solidFill>
+                      <a:prstDash val="solid"/>
+                      <a:round/>
+                      <a:headEnd type="none" w="med" len="med"/>
+                      <a:tailEnd type="none" w="med" len="med"/>
+                    </a:lnL>
+                    <a:lnR w="6350" cap="flat" cmpd="sng" algn="ctr">
+                      <a:solidFill>
+                        <a:srgbClr val="C9CFDB"/>
+                      </a:solidFill>
+                      <a:prstDash val="solid"/>
+                      <a:round/>
+                      <a:headEnd type="none" w="med" len="med"/>
+                      <a:tailEnd type="none" w="med" len="med"/>
+                    </a:lnR>
+                    <a:lnT w="6350" cap="flat" cmpd="sng" algn="ctr">
+                      <a:solidFill>
+                        <a:srgbClr val="C9CFDB"/>
+                      </a:solidFill>
+                      <a:prstDash val="solid"/>
+                      <a:round/>
+                      <a:headEnd type="none" w="med" len="med"/>
+                      <a:tailEnd type="none" w="med" len="med"/>
+                    </a:lnT>
+                    <a:lnB w="6350" cap="flat" cmpd="sng" algn="ctr">
+                      <a:solidFill>
+                        <a:srgbClr val="C9CFDB"/>
+                      </a:solidFill>
+                      <a:prstDash val="solid"/>
+                      <a:round/>
+                      <a:headEnd type="none" w="med" len="med"/>
+                      <a:tailEnd type="none" w="med" len="med"/>
+                    </a:lnB>
+                    <a:solidFill>
+                      <a:srgbClr val="F2F4F8"/>
+                    </a:solidFill>
+                  </a:tcPr>
+                </a:tc>
+                <a:tc>
+                  <a:txBody>
+                    <a:bodyPr/>
+                    <a:lstStyle/>
+                    <a:p>
+                      <a:pPr indent="0" marL="0">
+                        <a:buNone/>
+                      </a:pPr>
+                      <a:r>
+                        <a:rPr lang="en-US" sz="900" dirty="0">
+                          <a:solidFill>
+                            <a:srgbClr val="1E2433"/>
+                          </a:solidFill>
+                          <a:latin typeface="Meiryo" pitchFamily="34" charset="0"/>
+                          <a:ea typeface="Meiryo" pitchFamily="34" charset="-122"/>
+                          <a:cs typeface="Meiryo" pitchFamily="34" charset="-120"/>
+                        </a:rPr>
+                        <a:t>受賞</a:t>
+                      </a:r>
+                      <a:endParaRPr lang="en-US" sz="900" dirty="0">
+                        <a:latin typeface="Meiryo" charset="0"/>
+                        <a:ea typeface="Meiryo" charset="0"/>
+                        <a:cs typeface="Meiryo" charset="0"/>
+                      </a:endParaRPr>
+                    </a:p>
+                  </a:txBody>
+                  <a:tcPr marL="73152" marR="73152" marT="27432" marB="27432" anchor="ctr">
+                    <a:lnL w="6350" cap="flat" cmpd="sng" algn="ctr">
+                      <a:solidFill>
+                        <a:srgbClr val="C9CFDB"/>
+                      </a:solidFill>
+                      <a:prstDash val="solid"/>
+                      <a:round/>
+                      <a:headEnd type="none" w="med" len="med"/>
+                      <a:tailEnd type="none" w="med" len="med"/>
+                    </a:lnL>
+                    <a:lnR w="6350" cap="flat" cmpd="sng" algn="ctr">
+                      <a:solidFill>
+                        <a:srgbClr val="C9CFDB"/>
+                      </a:solidFill>
+                      <a:prstDash val="solid"/>
+                      <a:round/>
+                      <a:headEnd type="none" w="med" len="med"/>
+                      <a:tailEnd type="none" w="med" len="med"/>
+                    </a:lnR>
+                    <a:lnT w="6350" cap="flat" cmpd="sng" algn="ctr">
+                      <a:solidFill>
+                        <a:srgbClr val="C9CFDB"/>
+                      </a:solidFill>
+                      <a:prstDash val="solid"/>
+                      <a:round/>
+                      <a:headEnd type="none" w="med" len="med"/>
+                      <a:tailEnd type="none" w="med" len="med"/>
+                    </a:lnT>
+                    <a:lnB w="6350" cap="flat" cmpd="sng" algn="ctr">
+                      <a:solidFill>
+                        <a:srgbClr val="C9CFDB"/>
+                      </a:solidFill>
+                      <a:prstDash val="solid"/>
+                      <a:round/>
+                      <a:headEnd type="none" w="med" len="med"/>
+                      <a:tailEnd type="none" w="med" len="med"/>
+                    </a:lnB>
+                    <a:solidFill>
+                      <a:srgbClr val="F2F4F8"/>
+                    </a:solidFill>
+                  </a:tcPr>
+                </a:tc>
+              </a:tr>
+              <a:tr h="225911">
+                <a:tc>
+                  <a:txBody>
+                    <a:bodyPr/>
+                    <a:lstStyle/>
+                    <a:p>
+                      <a:pPr indent="0" marL="0">
+                        <a:buNone/>
+                      </a:pPr>
+                      <a:r>
+                        <a:rPr lang="en-US" sz="900" dirty="0">
+                          <a:solidFill>
+                            <a:srgbClr val="1E2433"/>
+                          </a:solidFill>
+                          <a:latin typeface="Meiryo" pitchFamily="34" charset="0"/>
+                          <a:ea typeface="Meiryo" pitchFamily="34" charset="-122"/>
+                          <a:cs typeface="Meiryo" pitchFamily="34" charset="-120"/>
+                        </a:rPr>
+                        <a:t>16</a:t>
+                      </a:r>
+                      <a:endParaRPr lang="en-US" sz="900" dirty="0">
+                        <a:latin typeface="Meiryo" charset="0"/>
+                        <a:ea typeface="Meiryo" charset="0"/>
+                        <a:cs typeface="Meiryo" charset="0"/>
+                      </a:endParaRPr>
+                    </a:p>
+                  </a:txBody>
+                  <a:tcPr marL="73152" marR="73152" marT="27432" marB="27432" anchor="ctr">
+                    <a:lnL w="6350" cap="flat" cmpd="sng" algn="ctr">
+                      <a:solidFill>
+                        <a:srgbClr val="C9CFDB"/>
+                      </a:solidFill>
+                      <a:prstDash val="solid"/>
+                      <a:round/>
+                      <a:headEnd type="none" w="med" len="med"/>
+                      <a:tailEnd type="none" w="med" len="med"/>
+                    </a:lnL>
+                    <a:lnR w="6350" cap="flat" cmpd="sng" algn="ctr">
+                      <a:solidFill>
+                        <a:srgbClr val="C9CFDB"/>
+                      </a:solidFill>
+                      <a:prstDash val="solid"/>
+                      <a:round/>
+                      <a:headEnd type="none" w="med" len="med"/>
+                      <a:tailEnd type="none" w="med" len="med"/>
+                    </a:lnR>
+                    <a:lnT w="6350" cap="flat" cmpd="sng" algn="ctr">
+                      <a:solidFill>
+                        <a:srgbClr val="C9CFDB"/>
+                      </a:solidFill>
+                      <a:prstDash val="solid"/>
+                      <a:round/>
+                      <a:headEnd type="none" w="med" len="med"/>
+                      <a:tailEnd type="none" w="med" len="med"/>
+                    </a:lnT>
+                    <a:lnB w="6350" cap="flat" cmpd="sng" algn="ctr">
+                      <a:solidFill>
+                        <a:srgbClr val="C9CFDB"/>
+                      </a:solidFill>
+                      <a:prstDash val="solid"/>
+                      <a:round/>
+                      <a:headEnd type="none" w="med" len="med"/>
+                      <a:tailEnd type="none" w="med" len="med"/>
+                    </a:lnB>
+                    <a:solidFill>
+                      <a:srgbClr val="FFFFFF"/>
+                    </a:solidFill>
+                  </a:tcPr>
+                </a:tc>
+                <a:tc>
+                  <a:txBody>
+                    <a:bodyPr/>
+                    <a:lstStyle/>
+                    <a:p>
+                      <a:pPr indent="0" marL="0">
+                        <a:buNone/>
+                      </a:pPr>
+                      <a:r>
+                        <a:rPr lang="en-US" sz="900" dirty="0">
+                          <a:solidFill>
+                            <a:srgbClr val="1E2433"/>
+                          </a:solidFill>
+                          <a:latin typeface="Meiryo" pitchFamily="34" charset="0"/>
+                          <a:ea typeface="Meiryo" pitchFamily="34" charset="-122"/>
+                          <a:cs typeface="Meiryo" pitchFamily="34" charset="-120"/>
+                        </a:rPr>
+                        <a:t>2024</a:t>
+                      </a:r>
+                      <a:endParaRPr lang="en-US" sz="900" dirty="0">
+                        <a:latin typeface="Meiryo" charset="0"/>
+                        <a:ea typeface="Meiryo" charset="0"/>
+                        <a:cs typeface="Meiryo" charset="0"/>
+                      </a:endParaRPr>
+                    </a:p>
+                  </a:txBody>
+                  <a:tcPr marL="73152" marR="73152" marT="27432" marB="27432" anchor="ctr">
+                    <a:lnL w="6350" cap="flat" cmpd="sng" algn="ctr">
+                      <a:solidFill>
+                        <a:srgbClr val="C9CFDB"/>
+                      </a:solidFill>
+                      <a:prstDash val="solid"/>
+                      <a:round/>
+                      <a:headEnd type="none" w="med" len="med"/>
+                      <a:tailEnd type="none" w="med" len="med"/>
+                    </a:lnL>
+                    <a:lnR w="6350" cap="flat" cmpd="sng" algn="ctr">
+                      <a:solidFill>
+                        <a:srgbClr val="C9CFDB"/>
+                      </a:solidFill>
+                      <a:prstDash val="solid"/>
+                      <a:round/>
+                      <a:headEnd type="none" w="med" len="med"/>
+                      <a:tailEnd type="none" w="med" len="med"/>
+                    </a:lnR>
+                    <a:lnT w="6350" cap="flat" cmpd="sng" algn="ctr">
+                      <a:solidFill>
+                        <a:srgbClr val="C9CFDB"/>
+                      </a:solidFill>
+                      <a:prstDash val="solid"/>
+                      <a:round/>
+                      <a:headEnd type="none" w="med" len="med"/>
+                      <a:tailEnd type="none" w="med" len="med"/>
+                    </a:lnT>
+                    <a:lnB w="6350" cap="flat" cmpd="sng" algn="ctr">
+                      <a:solidFill>
+                        <a:srgbClr val="C9CFDB"/>
+                      </a:solidFill>
+                      <a:prstDash val="solid"/>
+                      <a:round/>
+                      <a:headEnd type="none" w="med" len="med"/>
+                      <a:tailEnd type="none" w="med" len="med"/>
+                    </a:lnB>
+                    <a:solidFill>
+                      <a:srgbClr val="FFFFFF"/>
+                    </a:solidFill>
+                  </a:tcPr>
+                </a:tc>
+                <a:tc>
+                  <a:txBody>
+                    <a:bodyPr/>
+                    <a:lstStyle/>
+                    <a:p>
+                      <a:pPr indent="0" marL="0">
+                        <a:buNone/>
+                      </a:pPr>
+                      <a:r>
+                        <a:rPr lang="en-US" sz="900" dirty="0">
+                          <a:solidFill>
+                            <a:srgbClr val="1E2433"/>
+                          </a:solidFill>
+                          <a:latin typeface="Meiryo" pitchFamily="34" charset="0"/>
+                          <a:ea typeface="Meiryo" pitchFamily="34" charset="-122"/>
+                          <a:cs typeface="Meiryo" pitchFamily="34" charset="-120"/>
+                        </a:rPr>
+                        <a:t>Rho-1 (Lin+ 2024)</a:t>
+                      </a:r>
+                      <a:endParaRPr lang="en-US" sz="900" dirty="0">
+                        <a:latin typeface="Meiryo" charset="0"/>
+                        <a:ea typeface="Meiryo" charset="0"/>
+                        <a:cs typeface="Meiryo" charset="0"/>
+                      </a:endParaRPr>
+                    </a:p>
+                  </a:txBody>
+                  <a:tcPr marL="73152" marR="73152" marT="27432" marB="27432" anchor="ctr">
+                    <a:lnL w="6350" cap="flat" cmpd="sng" algn="ctr">
+                      <a:solidFill>
+                        <a:srgbClr val="C9CFDB"/>
+                      </a:solidFill>
+                      <a:prstDash val="solid"/>
+                      <a:round/>
+                      <a:headEnd type="none" w="med" len="med"/>
+                      <a:tailEnd type="none" w="med" len="med"/>
+                    </a:lnL>
+                    <a:lnR w="6350" cap="flat" cmpd="sng" algn="ctr">
+                      <a:solidFill>
+                        <a:srgbClr val="C9CFDB"/>
+                      </a:solidFill>
+                      <a:prstDash val="solid"/>
+                      <a:round/>
+                      <a:headEnd type="none" w="med" len="med"/>
+                      <a:tailEnd type="none" w="med" len="med"/>
+                    </a:lnR>
+                    <a:lnT w="6350" cap="flat" cmpd="sng" algn="ctr">
+                      <a:solidFill>
+                        <a:srgbClr val="C9CFDB"/>
+                      </a:solidFill>
+                      <a:prstDash val="solid"/>
+                      <a:round/>
+                      <a:headEnd type="none" w="med" len="med"/>
+                      <a:tailEnd type="none" w="med" len="med"/>
+                    </a:lnT>
+                    <a:lnB w="6350" cap="flat" cmpd="sng" algn="ctr">
+                      <a:solidFill>
+                        <a:srgbClr val="C9CFDB"/>
+                      </a:solidFill>
+                      <a:prstDash val="solid"/>
+                      <a:round/>
+                      <a:headEnd type="none" w="med" len="med"/>
+                      <a:tailEnd type="none" w="med" len="med"/>
+                    </a:lnB>
+                    <a:solidFill>
+                      <a:srgbClr val="FFFFFF"/>
+                    </a:solidFill>
+                  </a:tcPr>
+                </a:tc>
+                <a:tc>
+                  <a:txBody>
+                    <a:bodyPr/>
+                    <a:lstStyle/>
+                    <a:p>
+                      <a:pPr indent="0" marL="0">
+                        <a:buNone/>
+                      </a:pPr>
+                      <a:r>
+                        <a:rPr lang="en-US" sz="900" dirty="0">
+                          <a:solidFill>
+                            <a:srgbClr val="1E2433"/>
+                          </a:solidFill>
+                          <a:latin typeface="Meiryo" pitchFamily="34" charset="0"/>
+                          <a:ea typeface="Meiryo" pitchFamily="34" charset="-122"/>
+                          <a:cs typeface="Meiryo" pitchFamily="34" charset="-120"/>
+                        </a:rPr>
+                        <a:t>NeurIPS 2024</a:t>
+                      </a:r>
+                      <a:endParaRPr lang="en-US" sz="900" dirty="0">
+                        <a:latin typeface="Meiryo" charset="0"/>
+                        <a:ea typeface="Meiryo" charset="0"/>
+                        <a:cs typeface="Meiryo" charset="0"/>
+                      </a:endParaRPr>
+                    </a:p>
+                  </a:txBody>
+                  <a:tcPr marL="73152" marR="73152" marT="27432" marB="27432" anchor="ctr">
+                    <a:lnL w="6350" cap="flat" cmpd="sng" algn="ctr">
+                      <a:solidFill>
+                        <a:srgbClr val="C9CFDB"/>
+                      </a:solidFill>
+                      <a:prstDash val="solid"/>
+                      <a:round/>
+                      <a:headEnd type="none" w="med" len="med"/>
+                      <a:tailEnd type="none" w="med" len="med"/>
+                    </a:lnL>
+                    <a:lnR w="6350" cap="flat" cmpd="sng" algn="ctr">
+                      <a:solidFill>
+                        <a:srgbClr val="C9CFDB"/>
+                      </a:solidFill>
+                      <a:prstDash val="solid"/>
+                      <a:round/>
+                      <a:headEnd type="none" w="med" len="med"/>
+                      <a:tailEnd type="none" w="med" len="med"/>
+                    </a:lnR>
+                    <a:lnT w="6350" cap="flat" cmpd="sng" algn="ctr">
+                      <a:solidFill>
+                        <a:srgbClr val="C9CFDB"/>
+                      </a:solidFill>
+                      <a:prstDash val="solid"/>
+                      <a:round/>
+                      <a:headEnd type="none" w="med" len="med"/>
+                      <a:tailEnd type="none" w="med" len="med"/>
+                    </a:lnT>
+                    <a:lnB w="6350" cap="flat" cmpd="sng" algn="ctr">
+                      <a:solidFill>
+                        <a:srgbClr val="C9CFDB"/>
+                      </a:solidFill>
+                      <a:prstDash val="solid"/>
+                      <a:round/>
+                      <a:headEnd type="none" w="med" len="med"/>
+                      <a:tailEnd type="none" w="med" len="med"/>
+                    </a:lnB>
+                    <a:solidFill>
+                      <a:srgbClr val="FFFFFF"/>
+                    </a:solidFill>
+                  </a:tcPr>
+                </a:tc>
+                <a:tc>
+                  <a:txBody>
+                    <a:bodyPr/>
+                    <a:lstStyle/>
+                    <a:p>
+                      <a:pPr indent="0" marL="0">
+                        <a:buNone/>
+                      </a:pPr>
+                      <a:r>
+                        <a:rPr lang="en-US" sz="900" dirty="0">
+                          <a:solidFill>
+                            <a:srgbClr val="1E2433"/>
+                          </a:solidFill>
+                          <a:latin typeface="Meiryo" pitchFamily="34" charset="0"/>
+                          <a:ea typeface="Meiryo" pitchFamily="34" charset="-122"/>
+                          <a:cs typeface="Meiryo" pitchFamily="34" charset="-120"/>
+                        </a:rPr>
+                        <a:t>受賞</a:t>
+                      </a:r>
+                      <a:endParaRPr lang="en-US" sz="900" dirty="0">
                         <a:latin typeface="Meiryo" charset="0"/>
                         <a:ea typeface="Meiryo" charset="0"/>
                         <a:cs typeface="Meiryo" charset="0"/>
@@ -10417,7 +12497,7 @@
                 <a:ea typeface="Meiryo" pitchFamily="34" charset="-122"/>
                 <a:cs typeface="Meiryo" pitchFamily="34" charset="-120"/>
               </a:rPr>
-              <a:t>2026-10-27</a:t>
+              <a:t>2026-10-28</a:t>
             </a:r>
             <a:endParaRPr lang="en-US" sz="1050" dirty="0"/>
           </a:p>
@@ -11752,7 +13832,7 @@
                 <a:ea typeface="Meiryo" pitchFamily="34" charset="-122"/>
                 <a:cs typeface="Meiryo" pitchFamily="34" charset="-120"/>
               </a:rPr>
-              <a:t>2026-10-27</a:t>
+              <a:t>2026-10-28</a:t>
             </a:r>
             <a:endParaRPr lang="en-US" sz="1050" dirty="0"/>
           </a:p>
@@ -13087,7 +15167,7 @@
                 <a:ea typeface="Meiryo" pitchFamily="34" charset="-122"/>
                 <a:cs typeface="Meiryo" pitchFamily="34" charset="-120"/>
               </a:rPr>
-              <a:t>2026-10-27</a:t>
+              <a:t>2026-10-28</a:t>
             </a:r>
             <a:endParaRPr lang="en-US" sz="1050" dirty="0"/>
           </a:p>
@@ -14442,7 +16522,7 @@
                 <a:ea typeface="Meiryo" pitchFamily="34" charset="-122"/>
                 <a:cs typeface="Meiryo" pitchFamily="34" charset="-120"/>
               </a:rPr>
-              <a:t>2026-10-27</a:t>
+              <a:t>2026-10-28</a:t>
             </a:r>
             <a:endParaRPr lang="en-US" sz="1050" dirty="0"/>
           </a:p>
@@ -15797,7 +17877,7 @@
                 <a:ea typeface="Meiryo" pitchFamily="34" charset="-122"/>
                 <a:cs typeface="Meiryo" pitchFamily="34" charset="-120"/>
               </a:rPr>
-              <a:t>2026-10-27</a:t>
+              <a:t>2026-10-28</a:t>
             </a:r>
             <a:endParaRPr lang="en-US" sz="1050" dirty="0"/>
           </a:p>
@@ -17152,7 +19232,7 @@
                 <a:ea typeface="Meiryo" pitchFamily="34" charset="-122"/>
                 <a:cs typeface="Meiryo" pitchFamily="34" charset="-120"/>
               </a:rPr>
-              <a:t>2026-10-27</a:t>
+              <a:t>2026-10-28</a:t>
             </a:r>
             <a:endParaRPr lang="en-US" sz="1050" dirty="0"/>
           </a:p>
@@ -17995,7 +20075,7 @@
                 <a:ea typeface="Meiryo" pitchFamily="34" charset="-122"/>
                 <a:cs typeface="Meiryo" pitchFamily="34" charset="-120"/>
               </a:rPr>
-              <a:t>2026-10-27</a:t>
+              <a:t>2026-10-28</a:t>
             </a:r>
             <a:endParaRPr lang="en-US" sz="1050" dirty="0"/>
           </a:p>
@@ -19330,7 +21410,7 @@
                 <a:ea typeface="Meiryo" pitchFamily="34" charset="-122"/>
                 <a:cs typeface="Meiryo" pitchFamily="34" charset="-120"/>
               </a:rPr>
-              <a:t>2026-10-27</a:t>
+              <a:t>2026-10-28</a:t>
             </a:r>
             <a:endParaRPr lang="en-US" sz="1050" dirty="0"/>
           </a:p>
@@ -20665,7 +22745,7 @@
                 <a:ea typeface="Meiryo" pitchFamily="34" charset="-122"/>
                 <a:cs typeface="Meiryo" pitchFamily="34" charset="-120"/>
               </a:rPr>
-              <a:t>2026-10-27</a:t>
+              <a:t>2026-10-28</a:t>
             </a:r>
             <a:endParaRPr lang="en-US" sz="1050" dirty="0"/>
           </a:p>
@@ -21360,6 +23440,2676 @@
 </p:sld>
 </file>
 
+<file path=ppt/slides/slide26.xml><?xml version="1.0" encoding="utf-8"?>
+<p:sld xmlns:a="http://schemas.openxmlformats.org/drawingml/2006/main" xmlns:r="http://schemas.openxmlformats.org/officeDocument/2006/relationships" xmlns:p="http://schemas.openxmlformats.org/presentationml/2006/main">
+  <p:cSld name="Slide 26">
+    <p:spTree>
+      <p:nvGrpSpPr>
+        <p:cNvPr id="1" name=""/>
+        <p:cNvGrpSpPr/>
+        <p:nvPr/>
+      </p:nvGrpSpPr>
+      <p:grpSpPr>
+        <a:xfrm>
+          <a:off x="0" y="0"/>
+          <a:ext cx="0" cy="0"/>
+          <a:chOff x="0" y="0"/>
+          <a:chExt cx="0" cy="0"/>
+        </a:xfrm>
+      </p:grpSpPr>
+      <p:sp>
+        <p:nvSpPr>
+          <p:cNvPr id="2" name="Text 20"/>
+          <p:cNvSpPr/>
+          <p:nvPr>
+            <p:ph idx="126" type="body" hasCustomPrompt="1"/>
+          </p:nvPr>
+        </p:nvSpPr>
+        <p:spPr>
+          <a:xfrm>
+            <a:off x="457200" y="274320"/>
+            <a:ext cx="11277295" cy="256032"/>
+          </a:xfrm>
+          <a:prstGeom prst="rect">
+            <a:avLst/>
+          </a:prstGeom>
+          <a:noFill/>
+          <a:ln/>
+        </p:spPr>
+        <p:txBody>
+          <a:bodyPr wrap="square" lIns="0" tIns="0" rIns="0" bIns="0" rtlCol="0" anchor="ctr"/>
+          <a:lstStyle/>
+          <a:p>
+            <a:pPr indent="0" marL="0">
+              <a:buNone/>
+            </a:pPr>
+            <a:r>
+              <a:rPr lang="en-US" sz="1100" b="1" dirty="0">
+                <a:solidFill>
+                  <a:srgbClr val="1F6F78"/>
+                </a:solidFill>
+                <a:latin typeface="Meiryo" pitchFamily="34" charset="0"/>
+                <a:ea typeface="Meiryo" pitchFamily="34" charset="-122"/>
+                <a:cs typeface="Meiryo" pitchFamily="34" charset="-120"/>
+              </a:rPr>
+              <a:t>学会調査 › NeurIPS：受賞・注目論文 ｜ NeurIPS 2024 Best Paper Award</a:t>
+            </a:r>
+            <a:endParaRPr lang="en-US" sz="1100" dirty="0"/>
+          </a:p>
+        </p:txBody>
+      </p:sp>
+      <p:sp>
+        <p:nvSpPr>
+          <p:cNvPr id="3" name="Text 20"/>
+          <p:cNvSpPr/>
+          <p:nvPr>
+            <p:ph idx="127" type="body" hasCustomPrompt="1"/>
+          </p:nvPr>
+        </p:nvSpPr>
+        <p:spPr>
+          <a:xfrm>
+            <a:off x="457200" y="530352"/>
+            <a:ext cx="11277295" cy="566928"/>
+          </a:xfrm>
+          <a:prstGeom prst="rect">
+            <a:avLst/>
+          </a:prstGeom>
+          <a:noFill/>
+          <a:ln/>
+        </p:spPr>
+        <p:txBody>
+          <a:bodyPr wrap="square" lIns="0" tIns="0" rIns="0" bIns="0" rtlCol="0" anchor="ctr"/>
+          <a:lstStyle/>
+          <a:p>
+            <a:pPr indent="0" marL="0">
+              <a:lnSpc>
+                <a:spcPts val="2150"/>
+              </a:lnSpc>
+              <a:buNone/>
+            </a:pPr>
+            <a:r>
+              <a:rPr lang="en-US" sz="1600" b="1" dirty="0">
+                <a:solidFill>
+                  <a:srgbClr val="1E2433"/>
+                </a:solidFill>
+                <a:latin typeface="Meiryo" pitchFamily="34" charset="0"/>
+                <a:ea typeface="Meiryo" pitchFamily="34" charset="-122"/>
+                <a:cs typeface="Meiryo" pitchFamily="34" charset="-120"/>
+              </a:rPr>
+              <a:t>Visual Autoregressive Modeling: Scalable Image Generation via Next-Scale Prediction</a:t>
+            </a:r>
+            <a:endParaRPr lang="en-US" sz="2400" dirty="0"/>
+          </a:p>
+        </p:txBody>
+      </p:sp>
+      <p:sp>
+        <p:nvSpPr>
+          <p:cNvPr id="4" name="Text 20"/>
+          <p:cNvSpPr/>
+          <p:nvPr>
+            <p:ph idx="128" type="body" hasCustomPrompt="1"/>
+          </p:nvPr>
+        </p:nvSpPr>
+        <p:spPr>
+          <a:xfrm>
+            <a:off x="457200" y="1115568"/>
+            <a:ext cx="11277295" cy="274320"/>
+          </a:xfrm>
+          <a:prstGeom prst="rect">
+            <a:avLst/>
+          </a:prstGeom>
+          <a:noFill/>
+          <a:ln/>
+        </p:spPr>
+        <p:txBody>
+          <a:bodyPr wrap="square" lIns="0" tIns="0" rIns="0" bIns="0" rtlCol="0" anchor="ctr"/>
+          <a:lstStyle/>
+          <a:p>
+            <a:pPr indent="0" marL="0">
+              <a:buNone/>
+            </a:pPr>
+            <a:r>
+              <a:rPr lang="en-US" sz="1200" dirty="0">
+                <a:solidFill>
+                  <a:srgbClr val="5B6478"/>
+                </a:solidFill>
+                <a:latin typeface="Meiryo" pitchFamily="34" charset="0"/>
+                <a:ea typeface="Meiryo" pitchFamily="34" charset="-122"/>
+                <a:cs typeface="Meiryo" pitchFamily="34" charset="-120"/>
+              </a:rPr>
+              <a:t>Keyu Tian, Yi Jiang, Zehuan Yuan, Bingyue Peng, Liwei Wang（北京大学・ByteDance）｜ NeurIPS 2024</a:t>
+            </a:r>
+            <a:endParaRPr lang="en-US" sz="1200" dirty="0"/>
+          </a:p>
+        </p:txBody>
+      </p:sp>
+      <p:sp>
+        <p:nvSpPr>
+          <p:cNvPr id="5" name="Text 20"/>
+          <p:cNvSpPr/>
+          <p:nvPr>
+            <p:ph idx="120" type="body" hasCustomPrompt="1"/>
+          </p:nvPr>
+        </p:nvSpPr>
+        <p:spPr>
+          <a:xfrm>
+            <a:off x="621792" y="1984248"/>
+            <a:ext cx="3465576" cy="960120"/>
+          </a:xfrm>
+          <a:prstGeom prst="rect">
+            <a:avLst/>
+          </a:prstGeom>
+          <a:noFill/>
+          <a:ln/>
+        </p:spPr>
+        <p:txBody>
+          <a:bodyPr wrap="square" lIns="0" tIns="0" rIns="0" bIns="0" rtlCol="0" anchor="t"/>
+          <a:lstStyle/>
+          <a:p>
+            <a:pPr indent="0" marL="0">
+              <a:lnSpc>
+                <a:spcPts val="1350"/>
+              </a:lnSpc>
+              <a:buNone/>
+            </a:pPr>
+            <a:r>
+              <a:rPr lang="en-US" sz="1000" dirty="0">
+                <a:solidFill>
+                  <a:srgbClr val="1E2433"/>
+                </a:solidFill>
+                <a:latin typeface="Meiryo" pitchFamily="34" charset="0"/>
+                <a:ea typeface="Meiryo" pitchFamily="34" charset="-122"/>
+                <a:cs typeface="Meiryo" pitchFamily="34" charset="-120"/>
+              </a:rPr>
+              <a:t>画像の自己回帰生成を、ラスター順の「次トークン予測」から粗→細の「次スケール（解像度）予測」に置き換えた VAR を提案。GPT 型の AR モデルとして初めて拡散トランスフォーマ（DiT）を FID で上回り、推論も約20倍速い。</a:t>
+            </a:r>
+            <a:endParaRPr lang="en-US" sz="1200" dirty="0"/>
+          </a:p>
+        </p:txBody>
+      </p:sp>
+      <p:sp>
+        <p:nvSpPr>
+          <p:cNvPr id="6" name="Text 20"/>
+          <p:cNvSpPr/>
+          <p:nvPr>
+            <p:ph idx="121" type="body" hasCustomPrompt="1"/>
+          </p:nvPr>
+        </p:nvSpPr>
+        <p:spPr>
+          <a:xfrm>
+            <a:off x="4553712" y="1984248"/>
+            <a:ext cx="3465576" cy="960120"/>
+          </a:xfrm>
+          <a:prstGeom prst="rect">
+            <a:avLst/>
+          </a:prstGeom>
+          <a:noFill/>
+          <a:ln/>
+        </p:spPr>
+        <p:txBody>
+          <a:bodyPr wrap="square" lIns="0" tIns="0" rIns="0" bIns="0" rtlCol="0" anchor="t"/>
+          <a:lstStyle/>
+          <a:p>
+            <a:pPr indent="0" marL="0">
+              <a:lnSpc>
+                <a:spcPts val="1350"/>
+              </a:lnSpc>
+              <a:buNone/>
+            </a:pPr>
+            <a:r>
+              <a:rPr lang="en-US" sz="1000" dirty="0">
+                <a:solidFill>
+                  <a:srgbClr val="1E2433"/>
+                </a:solidFill>
+                <a:latin typeface="Meiryo" pitchFamily="34" charset="0"/>
+                <a:ea typeface="Meiryo" pitchFamily="34" charset="-122"/>
+                <a:cs typeface="Meiryo" pitchFamily="34" charset="-120"/>
+              </a:rPr>
+              <a:t>VQGAN 等の AR 画像生成は 2D トークンを1列に並べるため、双方向の依存を一方向で扱う矛盾、空間局所性の破壊、O(n^6) の計算量という問題を抱え、拡散モデルに大きく劣っていた。スケーリング則も未確認だった。</a:t>
+            </a:r>
+            <a:endParaRPr lang="en-US" sz="1200" dirty="0"/>
+          </a:p>
+        </p:txBody>
+      </p:sp>
+      <p:sp>
+        <p:nvSpPr>
+          <p:cNvPr id="7" name="Text 20"/>
+          <p:cNvSpPr/>
+          <p:nvPr>
+            <p:ph idx="122" type="body" hasCustomPrompt="1"/>
+          </p:nvPr>
+        </p:nvSpPr>
+        <p:spPr>
+          <a:xfrm>
+            <a:off x="621792" y="3630168"/>
+            <a:ext cx="3465576" cy="960120"/>
+          </a:xfrm>
+          <a:prstGeom prst="rect">
+            <a:avLst/>
+          </a:prstGeom>
+          <a:noFill/>
+          <a:ln/>
+        </p:spPr>
+        <p:txBody>
+          <a:bodyPr wrap="square" lIns="0" tIns="0" rIns="0" bIns="0" rtlCol="0" anchor="t"/>
+          <a:lstStyle/>
+          <a:p>
+            <a:pPr indent="0" marL="0">
+              <a:lnSpc>
+                <a:spcPts val="1350"/>
+              </a:lnSpc>
+              <a:buNone/>
+            </a:pPr>
+            <a:r>
+              <a:rPr lang="en-US" sz="1000" dirty="0">
+                <a:solidFill>
+                  <a:srgbClr val="1E2433"/>
+                </a:solidFill>
+                <a:latin typeface="Meiryo" pitchFamily="34" charset="0"/>
+                <a:ea typeface="Meiryo" pitchFamily="34" charset="-122"/>
+                <a:cs typeface="Meiryo" pitchFamily="34" charset="-120"/>
+              </a:rPr>
+              <a:t>多尺度 VQVAE で画像を 1×1 から h×w までの K 枚のトークンマップに残差的に量子化（共有コードブック V=4096）。GPT-2 型トランスフォーマがブロック単位の因果マスクで、前の全スケールを条件に次スケールの全トークンを並列に予測する。</a:t>
+            </a:r>
+            <a:endParaRPr lang="en-US" sz="1200" dirty="0"/>
+          </a:p>
+        </p:txBody>
+      </p:sp>
+      <p:sp>
+        <p:nvSpPr>
+          <p:cNvPr id="8" name="Text 20"/>
+          <p:cNvSpPr/>
+          <p:nvPr>
+            <p:ph idx="123" type="body" hasCustomPrompt="1"/>
+          </p:nvPr>
+        </p:nvSpPr>
+        <p:spPr>
+          <a:xfrm>
+            <a:off x="4553712" y="3630168"/>
+            <a:ext cx="3465576" cy="960120"/>
+          </a:xfrm>
+          <a:prstGeom prst="rect">
+            <a:avLst/>
+          </a:prstGeom>
+          <a:noFill/>
+          <a:ln/>
+        </p:spPr>
+        <p:txBody>
+          <a:bodyPr wrap="square" lIns="0" tIns="0" rIns="0" bIns="0" rtlCol="0" anchor="t"/>
+          <a:lstStyle/>
+          <a:p>
+            <a:pPr indent="0" marL="0">
+              <a:lnSpc>
+                <a:spcPts val="1300"/>
+              </a:lnSpc>
+              <a:buNone/>
+            </a:pPr>
+            <a:r>
+              <a:rPr lang="en-US" sz="950" dirty="0">
+                <a:solidFill>
+                  <a:srgbClr val="1E2433"/>
+                </a:solidFill>
+                <a:latin typeface="Meiryo" pitchFamily="34" charset="0"/>
+                <a:ea typeface="Meiryo" pitchFamily="34" charset="-122"/>
+                <a:cs typeface="Meiryo" pitchFamily="34" charset="-120"/>
+              </a:rPr>
+              <a:t>ImageNet 256 で FID 1.73・IS 350.2（2.0B）、DiT-XL/2 は 2.27、L-DiT-7B は 2.28（Table 1）。10 ステップで DiT の約1/45 の時間。AR を VAR に替えるだけで FID 18.65→5.22（Table 3）。18M〜2B の12モデルで損失がべき則（相関 −0.998, Fig. 5）。</a:t>
+            </a:r>
+            <a:endParaRPr lang="en-US" sz="1200" dirty="0"/>
+          </a:p>
+        </p:txBody>
+      </p:sp>
+      <p:sp>
+        <p:nvSpPr>
+          <p:cNvPr id="9" name="Text 20"/>
+          <p:cNvSpPr/>
+          <p:nvPr>
+            <p:ph idx="124" type="body" hasCustomPrompt="1"/>
+          </p:nvPr>
+        </p:nvSpPr>
+        <p:spPr>
+          <a:xfrm>
+            <a:off x="621792" y="5276088"/>
+            <a:ext cx="3465576" cy="960120"/>
+          </a:xfrm>
+          <a:prstGeom prst="rect">
+            <a:avLst/>
+          </a:prstGeom>
+          <a:noFill/>
+          <a:ln/>
+        </p:spPr>
+        <p:txBody>
+          <a:bodyPr wrap="square" lIns="0" tIns="0" rIns="0" bIns="0" rtlCol="0" anchor="t"/>
+          <a:lstStyle/>
+          <a:p>
+            <a:pPr indent="0" marL="0">
+              <a:lnSpc>
+                <a:spcPts val="1200"/>
+              </a:lnSpc>
+              <a:buNone/>
+            </a:pPr>
+            <a:r>
+              <a:rPr lang="en-US" sz="900" dirty="0">
+                <a:solidFill>
+                  <a:srgbClr val="1E2433"/>
+                </a:solidFill>
+                <a:latin typeface="Meiryo" pitchFamily="34" charset="0"/>
+                <a:ea typeface="Meiryo" pitchFamily="34" charset="-122"/>
+                <a:cs typeface="Meiryo" pitchFamily="34" charset="-120"/>
+              </a:rPr>
+              <a:t>著者：トークナイザは VQGAN のままで、その改良は直交する課題。テキスト条件生成と動画（3D の次スケール予測）が今後。</a:t>
+            </a:r>
+            <a:endParaRPr lang="en-US" sz="1200" dirty="0"/>
+          </a:p>
+          <a:p>
+            <a:pPr indent="0" marL="0">
+              <a:lnSpc>
+                <a:spcPts val="1200"/>
+              </a:lnSpc>
+              <a:buNone/>
+            </a:pPr>
+            <a:r>
+              <a:rPr lang="en-US" sz="900" dirty="0">
+                <a:solidFill>
+                  <a:srgbClr val="1E2433"/>
+                </a:solidFill>
+                <a:latin typeface="Meiryo" pitchFamily="34" charset="0"/>
+                <a:ea typeface="Meiryo" pitchFamily="34" charset="-122"/>
+                <a:cs typeface="Meiryo" pitchFamily="34" charset="-120"/>
+              </a:rPr>
+              <a:t>所感：「画像の順序をどう定義するか」の発想転換で AR と拡散の優劣を逆転させ、LLM 型の統一モデルへの道を開いた。</a:t>
+            </a:r>
+            <a:endParaRPr lang="en-US" sz="1200" dirty="0"/>
+          </a:p>
+        </p:txBody>
+      </p:sp>
+      <p:sp>
+        <p:nvSpPr>
+          <p:cNvPr id="10" name="Text 20"/>
+          <p:cNvSpPr/>
+          <p:nvPr>
+            <p:ph idx="125" type="body" hasCustomPrompt="1"/>
+          </p:nvPr>
+        </p:nvSpPr>
+        <p:spPr>
+          <a:xfrm>
+            <a:off x="4553712" y="5276088"/>
+            <a:ext cx="3465576" cy="960120"/>
+          </a:xfrm>
+          <a:prstGeom prst="rect">
+            <a:avLst/>
+          </a:prstGeom>
+          <a:noFill/>
+          <a:ln/>
+        </p:spPr>
+        <p:txBody>
+          <a:bodyPr wrap="square" lIns="0" tIns="0" rIns="0" bIns="0" rtlCol="0" anchor="t"/>
+          <a:lstStyle/>
+          <a:p>
+            <a:pPr indent="0" marL="0">
+              <a:lnSpc>
+                <a:spcPts val="1600"/>
+              </a:lnSpc>
+              <a:buNone/>
+            </a:pPr>
+            <a:r>
+              <a:rPr lang="en-US" sz="1200" dirty="0">
+                <a:solidFill>
+                  <a:srgbClr val="1E2433"/>
+                </a:solidFill>
+                <a:latin typeface="Meiryo" pitchFamily="34" charset="0"/>
+                <a:ea typeface="Meiryo" pitchFamily="34" charset="-122"/>
+                <a:cs typeface="Meiryo" pitchFamily="34" charset="-120"/>
+              </a:rPr>
+              <a:t>・VQGAN (Esser+ 2021)（未調査）</a:t>
+            </a:r>
+            <a:endParaRPr lang="en-US" sz="1200" dirty="0"/>
+          </a:p>
+          <a:p>
+            <a:pPr indent="0" marL="0">
+              <a:lnSpc>
+                <a:spcPts val="1600"/>
+              </a:lnSpc>
+              <a:buNone/>
+            </a:pPr>
+            <a:r>
+              <a:rPr lang="en-US" sz="1200" dirty="0">
+                <a:solidFill>
+                  <a:srgbClr val="1E2433"/>
+                </a:solidFill>
+                <a:latin typeface="Meiryo" pitchFamily="34" charset="0"/>
+                <a:ea typeface="Meiryo" pitchFamily="34" charset="-122"/>
+                <a:cs typeface="Meiryo" pitchFamily="34" charset="-120"/>
+              </a:rPr>
+              <a:t>・DiT (Peebles &amp; Xie 2023)（未調査）</a:t>
+            </a:r>
+            <a:endParaRPr lang="en-US" sz="1200" dirty="0"/>
+          </a:p>
+          <a:p>
+            <a:pPr indent="0" marL="0">
+              <a:lnSpc>
+                <a:spcPts val="1600"/>
+              </a:lnSpc>
+              <a:buNone/>
+            </a:pPr>
+            <a:r>
+              <a:rPr lang="en-US" sz="1200" dirty="0">
+                <a:solidFill>
+                  <a:srgbClr val="1E2433"/>
+                </a:solidFill>
+                <a:latin typeface="Meiryo" pitchFamily="34" charset="0"/>
+                <a:ea typeface="Meiryo" pitchFamily="34" charset="-122"/>
+                <a:cs typeface="Meiryo" pitchFamily="34" charset="-120"/>
+              </a:rPr>
+              <a:t>・MAR (Li+ 2024)（未調査）</a:t>
+            </a:r>
+            <a:endParaRPr lang="en-US" sz="1200" dirty="0"/>
+          </a:p>
+        </p:txBody>
+      </p:sp>
+      <p:sp>
+        <p:nvSpPr>
+          <p:cNvPr id="11" name="Text 20"/>
+          <p:cNvSpPr/>
+          <p:nvPr>
+            <p:ph idx="129" type="body" hasCustomPrompt="1"/>
+          </p:nvPr>
+        </p:nvSpPr>
+        <p:spPr>
+          <a:xfrm>
+            <a:off x="8503920" y="4828032"/>
+            <a:ext cx="3093415" cy="1408176"/>
+          </a:xfrm>
+          <a:prstGeom prst="rect">
+            <a:avLst/>
+          </a:prstGeom>
+          <a:noFill/>
+          <a:ln/>
+        </p:spPr>
+        <p:txBody>
+          <a:bodyPr wrap="square" lIns="0" tIns="0" rIns="0" bIns="0" rtlCol="0" anchor="t"/>
+          <a:lstStyle/>
+          <a:p>
+            <a:pPr indent="0" marL="0">
+              <a:lnSpc>
+                <a:spcPts val="1400"/>
+              </a:lnSpc>
+              <a:buNone/>
+            </a:pPr>
+            <a:r>
+              <a:rPr lang="en-US" sz="1050" b="1" dirty="0">
+                <a:solidFill>
+                  <a:srgbClr val="1E2433"/>
+                </a:solidFill>
+                <a:latin typeface="Meiryo" pitchFamily="34" charset="0"/>
+                <a:ea typeface="Meiryo" pitchFamily="34" charset="-122"/>
+                <a:cs typeface="Meiryo" pitchFamily="34" charset="-120"/>
+              </a:rPr>
+              <a:t>発表：</a:t>
+            </a:r>
+            <a:pPr indent="0" marL="0">
+              <a:lnSpc>
+                <a:spcPts val="1400"/>
+              </a:lnSpc>
+              <a:buNone/>
+            </a:pPr>
+            <a:r>
+              <a:rPr lang="en-US" sz="1050" dirty="0">
+                <a:solidFill>
+                  <a:srgbClr val="1E2433"/>
+                </a:solidFill>
+                <a:latin typeface="Meiryo" pitchFamily="34" charset="0"/>
+                <a:ea typeface="Meiryo" pitchFamily="34" charset="-122"/>
+                <a:cs typeface="Meiryo" pitchFamily="34" charset="-120"/>
+              </a:rPr>
+              <a:t>NeurIPS 2024</a:t>
+            </a:r>
+            <a:endParaRPr lang="en-US" sz="1050" dirty="0"/>
+          </a:p>
+          <a:p>
+            <a:pPr indent="0" marL="0">
+              <a:lnSpc>
+                <a:spcPts val="1400"/>
+              </a:lnSpc>
+              <a:buNone/>
+            </a:pPr>
+            <a:r>
+              <a:rPr lang="en-US" sz="1050" b="1" dirty="0">
+                <a:solidFill>
+                  <a:srgbClr val="1E2433"/>
+                </a:solidFill>
+                <a:latin typeface="Meiryo" pitchFamily="34" charset="0"/>
+                <a:ea typeface="Meiryo" pitchFamily="34" charset="-122"/>
+                <a:cs typeface="Meiryo" pitchFamily="34" charset="-120"/>
+              </a:rPr>
+              <a:t>リンク：</a:t>
+            </a:r>
+            <a:pPr indent="0" marL="0">
+              <a:lnSpc>
+                <a:spcPts val="1400"/>
+              </a:lnSpc>
+              <a:buNone/>
+            </a:pPr>
+            <a:r>
+              <a:rPr lang="en-US" sz="1050" u="sng" dirty="0">
+                <a:solidFill>
+                  <a:srgbClr val="1E2433"/>
+                </a:solidFill>
+                <a:latin typeface="Meiryo" pitchFamily="34" charset="0"/>
+                <a:ea typeface="Meiryo" pitchFamily="34" charset="-122"/>
+                <a:cs typeface="Meiryo" pitchFamily="34" charset="-120"/>
+                <a:hlinkClick r:id="rId1" invalidUrl="" action="" tgtFrame="" tooltip="" history="1" highlightClick="0" endSnd="0">
+                  <a:extLst>
+                    <a:ext uri="{A12FA001-AC4F-418D-AE19-62706E023703}">
+                      <ahyp:hlinkClr xmlns:ahyp="http://schemas.microsoft.com/office/drawing/2018/hyperlinkcolor" val="tx"/>
+                    </a:ext>
+                  </a:extLst>
+                </a:hlinkClick>
+              </a:rPr>
+              <a:t>https://arxiv.org/abs/2404.02905</a:t>
+            </a:r>
+            <a:endParaRPr lang="en-US" sz="1050" dirty="0"/>
+          </a:p>
+          <a:p>
+            <a:pPr indent="0" marL="0">
+              <a:lnSpc>
+                <a:spcPts val="1400"/>
+              </a:lnSpc>
+              <a:buNone/>
+            </a:pPr>
+            <a:r>
+              <a:rPr lang="en-US" sz="1050" b="1" dirty="0">
+                <a:solidFill>
+                  <a:srgbClr val="1E2433"/>
+                </a:solidFill>
+                <a:latin typeface="Meiryo" pitchFamily="34" charset="0"/>
+                <a:ea typeface="Meiryo" pitchFamily="34" charset="-122"/>
+                <a:cs typeface="Meiryo" pitchFamily="34" charset="-120"/>
+              </a:rPr>
+              <a:t>受賞：</a:t>
+            </a:r>
+            <a:pPr indent="0" marL="0">
+              <a:lnSpc>
+                <a:spcPts val="1400"/>
+              </a:lnSpc>
+              <a:buNone/>
+            </a:pPr>
+            <a:r>
+              <a:rPr lang="en-US" sz="1050" dirty="0">
+                <a:solidFill>
+                  <a:srgbClr val="1E2433"/>
+                </a:solidFill>
+                <a:latin typeface="Meiryo" pitchFamily="34" charset="0"/>
+                <a:ea typeface="Meiryo" pitchFamily="34" charset="-122"/>
+                <a:cs typeface="Meiryo" pitchFamily="34" charset="-120"/>
+              </a:rPr>
+              <a:t>NeurIPS 2024 Best Paper Award</a:t>
+            </a:r>
+            <a:endParaRPr lang="en-US" sz="1050" dirty="0"/>
+          </a:p>
+          <a:p>
+            <a:pPr indent="0" marL="0">
+              <a:lnSpc>
+                <a:spcPts val="1400"/>
+              </a:lnSpc>
+              <a:buNone/>
+            </a:pPr>
+            <a:r>
+              <a:rPr lang="en-US" sz="1050" b="1" dirty="0">
+                <a:solidFill>
+                  <a:srgbClr val="1E2433"/>
+                </a:solidFill>
+                <a:latin typeface="Meiryo" pitchFamily="34" charset="0"/>
+                <a:ea typeface="Meiryo" pitchFamily="34" charset="-122"/>
+                <a:cs typeface="Meiryo" pitchFamily="34" charset="-120"/>
+              </a:rPr>
+              <a:t>調査日：</a:t>
+            </a:r>
+            <a:pPr indent="0" marL="0">
+              <a:lnSpc>
+                <a:spcPts val="1400"/>
+              </a:lnSpc>
+              <a:buNone/>
+            </a:pPr>
+            <a:r>
+              <a:rPr lang="en-US" sz="1050" dirty="0">
+                <a:solidFill>
+                  <a:srgbClr val="1E2433"/>
+                </a:solidFill>
+                <a:latin typeface="Meiryo" pitchFamily="34" charset="0"/>
+                <a:ea typeface="Meiryo" pitchFamily="34" charset="-122"/>
+                <a:cs typeface="Meiryo" pitchFamily="34" charset="-120"/>
+              </a:rPr>
+              <a:t>2026-10-28</a:t>
+            </a:r>
+            <a:endParaRPr lang="en-US" sz="1050" dirty="0"/>
+          </a:p>
+          <a:p>
+            <a:pPr indent="0" marL="0">
+              <a:lnSpc>
+                <a:spcPts val="1400"/>
+              </a:lnSpc>
+              <a:buNone/>
+            </a:pPr>
+            <a:r>
+              <a:rPr lang="en-US" sz="1050" b="1" dirty="0">
+                <a:solidFill>
+                  <a:srgbClr val="1E2433"/>
+                </a:solidFill>
+                <a:latin typeface="Meiryo" pitchFamily="34" charset="0"/>
+                <a:ea typeface="Meiryo" pitchFamily="34" charset="-122"/>
+                <a:cs typeface="Meiryo" pitchFamily="34" charset="-120"/>
+              </a:rPr>
+              <a:t>確認範囲：</a:t>
+            </a:r>
+            <a:pPr indent="0" marL="0">
+              <a:lnSpc>
+                <a:spcPts val="1400"/>
+              </a:lnSpc>
+              <a:buNone/>
+            </a:pPr>
+            <a:r>
+              <a:rPr lang="en-US" sz="1050" dirty="0">
+                <a:solidFill>
+                  <a:srgbClr val="1E2433"/>
+                </a:solidFill>
+                <a:latin typeface="Meiryo" pitchFamily="34" charset="0"/>
+                <a:ea typeface="Meiryo" pitchFamily="34" charset="-122"/>
+                <a:cs typeface="Meiryo" pitchFamily="34" charset="-120"/>
+              </a:rPr>
+              <a:t>全文（問題提起・手法・実験・結果・考察）</a:t>
+            </a:r>
+            <a:endParaRPr lang="en-US" sz="1050" dirty="0"/>
+          </a:p>
+        </p:txBody>
+      </p:sp>
+      <p:sp>
+        <p:nvSpPr>
+          <p:cNvPr id="12" name="Text 20"/>
+          <p:cNvSpPr/>
+          <p:nvPr>
+            <p:ph idx="130" type="body" hasCustomPrompt="1"/>
+          </p:nvPr>
+        </p:nvSpPr>
+        <p:spPr>
+          <a:xfrm>
+            <a:off x="457200" y="6446520"/>
+            <a:ext cx="9144000" cy="274320"/>
+          </a:xfrm>
+          <a:prstGeom prst="rect">
+            <a:avLst/>
+          </a:prstGeom>
+          <a:noFill/>
+          <a:ln/>
+        </p:spPr>
+        <p:txBody>
+          <a:bodyPr wrap="square" lIns="0" tIns="0" rIns="0" bIns="0" rtlCol="0" anchor="ctr"/>
+          <a:lstStyle/>
+          <a:p>
+            <a:pPr indent="0" marL="0">
+              <a:buNone/>
+            </a:pPr>
+            <a:r>
+              <a:rPr lang="en-US" sz="1000" dirty="0">
+                <a:solidFill>
+                  <a:srgbClr val="5B6478"/>
+                </a:solidFill>
+                <a:latin typeface="Meiryo" pitchFamily="34" charset="0"/>
+                <a:ea typeface="Meiryo" pitchFamily="34" charset="-122"/>
+                <a:cs typeface="Meiryo" pitchFamily="34" charset="-120"/>
+              </a:rPr>
+              <a:t>Research Survey ｜ 学会調査 › NeurIPS：受賞・注目論文</a:t>
+            </a:r>
+            <a:endParaRPr lang="en-US" sz="1000" dirty="0"/>
+          </a:p>
+        </p:txBody>
+      </p:sp>
+      <p:pic>
+        <p:nvPicPr>
+          <p:cNvPr id="13" name="Image 0" descr="/tmp/claude-0/-home-user-researches/dc3d135a-4bab-5b84-bcb3-e0d06fe39570/scratchpad/stage/conferences/neurips/figures/var.png">    </p:cNvPr>
+          <p:cNvPicPr>
+            <a:picLocks noChangeAspect="1"/>
+          </p:cNvPicPr>
+          <p:nvPr/>
+        </p:nvPicPr>
+        <p:blipFill>
+          <a:blip r:embed="rId2"/>
+          <a:stretch>
+            <a:fillRect/>
+          </a:stretch>
+        </p:blipFill>
+        <p:spPr>
+          <a:xfrm>
+            <a:off x="8366760" y="2097602"/>
+            <a:ext cx="3367735" cy="1199756"/>
+          </a:xfrm>
+          <a:prstGeom prst="rect">
+            <a:avLst/>
+          </a:prstGeom>
+        </p:spPr>
+      </p:pic>
+      <p:sp>
+        <p:nvSpPr>
+          <p:cNvPr id="14" name="Text 11"/>
+          <p:cNvSpPr txBox="1"/>
+          <p:nvPr/>
+        </p:nvSpPr>
+        <p:spPr>
+          <a:xfrm>
+            <a:off x="8366760" y="3931920"/>
+            <a:ext cx="3367735" cy="320040"/>
+          </a:xfrm>
+          <a:prstGeom prst="rect">
+            <a:avLst/>
+          </a:prstGeom>
+          <a:noFill/>
+          <a:ln/>
+        </p:spPr>
+        <p:txBody>
+          <a:bodyPr wrap="square" lIns="0" tIns="0" rIns="0" bIns="0" rtlCol="0" anchor="t"/>
+          <a:lstStyle/>
+          <a:p>
+            <a:pPr indent="0" marL="0">
+              <a:buNone/>
+            </a:pPr>
+            <a:r>
+              <a:rPr lang="en-US" sz="950" dirty="0">
+                <a:solidFill>
+                  <a:srgbClr val="5B6478"/>
+                </a:solidFill>
+                <a:latin typeface="Meiryo" pitchFamily="34" charset="0"/>
+                <a:ea typeface="Meiryo" pitchFamily="34" charset="-122"/>
+                <a:cs typeface="Meiryo" pitchFamily="34" charset="-120"/>
+              </a:rPr>
+              <a:t>出典：VAR (Tian+ 2024) Fig. 2（(a)(b) 従来の次トークン予測と (c) VAR の次スケール予測）</a:t>
+            </a:r>
+            <a:endParaRPr lang="en-US" sz="950" dirty="0"/>
+          </a:p>
+        </p:txBody>
+      </p:sp>
+      <p:sp>
+        <p:nvSpPr>
+          <p:cNvPr id="25" name="Slide Number Placeholder 0"/>
+          <p:cNvSpPr>
+            <a:spLocks noGrp="1"/>
+          </p:cNvSpPr>
+          <p:nvPr>
+            <p:ph type="sldNum" sz="quarter" idx="4294967295"/>
+          </p:nvPr>
+        </p:nvSpPr>
+        <p:spPr>
+          <a:xfrm>
+            <a:off x="11185855" y="6446520"/>
+            <a:ext cx="548640" cy="274320"/>
+          </a:xfrm>
+          <a:prstGeom prst="rect">
+            <a:avLst/>
+          </a:prstGeom>
+          <a:extLst>
+            <a:ext uri="{C572A759-6A51-4108-AA02-DFA0A04FC94B}">
+              <ma14:wrappingTextBoxFlag xmlns:ma14="http://schemas.microsoft.com/office/mac/drawingml/2011/main" val="0"/>
+            </a:ext>
+          </a:extLst>
+        </p:spPr>
+        <p:txBody>
+          <a:bodyPr/>
+          <a:lstStyle>
+            <a:lvl1pPr>
+              <a:defRPr sz="1000">
+                <a:solidFill>
+                  <a:srgbClr val="5B6478"/>
+                </a:solidFill>
+                <a:latin typeface="Meiryo"/>
+                <a:ea typeface="Meiryo"/>
+                <a:cs typeface="Meiryo"/>
+              </a:defRPr>
+            </a:lvl1pPr>
+          </a:lstStyle>
+          <a:p>
+            <a:pPr algn="r"/>
+            <a:fld id="{F7021451-1387-4CA6-816F-3879F97B5CBC}" type="slidenum">
+              <a:rPr b="0" lang="en-US"/>
+              <a:t>26</a:t>
+            </a:fld>
+            <a:endParaRPr lang="en-US"/>
+          </a:p>
+        </p:txBody>
+      </p:sp>
+    </p:spTree>
+  </p:cSld>
+  <p:clrMapOvr>
+    <a:masterClrMapping/>
+  </p:clrMapOvr>
+</p:sld>
+</file>
+
+<file path=ppt/slides/slide27.xml><?xml version="1.0" encoding="utf-8"?>
+<p:sld xmlns:a="http://schemas.openxmlformats.org/drawingml/2006/main" xmlns:r="http://schemas.openxmlformats.org/officeDocument/2006/relationships" xmlns:p="http://schemas.openxmlformats.org/presentationml/2006/main">
+  <p:cSld name="Slide 27">
+    <p:spTree>
+      <p:nvGrpSpPr>
+        <p:cNvPr id="1" name=""/>
+        <p:cNvGrpSpPr/>
+        <p:nvPr/>
+      </p:nvGrpSpPr>
+      <p:grpSpPr>
+        <a:xfrm>
+          <a:off x="0" y="0"/>
+          <a:ext cx="0" cy="0"/>
+          <a:chOff x="0" y="0"/>
+          <a:chExt cx="0" cy="0"/>
+        </a:xfrm>
+      </p:grpSpPr>
+      <p:sp>
+        <p:nvSpPr>
+          <p:cNvPr id="2" name="Text 6"/>
+          <p:cNvSpPr/>
+          <p:nvPr>
+            <p:ph idx="109" type="body" hasCustomPrompt="1"/>
+          </p:nvPr>
+        </p:nvSpPr>
+        <p:spPr>
+          <a:xfrm>
+            <a:off x="457200" y="274320"/>
+            <a:ext cx="11277295" cy="256032"/>
+          </a:xfrm>
+          <a:prstGeom prst="rect">
+            <a:avLst/>
+          </a:prstGeom>
+          <a:noFill/>
+          <a:ln/>
+        </p:spPr>
+        <p:txBody>
+          <a:bodyPr wrap="square" lIns="0" tIns="0" rIns="0" bIns="0" rtlCol="0" anchor="ctr"/>
+          <a:lstStyle/>
+          <a:p>
+            <a:pPr indent="0" marL="0">
+              <a:buNone/>
+            </a:pPr>
+            <a:r>
+              <a:rPr lang="en-US" sz="1100" b="1" dirty="0">
+                <a:solidFill>
+                  <a:srgbClr val="1F6F78"/>
+                </a:solidFill>
+                <a:latin typeface="Meiryo" pitchFamily="34" charset="0"/>
+                <a:ea typeface="Meiryo" pitchFamily="34" charset="-122"/>
+                <a:cs typeface="Meiryo" pitchFamily="34" charset="-120"/>
+              </a:rPr>
+              <a:t>学会調査 › NeurIPS：受賞・注目論文 ｜ NeurIPS 2024 Best Paper Award ｜ 詳細・評価ポイント</a:t>
+            </a:r>
+            <a:endParaRPr lang="en-US" sz="1100" dirty="0"/>
+          </a:p>
+        </p:txBody>
+      </p:sp>
+      <p:sp>
+        <p:nvSpPr>
+          <p:cNvPr id="3" name="Text 6"/>
+          <p:cNvSpPr/>
+          <p:nvPr>
+            <p:ph idx="110" type="body" hasCustomPrompt="1"/>
+          </p:nvPr>
+        </p:nvSpPr>
+        <p:spPr>
+          <a:xfrm>
+            <a:off x="457200" y="530352"/>
+            <a:ext cx="11277295" cy="566928"/>
+          </a:xfrm>
+          <a:prstGeom prst="rect">
+            <a:avLst/>
+          </a:prstGeom>
+          <a:noFill/>
+          <a:ln/>
+        </p:spPr>
+        <p:txBody>
+          <a:bodyPr wrap="square" lIns="0" tIns="0" rIns="0" bIns="0" rtlCol="0" anchor="ctr"/>
+          <a:lstStyle/>
+          <a:p>
+            <a:pPr indent="0" marL="0">
+              <a:lnSpc>
+                <a:spcPts val="2150"/>
+              </a:lnSpc>
+              <a:buNone/>
+            </a:pPr>
+            <a:r>
+              <a:rPr lang="en-US" sz="1600" b="1" dirty="0">
+                <a:solidFill>
+                  <a:srgbClr val="1E2433"/>
+                </a:solidFill>
+                <a:latin typeface="Meiryo" pitchFamily="34" charset="0"/>
+                <a:ea typeface="Meiryo" pitchFamily="34" charset="-122"/>
+                <a:cs typeface="Meiryo" pitchFamily="34" charset="-120"/>
+              </a:rPr>
+              <a:t>Visual Autoregressive Modeling: Scalable Image Generation via Next-Scale Prediction</a:t>
+            </a:r>
+            <a:endParaRPr lang="en-US" sz="2400" dirty="0"/>
+          </a:p>
+        </p:txBody>
+      </p:sp>
+      <p:sp>
+        <p:nvSpPr>
+          <p:cNvPr id="4" name="Text 6"/>
+          <p:cNvSpPr/>
+          <p:nvPr>
+            <p:ph idx="111" type="body" hasCustomPrompt="1"/>
+          </p:nvPr>
+        </p:nvSpPr>
+        <p:spPr>
+          <a:xfrm>
+            <a:off x="457200" y="1115568"/>
+            <a:ext cx="11277295" cy="274320"/>
+          </a:xfrm>
+          <a:prstGeom prst="rect">
+            <a:avLst/>
+          </a:prstGeom>
+          <a:noFill/>
+          <a:ln/>
+        </p:spPr>
+        <p:txBody>
+          <a:bodyPr wrap="square" lIns="0" tIns="0" rIns="0" bIns="0" rtlCol="0" anchor="ctr"/>
+          <a:lstStyle/>
+          <a:p>
+            <a:pPr indent="0" marL="0">
+              <a:buNone/>
+            </a:pPr>
+            <a:r>
+              <a:rPr lang="en-US" sz="1200" dirty="0">
+                <a:solidFill>
+                  <a:srgbClr val="5B6478"/>
+                </a:solidFill>
+                <a:latin typeface="Meiryo" pitchFamily="34" charset="0"/>
+                <a:ea typeface="Meiryo" pitchFamily="34" charset="-122"/>
+                <a:cs typeface="Meiryo" pitchFamily="34" charset="-120"/>
+              </a:rPr>
+              <a:t>Keyu Tian, Yi Jiang, Zehuan Yuan, Bingyue Peng, Liwei Wang（北京大学・ByteDance）｜ NeurIPS 2024</a:t>
+            </a:r>
+            <a:endParaRPr lang="en-US" sz="1200" dirty="0"/>
+          </a:p>
+        </p:txBody>
+      </p:sp>
+      <p:sp>
+        <p:nvSpPr>
+          <p:cNvPr id="5" name="Text 2"/>
+          <p:cNvSpPr/>
+          <p:nvPr>
+            <p:ph idx="102" type="body" hasCustomPrompt="1"/>
+          </p:nvPr>
+        </p:nvSpPr>
+        <p:spPr>
+          <a:xfrm>
+            <a:off x="621792" y="1984248"/>
+            <a:ext cx="7443216" cy="4251960"/>
+          </a:xfrm>
+          <a:prstGeom prst="rect">
+            <a:avLst/>
+          </a:prstGeom>
+          <a:noFill/>
+          <a:ln/>
+        </p:spPr>
+        <p:txBody>
+          <a:bodyPr wrap="square" lIns="0" tIns="0" rIns="0" bIns="0" rtlCol="0" anchor="t"/>
+          <a:lstStyle/>
+          <a:p>
+            <a:pPr indent="0" marL="0">
+              <a:lnSpc>
+                <a:spcPts val="1900"/>
+              </a:lnSpc>
+              <a:buNone/>
+            </a:pPr>
+            <a:r>
+              <a:rPr lang="en-US" sz="1400" dirty="0">
+                <a:solidFill>
+                  <a:srgbClr val="1E2433"/>
+                </a:solidFill>
+                <a:latin typeface="Meiryo" pitchFamily="34" charset="0"/>
+                <a:ea typeface="Meiryo" pitchFamily="34" charset="-122"/>
+                <a:cs typeface="Meiryo" pitchFamily="34" charset="-120"/>
+              </a:rPr>
+              <a:t>問題設定：LLM の成功を支える自己回帰（AR）とスケーリング則を画像生成に持ち込みたいが、ラスター順の AR は拡散モデルに劣り、遅かった。</a:t>
+            </a:r>
+            <a:endParaRPr lang="en-US" sz="1200" dirty="0"/>
+          </a:p>
+          <a:p>
+            <a:pPr indent="0" marL="0">
+              <a:lnSpc>
+                <a:spcPts val="1900"/>
+              </a:lnSpc>
+              <a:buNone/>
+            </a:pPr>
+            <a:r>
+              <a:rPr lang="en-US" sz="1400" dirty="0">
+                <a:solidFill>
+                  <a:srgbClr val="1E2433"/>
+                </a:solidFill>
+                <a:latin typeface="Meiryo" pitchFamily="34" charset="0"/>
+                <a:ea typeface="Meiryo" pitchFamily="34" charset="-122"/>
+                <a:cs typeface="Meiryo" pitchFamily="34" charset="-120"/>
+              </a:rPr>
+              <a:t>手法：画像の「順序」を人の知覚に合わせて粗→細と定義し直す。多尺度 VQVAE が特徴マップを各解像度で量子化し、上のスケールでは下までの再構成との残差を符号化する。トランスフォーマは r1…r(k−1) を入力に rk を一度に予測するので、反復は O(log n) 回、計算量は O(n^4) に下がる。</a:t>
+            </a:r>
+            <a:endParaRPr lang="en-US" sz="1200" dirty="0"/>
+          </a:p>
+          <a:p>
+            <a:pPr indent="0" marL="0">
+              <a:lnSpc>
+                <a:spcPts val="1900"/>
+              </a:lnSpc>
+              <a:buNone/>
+            </a:pPr>
+            <a:r>
+              <a:rPr lang="en-US" sz="1400" dirty="0">
+                <a:solidFill>
+                  <a:srgbClr val="1E2433"/>
+                </a:solidFill>
+                <a:latin typeface="Meiryo" pitchFamily="34" charset="0"/>
+                <a:ea typeface="Meiryo" pitchFamily="34" charset="-122"/>
+                <a:cs typeface="Meiryo" pitchFamily="34" charset="-120"/>
+              </a:rPr>
+              <a:t>結果：ImageNet 256/512 で当時最良の FID（1.73/2.63）。データ効率（350 エポック対 DiT の 1400）、速度、規模拡大のいずれでも DiT を上回り、モデル規模と計算量に対するべき則を確認した。追加学習なしでインペインティングや編集もできる。</a:t>
+            </a:r>
+            <a:endParaRPr lang="en-US" sz="1200" dirty="0"/>
+          </a:p>
+          <a:p>
+            <a:pPr indent="0" marL="0">
+              <a:lnSpc>
+                <a:spcPts val="1900"/>
+              </a:lnSpc>
+              <a:buNone/>
+            </a:pPr>
+            <a:r>
+              <a:rPr lang="en-US" sz="1400" dirty="0">
+                <a:solidFill>
+                  <a:srgbClr val="1E2433"/>
+                </a:solidFill>
+                <a:latin typeface="Meiryo" pitchFamily="34" charset="0"/>
+                <a:ea typeface="Meiryo" pitchFamily="34" charset="-122"/>
+                <a:cs typeface="Meiryo" pitchFamily="34" charset="-120"/>
+              </a:rPr>
+              <a:t>限界：評価はクラス条件の ImageNet に限られ、テキスト条件や動画は今後の課題。</a:t>
+            </a:r>
+            <a:endParaRPr lang="en-US" sz="1200" dirty="0"/>
+          </a:p>
+        </p:txBody>
+      </p:sp>
+      <p:sp>
+        <p:nvSpPr>
+          <p:cNvPr id="6" name="Text 4"/>
+          <p:cNvSpPr/>
+          <p:nvPr>
+            <p:ph idx="105" type="body" hasCustomPrompt="1"/>
+          </p:nvPr>
+        </p:nvSpPr>
+        <p:spPr>
+          <a:xfrm>
+            <a:off x="8531352" y="1984248"/>
+            <a:ext cx="3038551" cy="685800"/>
+          </a:xfrm>
+          <a:prstGeom prst="rect">
+            <a:avLst/>
+          </a:prstGeom>
+          <a:noFill/>
+          <a:ln/>
+        </p:spPr>
+        <p:txBody>
+          <a:bodyPr wrap="square" lIns="0" tIns="0" rIns="0" bIns="0" rtlCol="0" anchor="t"/>
+          <a:lstStyle/>
+          <a:p>
+            <a:pPr indent="0" marL="0">
+              <a:lnSpc>
+                <a:spcPts val="1750"/>
+              </a:lnSpc>
+              <a:buNone/>
+            </a:pPr>
+            <a:r>
+              <a:rPr lang="en-US" sz="1300" dirty="0">
+                <a:solidFill>
+                  <a:srgbClr val="1E2433"/>
+                </a:solidFill>
+                <a:latin typeface="Meiryo" pitchFamily="34" charset="0"/>
+                <a:ea typeface="Meiryo" pitchFamily="34" charset="-122"/>
+                <a:cs typeface="Meiryo" pitchFamily="34" charset="-120"/>
+              </a:rPr>
+              <a:t>NeurIPS 2024 Best Paper Award</a:t>
+            </a:r>
+            <a:endParaRPr lang="en-US" sz="1200" dirty="0"/>
+          </a:p>
+        </p:txBody>
+      </p:sp>
+      <p:sp>
+        <p:nvSpPr>
+          <p:cNvPr id="7" name="Text 6"/>
+          <p:cNvSpPr/>
+          <p:nvPr>
+            <p:ph idx="108" type="body" hasCustomPrompt="1"/>
+          </p:nvPr>
+        </p:nvSpPr>
+        <p:spPr>
+          <a:xfrm>
+            <a:off x="8531352" y="3355848"/>
+            <a:ext cx="3038551" cy="2880360"/>
+          </a:xfrm>
+          <a:prstGeom prst="rect">
+            <a:avLst/>
+          </a:prstGeom>
+          <a:noFill/>
+          <a:ln/>
+        </p:spPr>
+        <p:txBody>
+          <a:bodyPr wrap="square" lIns="0" tIns="0" rIns="0" bIns="0" rtlCol="0" anchor="t"/>
+          <a:lstStyle/>
+          <a:p>
+            <a:pPr indent="0" marL="0">
+              <a:lnSpc>
+                <a:spcPts val="1750"/>
+              </a:lnSpc>
+              <a:buNone/>
+            </a:pPr>
+            <a:r>
+              <a:rPr lang="en-US" sz="1300" dirty="0">
+                <a:solidFill>
+                  <a:srgbClr val="1E2433"/>
+                </a:solidFill>
+                <a:latin typeface="Meiryo" pitchFamily="34" charset="0"/>
+                <a:ea typeface="Meiryo" pitchFamily="34" charset="-122"/>
+                <a:cs typeface="Meiryo" pitchFamily="34" charset="-120"/>
+              </a:rPr>
+              <a:t>・「次スケール予測」という単純な再定義で、AR が拡散を初めて逆転</a:t>
+            </a:r>
+            <a:endParaRPr lang="en-US" sz="1200" dirty="0"/>
+          </a:p>
+          <a:p>
+            <a:pPr indent="0" marL="0">
+              <a:lnSpc>
+                <a:spcPts val="1750"/>
+              </a:lnSpc>
+              <a:buNone/>
+            </a:pPr>
+            <a:r>
+              <a:rPr lang="en-US" sz="1300" dirty="0">
+                <a:solidFill>
+                  <a:srgbClr val="1E2433"/>
+                </a:solidFill>
+                <a:latin typeface="Meiryo" pitchFamily="34" charset="0"/>
+                <a:ea typeface="Meiryo" pitchFamily="34" charset="-122"/>
+                <a:cs typeface="Meiryo" pitchFamily="34" charset="-120"/>
+              </a:rPr>
+              <a:t>・LLM と同様のべき則スケーリングを画像の AR で実証</a:t>
+            </a:r>
+            <a:endParaRPr lang="en-US" sz="1200" dirty="0"/>
+          </a:p>
+          <a:p>
+            <a:pPr indent="0" marL="0">
+              <a:lnSpc>
+                <a:spcPts val="1750"/>
+              </a:lnSpc>
+              <a:buNone/>
+            </a:pPr>
+            <a:r>
+              <a:rPr lang="en-US" sz="1300" dirty="0">
+                <a:solidFill>
+                  <a:srgbClr val="1E2433"/>
+                </a:solidFill>
+                <a:latin typeface="Meiryo" pitchFamily="34" charset="0"/>
+                <a:ea typeface="Meiryo" pitchFamily="34" charset="-122"/>
+                <a:cs typeface="Meiryo" pitchFamily="34" charset="-120"/>
+              </a:rPr>
+              <a:t>・コードとモデルを公開し、後続の画像 AR 研究の基盤になった</a:t>
+            </a:r>
+            <a:endParaRPr lang="en-US" sz="1200" dirty="0"/>
+          </a:p>
+          <a:p>
+            <a:pPr indent="0" marL="0">
+              <a:lnSpc>
+                <a:spcPts val="1750"/>
+              </a:lnSpc>
+              <a:buNone/>
+            </a:pPr>
+            <a:r>
+              <a:rPr lang="en-US" sz="1300" dirty="0">
+                <a:solidFill>
+                  <a:srgbClr val="1E2433"/>
+                </a:solidFill>
+                <a:latin typeface="Meiryo" pitchFamily="34" charset="0"/>
+                <a:ea typeface="Meiryo" pitchFamily="34" charset="-122"/>
+                <a:cs typeface="Meiryo" pitchFamily="34" charset="-120"/>
+              </a:rPr>
+              <a:t>（調査者の見立て）</a:t>
+            </a:r>
+            <a:endParaRPr lang="en-US" sz="1200" dirty="0"/>
+          </a:p>
+        </p:txBody>
+      </p:sp>
+      <p:sp>
+        <p:nvSpPr>
+          <p:cNvPr id="8" name="Text 6"/>
+          <p:cNvSpPr/>
+          <p:nvPr>
+            <p:ph idx="112" type="body" hasCustomPrompt="1"/>
+          </p:nvPr>
+        </p:nvSpPr>
+        <p:spPr>
+          <a:xfrm>
+            <a:off x="457200" y="6446520"/>
+            <a:ext cx="9144000" cy="274320"/>
+          </a:xfrm>
+          <a:prstGeom prst="rect">
+            <a:avLst/>
+          </a:prstGeom>
+          <a:noFill/>
+          <a:ln/>
+        </p:spPr>
+        <p:txBody>
+          <a:bodyPr wrap="square" lIns="0" tIns="0" rIns="0" bIns="0" rtlCol="0" anchor="ctr"/>
+          <a:lstStyle/>
+          <a:p>
+            <a:pPr indent="0" marL="0">
+              <a:buNone/>
+            </a:pPr>
+            <a:r>
+              <a:rPr lang="en-US" sz="1000" dirty="0">
+                <a:solidFill>
+                  <a:srgbClr val="5B6478"/>
+                </a:solidFill>
+                <a:latin typeface="Meiryo" pitchFamily="34" charset="0"/>
+                <a:ea typeface="Meiryo" pitchFamily="34" charset="-122"/>
+                <a:cs typeface="Meiryo" pitchFamily="34" charset="-120"/>
+              </a:rPr>
+              <a:t>Research Survey ｜ 学会調査 › NeurIPS：受賞・注目論文</a:t>
+            </a:r>
+            <a:endParaRPr lang="en-US" sz="1000" dirty="0"/>
+          </a:p>
+        </p:txBody>
+      </p:sp>
+      <p:sp>
+        <p:nvSpPr>
+          <p:cNvPr id="25" name="Slide Number Placeholder 0"/>
+          <p:cNvSpPr>
+            <a:spLocks noGrp="1"/>
+          </p:cNvSpPr>
+          <p:nvPr>
+            <p:ph type="sldNum" sz="quarter" idx="4294967295"/>
+          </p:nvPr>
+        </p:nvSpPr>
+        <p:spPr>
+          <a:xfrm>
+            <a:off x="11185855" y="6446520"/>
+            <a:ext cx="548640" cy="274320"/>
+          </a:xfrm>
+          <a:prstGeom prst="rect">
+            <a:avLst/>
+          </a:prstGeom>
+          <a:extLst>
+            <a:ext uri="{C572A759-6A51-4108-AA02-DFA0A04FC94B}">
+              <ma14:wrappingTextBoxFlag xmlns:ma14="http://schemas.microsoft.com/office/mac/drawingml/2011/main" val="0"/>
+            </a:ext>
+          </a:extLst>
+        </p:spPr>
+        <p:txBody>
+          <a:bodyPr/>
+          <a:lstStyle>
+            <a:lvl1pPr>
+              <a:defRPr sz="1000">
+                <a:solidFill>
+                  <a:srgbClr val="5B6478"/>
+                </a:solidFill>
+                <a:latin typeface="Meiryo"/>
+                <a:ea typeface="Meiryo"/>
+                <a:cs typeface="Meiryo"/>
+              </a:defRPr>
+            </a:lvl1pPr>
+          </a:lstStyle>
+          <a:p>
+            <a:pPr algn="r"/>
+            <a:fld id="{F7021451-1387-4CA6-816F-3879F97B5CBC}" type="slidenum">
+              <a:rPr b="0" lang="en-US"/>
+              <a:t>27</a:t>
+            </a:fld>
+            <a:endParaRPr lang="en-US"/>
+          </a:p>
+        </p:txBody>
+      </p:sp>
+    </p:spTree>
+  </p:cSld>
+  <p:clrMapOvr>
+    <a:masterClrMapping/>
+  </p:clrMapOvr>
+</p:sld>
+</file>
+
+<file path=ppt/slides/slide28.xml><?xml version="1.0" encoding="utf-8"?>
+<p:sld xmlns:a="http://schemas.openxmlformats.org/drawingml/2006/main" xmlns:r="http://schemas.openxmlformats.org/officeDocument/2006/relationships" xmlns:p="http://schemas.openxmlformats.org/presentationml/2006/main">
+  <p:cSld name="Slide 28">
+    <p:spTree>
+      <p:nvGrpSpPr>
+        <p:cNvPr id="1" name=""/>
+        <p:cNvGrpSpPr/>
+        <p:nvPr/>
+      </p:nvGrpSpPr>
+      <p:grpSpPr>
+        <a:xfrm>
+          <a:off x="0" y="0"/>
+          <a:ext cx="0" cy="0"/>
+          <a:chOff x="0" y="0"/>
+          <a:chExt cx="0" cy="0"/>
+        </a:xfrm>
+      </p:grpSpPr>
+      <p:sp>
+        <p:nvSpPr>
+          <p:cNvPr id="2" name="Text 20"/>
+          <p:cNvSpPr/>
+          <p:nvPr>
+            <p:ph idx="126" type="body" hasCustomPrompt="1"/>
+          </p:nvPr>
+        </p:nvSpPr>
+        <p:spPr>
+          <a:xfrm>
+            <a:off x="457200" y="274320"/>
+            <a:ext cx="11277295" cy="256032"/>
+          </a:xfrm>
+          <a:prstGeom prst="rect">
+            <a:avLst/>
+          </a:prstGeom>
+          <a:noFill/>
+          <a:ln/>
+        </p:spPr>
+        <p:txBody>
+          <a:bodyPr wrap="square" lIns="0" tIns="0" rIns="0" bIns="0" rtlCol="0" anchor="ctr"/>
+          <a:lstStyle/>
+          <a:p>
+            <a:pPr indent="0" marL="0">
+              <a:buNone/>
+            </a:pPr>
+            <a:r>
+              <a:rPr lang="en-US" sz="1100" b="1" dirty="0">
+                <a:solidFill>
+                  <a:srgbClr val="1F6F78"/>
+                </a:solidFill>
+                <a:latin typeface="Meiryo" pitchFamily="34" charset="0"/>
+                <a:ea typeface="Meiryo" pitchFamily="34" charset="-122"/>
+                <a:cs typeface="Meiryo" pitchFamily="34" charset="-120"/>
+              </a:rPr>
+              <a:t>学会調査 › NeurIPS：受賞・注目論文 ｜ NeurIPS 2024 Best Paper Award</a:t>
+            </a:r>
+            <a:endParaRPr lang="en-US" sz="1100" dirty="0"/>
+          </a:p>
+        </p:txBody>
+      </p:sp>
+      <p:sp>
+        <p:nvSpPr>
+          <p:cNvPr id="3" name="Text 20"/>
+          <p:cNvSpPr/>
+          <p:nvPr>
+            <p:ph idx="127" type="body" hasCustomPrompt="1"/>
+          </p:nvPr>
+        </p:nvSpPr>
+        <p:spPr>
+          <a:xfrm>
+            <a:off x="457200" y="530352"/>
+            <a:ext cx="11277295" cy="566928"/>
+          </a:xfrm>
+          <a:prstGeom prst="rect">
+            <a:avLst/>
+          </a:prstGeom>
+          <a:noFill/>
+          <a:ln/>
+        </p:spPr>
+        <p:txBody>
+          <a:bodyPr wrap="square" lIns="0" tIns="0" rIns="0" bIns="0" rtlCol="0" anchor="ctr"/>
+          <a:lstStyle/>
+          <a:p>
+            <a:pPr indent="0" marL="0">
+              <a:lnSpc>
+                <a:spcPts val="2150"/>
+              </a:lnSpc>
+              <a:buNone/>
+            </a:pPr>
+            <a:r>
+              <a:rPr lang="en-US" sz="1600" b="1" dirty="0">
+                <a:solidFill>
+                  <a:srgbClr val="1E2433"/>
+                </a:solidFill>
+                <a:latin typeface="Meiryo" pitchFamily="34" charset="0"/>
+                <a:ea typeface="Meiryo" pitchFamily="34" charset="-122"/>
+                <a:cs typeface="Meiryo" pitchFamily="34" charset="-120"/>
+              </a:rPr>
+              <a:t>Stochastic Taylor Derivative Estimator: Efficient amortization for arbitrary differential operators</a:t>
+            </a:r>
+            <a:endParaRPr lang="en-US" sz="2400" dirty="0"/>
+          </a:p>
+        </p:txBody>
+      </p:sp>
+      <p:sp>
+        <p:nvSpPr>
+          <p:cNvPr id="4" name="Text 20"/>
+          <p:cNvSpPr/>
+          <p:nvPr>
+            <p:ph idx="128" type="body" hasCustomPrompt="1"/>
+          </p:nvPr>
+        </p:nvSpPr>
+        <p:spPr>
+          <a:xfrm>
+            <a:off x="457200" y="1115568"/>
+            <a:ext cx="11277295" cy="274320"/>
+          </a:xfrm>
+          <a:prstGeom prst="rect">
+            <a:avLst/>
+          </a:prstGeom>
+          <a:noFill/>
+          <a:ln/>
+        </p:spPr>
+        <p:txBody>
+          <a:bodyPr wrap="square" lIns="0" tIns="0" rIns="0" bIns="0" rtlCol="0" anchor="ctr"/>
+          <a:lstStyle/>
+          <a:p>
+            <a:pPr indent="0" marL="0">
+              <a:buNone/>
+            </a:pPr>
+            <a:r>
+              <a:rPr lang="en-US" sz="1200" dirty="0">
+                <a:solidFill>
+                  <a:srgbClr val="5B6478"/>
+                </a:solidFill>
+                <a:latin typeface="Meiryo" pitchFamily="34" charset="0"/>
+                <a:ea typeface="Meiryo" pitchFamily="34" charset="-122"/>
+                <a:cs typeface="Meiryo" pitchFamily="34" charset="-120"/>
+              </a:rPr>
+              <a:t>Zekun Shi, Zheyuan Hu, Min Lin, Kenji Kawaguchi（シンガポール国立大学・Sea AI Lab）｜ NeurIPS 2024</a:t>
+            </a:r>
+            <a:endParaRPr lang="en-US" sz="1200" dirty="0"/>
+          </a:p>
+        </p:txBody>
+      </p:sp>
+      <p:sp>
+        <p:nvSpPr>
+          <p:cNvPr id="5" name="Text 20"/>
+          <p:cNvSpPr/>
+          <p:nvPr>
+            <p:ph idx="120" type="body" hasCustomPrompt="1"/>
+          </p:nvPr>
+        </p:nvSpPr>
+        <p:spPr>
+          <a:xfrm>
+            <a:off x="621792" y="1984248"/>
+            <a:ext cx="3465576" cy="960120"/>
+          </a:xfrm>
+          <a:prstGeom prst="rect">
+            <a:avLst/>
+          </a:prstGeom>
+          <a:noFill/>
+          <a:ln/>
+        </p:spPr>
+        <p:txBody>
+          <a:bodyPr wrap="square" lIns="0" tIns="0" rIns="0" bIns="0" rtlCol="0" anchor="t"/>
+          <a:lstStyle/>
+          <a:p>
+            <a:pPr indent="0" marL="0">
+              <a:lnSpc>
+                <a:spcPts val="1350"/>
+              </a:lnSpc>
+              <a:buNone/>
+            </a:pPr>
+            <a:r>
+              <a:rPr lang="en-US" sz="1000" dirty="0">
+                <a:solidFill>
+                  <a:srgbClr val="1E2433"/>
+                </a:solidFill>
+                <a:latin typeface="Meiryo" pitchFamily="34" charset="0"/>
+                <a:ea typeface="Meiryo" pitchFamily="34" charset="-122"/>
+                <a:cs typeface="Meiryo" pitchFamily="34" charset="-120"/>
+              </a:rPr>
+              <a:t>高次・高次元の微分作用素を含む損失を、一変数の Taylor モード自動微分に適切な「ランダムなジェット」を入力して確率的に推定する STDE を提案。PINN で 100 万次元の PDE を A100 1枚・8分で解いた。</a:t>
+            </a:r>
+            <a:endParaRPr lang="en-US" sz="1200" dirty="0"/>
+          </a:p>
+        </p:txBody>
+      </p:sp>
+      <p:sp>
+        <p:nvSpPr>
+          <p:cNvPr id="6" name="Text 20"/>
+          <p:cNvSpPr/>
+          <p:nvPr>
+            <p:ph idx="121" type="body" hasCustomPrompt="1"/>
+          </p:nvPr>
+        </p:nvSpPr>
+        <p:spPr>
+          <a:xfrm>
+            <a:off x="4553712" y="1984248"/>
+            <a:ext cx="3465576" cy="960120"/>
+          </a:xfrm>
+          <a:prstGeom prst="rect">
+            <a:avLst/>
+          </a:prstGeom>
+          <a:noFill/>
+          <a:ln/>
+        </p:spPr>
+        <p:txBody>
+          <a:bodyPr wrap="square" lIns="0" tIns="0" rIns="0" bIns="0" rtlCol="0" anchor="t"/>
+          <a:lstStyle/>
+          <a:p>
+            <a:pPr indent="0" marL="0">
+              <a:lnSpc>
+                <a:spcPts val="1350"/>
+              </a:lnSpc>
+              <a:buNone/>
+            </a:pPr>
+            <a:r>
+              <a:rPr lang="en-US" sz="1000" dirty="0">
+                <a:solidFill>
+                  <a:srgbClr val="1E2433"/>
+                </a:solidFill>
+                <a:latin typeface="Meiryo" pitchFamily="34" charset="0"/>
+                <a:ea typeface="Meiryo" pitchFamily="34" charset="-122"/>
+                <a:cs typeface="Meiryo" pitchFamily="34" charset="-120"/>
+              </a:rPr>
+              <a:t>PINN 等の損失に含まれる k 階・d 次元の微分は、逆伝播を重ねると O(d^k) のテンソルと O(2^(k−1)L) の計算グラフを要する。SDGD や Hutchinson 推定は d を償却したが k の指数爆発は残り、Taylor モードは一変数関数にしか使えなかった。</a:t>
+            </a:r>
+            <a:endParaRPr lang="en-US" sz="1200" dirty="0"/>
+          </a:p>
+        </p:txBody>
+      </p:sp>
+      <p:sp>
+        <p:nvSpPr>
+          <p:cNvPr id="7" name="Text 20"/>
+          <p:cNvSpPr/>
+          <p:nvPr>
+            <p:ph idx="122" type="body" hasCustomPrompt="1"/>
+          </p:nvPr>
+        </p:nvSpPr>
+        <p:spPr>
+          <a:xfrm>
+            <a:off x="621792" y="3630168"/>
+            <a:ext cx="3465576" cy="960120"/>
+          </a:xfrm>
+          <a:prstGeom prst="rect">
+            <a:avLst/>
+          </a:prstGeom>
+          <a:noFill/>
+          <a:ln/>
+        </p:spPr>
+        <p:txBody>
+          <a:bodyPr wrap="square" lIns="0" tIns="0" rIns="0" bIns="0" rtlCol="0" anchor="t"/>
+          <a:lstStyle/>
+          <a:p>
+            <a:pPr indent="0" marL="0">
+              <a:lnSpc>
+                <a:spcPts val="1350"/>
+              </a:lnSpc>
+              <a:buNone/>
+            </a:pPr>
+            <a:r>
+              <a:rPr lang="en-US" sz="1000" dirty="0">
+                <a:solidFill>
+                  <a:srgbClr val="1E2433"/>
+                </a:solidFill>
+                <a:latin typeface="Meiryo" pitchFamily="34" charset="0"/>
+                <a:ea typeface="Meiryo" pitchFamily="34" charset="-122"/>
+                <a:cs typeface="Meiryo" pitchFamily="34" charset="-120"/>
+              </a:rPr>
+              <a:t>k 階 Taylor モードの押し出しが多変数微分テンソルの任意の縮約を含むことを示し、作用素の係数テンソルに期待値が一致するジェット分布（標準基底からなる疎なジェット等）を設計。押し出しの標本平均で作用素を不偏推定する。</a:t>
+            </a:r>
+            <a:endParaRPr lang="en-US" sz="1200" dirty="0"/>
+          </a:p>
+        </p:txBody>
+      </p:sp>
+      <p:sp>
+        <p:nvSpPr>
+          <p:cNvPr id="8" name="Text 20"/>
+          <p:cNvSpPr/>
+          <p:nvPr>
+            <p:ph idx="123" type="body" hasCustomPrompt="1"/>
+          </p:nvPr>
+        </p:nvSpPr>
+        <p:spPr>
+          <a:xfrm>
+            <a:off x="4553712" y="3630168"/>
+            <a:ext cx="3465576" cy="960120"/>
+          </a:xfrm>
+          <a:prstGeom prst="rect">
+            <a:avLst/>
+          </a:prstGeom>
+          <a:noFill/>
+          <a:ln/>
+        </p:spPr>
+        <p:txBody>
+          <a:bodyPr wrap="square" lIns="0" tIns="0" rIns="0" bIns="0" rtlCol="0" anchor="t"/>
+          <a:lstStyle/>
+          <a:p>
+            <a:pPr indent="0" marL="0">
+              <a:lnSpc>
+                <a:spcPts val="1350"/>
+              </a:lnSpc>
+              <a:buNone/>
+            </a:pPr>
+            <a:r>
+              <a:rPr lang="en-US" sz="1000" dirty="0">
+                <a:solidFill>
+                  <a:srgbClr val="1E2433"/>
+                </a:solidFill>
+                <a:latin typeface="Meiryo" pitchFamily="34" charset="0"/>
+                <a:ea typeface="Meiryo" pitchFamily="34" charset="-122"/>
+                <a:cs typeface="Meiryo" pitchFamily="34" charset="-120"/>
+              </a:rPr>
+              <a:t>2体 Allen-Cahn 方程式で、最良の基準（並列化 SDGD）比で最大約10倍速く、メモリは4倍以上少ない（Table 1, 2）。10万次元で 156.9 対 29.2 it/s、100万次元は基準が OOM の中 13.6 it/s・6.2GB。高階の 2D KdV 等でも逆伝播の約2倍速い（Table 11）。</a:t>
+            </a:r>
+            <a:endParaRPr lang="en-US" sz="1200" dirty="0"/>
+          </a:p>
+        </p:txBody>
+      </p:sp>
+      <p:sp>
+        <p:nvSpPr>
+          <p:cNvPr id="9" name="Text 20"/>
+          <p:cNvSpPr/>
+          <p:nvPr>
+            <p:ph idx="124" type="body" hasCustomPrompt="1"/>
+          </p:nvPr>
+        </p:nvSpPr>
+        <p:spPr>
+          <a:xfrm>
+            <a:off x="621792" y="5276088"/>
+            <a:ext cx="3465576" cy="960120"/>
+          </a:xfrm>
+          <a:prstGeom prst="rect">
+            <a:avLst/>
+          </a:prstGeom>
+          <a:noFill/>
+          <a:ln/>
+        </p:spPr>
+        <p:txBody>
+          <a:bodyPr wrap="square" lIns="0" tIns="0" rIns="0" bIns="0" rtlCol="0" anchor="t"/>
+          <a:lstStyle/>
+          <a:p>
+            <a:pPr indent="0" marL="0">
+              <a:lnSpc>
+                <a:spcPts val="1350"/>
+              </a:lnSpc>
+              <a:buNone/>
+            </a:pPr>
+            <a:r>
+              <a:rPr lang="en-US" sz="1000" dirty="0">
+                <a:solidFill>
+                  <a:srgbClr val="1E2433"/>
+                </a:solidFill>
+                <a:latin typeface="Meiryo" pitchFamily="34" charset="0"/>
+                <a:ea typeface="Meiryo" pitchFamily="34" charset="-122"/>
+                <a:cs typeface="Meiryo" pitchFamily="34" charset="-120"/>
+              </a:rPr>
+              <a:t>著者：特定の作用素向けの最適化は捨てた一般法で、分散低減や乱択バッチの大きさとの兼ね合いは未検討。パラメータの高階微分には向かない。</a:t>
+            </a:r>
+            <a:endParaRPr lang="en-US" sz="1200" dirty="0"/>
+          </a:p>
+          <a:p>
+            <a:pPr indent="0" marL="0">
+              <a:lnSpc>
+                <a:spcPts val="1350"/>
+              </a:lnSpc>
+              <a:buNone/>
+            </a:pPr>
+            <a:r>
+              <a:rPr lang="en-US" sz="1000" dirty="0">
+                <a:solidFill>
+                  <a:srgbClr val="1E2433"/>
+                </a:solidFill>
+                <a:latin typeface="Meiryo" pitchFamily="34" charset="0"/>
+                <a:ea typeface="Meiryo" pitchFamily="34" charset="-122"/>
+                <a:cs typeface="Meiryo" pitchFamily="34" charset="-120"/>
+              </a:rPr>
+              <a:t>所感：自動微分と乱択数値線形代数をつなぐ、見通しのよい一般化。</a:t>
+            </a:r>
+            <a:endParaRPr lang="en-US" sz="1200" dirty="0"/>
+          </a:p>
+        </p:txBody>
+      </p:sp>
+      <p:sp>
+        <p:nvSpPr>
+          <p:cNvPr id="10" name="Text 20"/>
+          <p:cNvSpPr/>
+          <p:nvPr>
+            <p:ph idx="125" type="body" hasCustomPrompt="1"/>
+          </p:nvPr>
+        </p:nvSpPr>
+        <p:spPr>
+          <a:xfrm>
+            <a:off x="4553712" y="5276088"/>
+            <a:ext cx="3465576" cy="960120"/>
+          </a:xfrm>
+          <a:prstGeom prst="rect">
+            <a:avLst/>
+          </a:prstGeom>
+          <a:noFill/>
+          <a:ln/>
+        </p:spPr>
+        <p:txBody>
+          <a:bodyPr wrap="square" lIns="0" tIns="0" rIns="0" bIns="0" rtlCol="0" anchor="t"/>
+          <a:lstStyle/>
+          <a:p>
+            <a:pPr indent="0" marL="0">
+              <a:lnSpc>
+                <a:spcPts val="1500"/>
+              </a:lnSpc>
+              <a:buNone/>
+            </a:pPr>
+            <a:r>
+              <a:rPr lang="en-US" sz="1100" dirty="0">
+                <a:solidFill>
+                  <a:srgbClr val="1E2433"/>
+                </a:solidFill>
+                <a:latin typeface="Meiryo" pitchFamily="34" charset="0"/>
+                <a:ea typeface="Meiryo" pitchFamily="34" charset="-122"/>
+                <a:cs typeface="Meiryo" pitchFamily="34" charset="-120"/>
+              </a:rPr>
+              <a:t>・SDGD (Hu+ 2024)（未調査）</a:t>
+            </a:r>
+            <a:endParaRPr lang="en-US" sz="1200" dirty="0"/>
+          </a:p>
+          <a:p>
+            <a:pPr indent="0" marL="0">
+              <a:lnSpc>
+                <a:spcPts val="1500"/>
+              </a:lnSpc>
+              <a:buNone/>
+            </a:pPr>
+            <a:r>
+              <a:rPr lang="en-US" sz="1100" dirty="0">
+                <a:solidFill>
+                  <a:srgbClr val="1E2433"/>
+                </a:solidFill>
+                <a:latin typeface="Meiryo" pitchFamily="34" charset="0"/>
+                <a:ea typeface="Meiryo" pitchFamily="34" charset="-122"/>
+                <a:cs typeface="Meiryo" pitchFamily="34" charset="-120"/>
+              </a:rPr>
+              <a:t>・Taylor-mode AD in JAX (Bettencourt+ 2019)（未調査）</a:t>
+            </a:r>
+            <a:endParaRPr lang="en-US" sz="1200" dirty="0"/>
+          </a:p>
+          <a:p>
+            <a:pPr indent="0" marL="0">
+              <a:lnSpc>
+                <a:spcPts val="1500"/>
+              </a:lnSpc>
+              <a:buNone/>
+            </a:pPr>
+            <a:r>
+              <a:rPr lang="en-US" sz="1100" dirty="0">
+                <a:solidFill>
+                  <a:srgbClr val="1E2433"/>
+                </a:solidFill>
+                <a:latin typeface="Meiryo" pitchFamily="34" charset="0"/>
+                <a:ea typeface="Meiryo" pitchFamily="34" charset="-122"/>
+                <a:cs typeface="Meiryo" pitchFamily="34" charset="-120"/>
+              </a:rPr>
+              <a:t>・Forward Laplacian (Li+ 2023)（未調査）</a:t>
+            </a:r>
+            <a:endParaRPr lang="en-US" sz="1200" dirty="0"/>
+          </a:p>
+        </p:txBody>
+      </p:sp>
+      <p:sp>
+        <p:nvSpPr>
+          <p:cNvPr id="11" name="Text 20"/>
+          <p:cNvSpPr/>
+          <p:nvPr>
+            <p:ph idx="129" type="body" hasCustomPrompt="1"/>
+          </p:nvPr>
+        </p:nvSpPr>
+        <p:spPr>
+          <a:xfrm>
+            <a:off x="8503920" y="4828032"/>
+            <a:ext cx="3093415" cy="1408176"/>
+          </a:xfrm>
+          <a:prstGeom prst="rect">
+            <a:avLst/>
+          </a:prstGeom>
+          <a:noFill/>
+          <a:ln/>
+        </p:spPr>
+        <p:txBody>
+          <a:bodyPr wrap="square" lIns="0" tIns="0" rIns="0" bIns="0" rtlCol="0" anchor="t"/>
+          <a:lstStyle/>
+          <a:p>
+            <a:pPr indent="0" marL="0">
+              <a:lnSpc>
+                <a:spcPts val="1400"/>
+              </a:lnSpc>
+              <a:buNone/>
+            </a:pPr>
+            <a:r>
+              <a:rPr lang="en-US" sz="1050" b="1" dirty="0">
+                <a:solidFill>
+                  <a:srgbClr val="1E2433"/>
+                </a:solidFill>
+                <a:latin typeface="Meiryo" pitchFamily="34" charset="0"/>
+                <a:ea typeface="Meiryo" pitchFamily="34" charset="-122"/>
+                <a:cs typeface="Meiryo" pitchFamily="34" charset="-120"/>
+              </a:rPr>
+              <a:t>発表：</a:t>
+            </a:r>
+            <a:pPr indent="0" marL="0">
+              <a:lnSpc>
+                <a:spcPts val="1400"/>
+              </a:lnSpc>
+              <a:buNone/>
+            </a:pPr>
+            <a:r>
+              <a:rPr lang="en-US" sz="1050" dirty="0">
+                <a:solidFill>
+                  <a:srgbClr val="1E2433"/>
+                </a:solidFill>
+                <a:latin typeface="Meiryo" pitchFamily="34" charset="0"/>
+                <a:ea typeface="Meiryo" pitchFamily="34" charset="-122"/>
+                <a:cs typeface="Meiryo" pitchFamily="34" charset="-120"/>
+              </a:rPr>
+              <a:t>NeurIPS 2024</a:t>
+            </a:r>
+            <a:endParaRPr lang="en-US" sz="1050" dirty="0"/>
+          </a:p>
+          <a:p>
+            <a:pPr indent="0" marL="0">
+              <a:lnSpc>
+                <a:spcPts val="1400"/>
+              </a:lnSpc>
+              <a:buNone/>
+            </a:pPr>
+            <a:r>
+              <a:rPr lang="en-US" sz="1050" b="1" dirty="0">
+                <a:solidFill>
+                  <a:srgbClr val="1E2433"/>
+                </a:solidFill>
+                <a:latin typeface="Meiryo" pitchFamily="34" charset="0"/>
+                <a:ea typeface="Meiryo" pitchFamily="34" charset="-122"/>
+                <a:cs typeface="Meiryo" pitchFamily="34" charset="-120"/>
+              </a:rPr>
+              <a:t>リンク：</a:t>
+            </a:r>
+            <a:pPr indent="0" marL="0">
+              <a:lnSpc>
+                <a:spcPts val="1400"/>
+              </a:lnSpc>
+              <a:buNone/>
+            </a:pPr>
+            <a:r>
+              <a:rPr lang="en-US" sz="1050" u="sng" dirty="0">
+                <a:solidFill>
+                  <a:srgbClr val="1E2433"/>
+                </a:solidFill>
+                <a:latin typeface="Meiryo" pitchFamily="34" charset="0"/>
+                <a:ea typeface="Meiryo" pitchFamily="34" charset="-122"/>
+                <a:cs typeface="Meiryo" pitchFamily="34" charset="-120"/>
+                <a:hlinkClick r:id="rId1" invalidUrl="" action="" tgtFrame="" tooltip="" history="1" highlightClick="0" endSnd="0">
+                  <a:extLst>
+                    <a:ext uri="{A12FA001-AC4F-418D-AE19-62706E023703}">
+                      <ahyp:hlinkClr xmlns:ahyp="http://schemas.microsoft.com/office/drawing/2018/hyperlinkcolor" val="tx"/>
+                    </a:ext>
+                  </a:extLst>
+                </a:hlinkClick>
+              </a:rPr>
+              <a:t>https://arxiv.org/abs/2412.00088</a:t>
+            </a:r>
+            <a:endParaRPr lang="en-US" sz="1050" dirty="0"/>
+          </a:p>
+          <a:p>
+            <a:pPr indent="0" marL="0">
+              <a:lnSpc>
+                <a:spcPts val="1400"/>
+              </a:lnSpc>
+              <a:buNone/>
+            </a:pPr>
+            <a:r>
+              <a:rPr lang="en-US" sz="1050" b="1" dirty="0">
+                <a:solidFill>
+                  <a:srgbClr val="1E2433"/>
+                </a:solidFill>
+                <a:latin typeface="Meiryo" pitchFamily="34" charset="0"/>
+                <a:ea typeface="Meiryo" pitchFamily="34" charset="-122"/>
+                <a:cs typeface="Meiryo" pitchFamily="34" charset="-120"/>
+              </a:rPr>
+              <a:t>受賞：</a:t>
+            </a:r>
+            <a:pPr indent="0" marL="0">
+              <a:lnSpc>
+                <a:spcPts val="1400"/>
+              </a:lnSpc>
+              <a:buNone/>
+            </a:pPr>
+            <a:r>
+              <a:rPr lang="en-US" sz="1050" dirty="0">
+                <a:solidFill>
+                  <a:srgbClr val="1E2433"/>
+                </a:solidFill>
+                <a:latin typeface="Meiryo" pitchFamily="34" charset="0"/>
+                <a:ea typeface="Meiryo" pitchFamily="34" charset="-122"/>
+                <a:cs typeface="Meiryo" pitchFamily="34" charset="-120"/>
+              </a:rPr>
+              <a:t>NeurIPS 2024 Best Paper Award</a:t>
+            </a:r>
+            <a:endParaRPr lang="en-US" sz="1050" dirty="0"/>
+          </a:p>
+          <a:p>
+            <a:pPr indent="0" marL="0">
+              <a:lnSpc>
+                <a:spcPts val="1400"/>
+              </a:lnSpc>
+              <a:buNone/>
+            </a:pPr>
+            <a:r>
+              <a:rPr lang="en-US" sz="1050" b="1" dirty="0">
+                <a:solidFill>
+                  <a:srgbClr val="1E2433"/>
+                </a:solidFill>
+                <a:latin typeface="Meiryo" pitchFamily="34" charset="0"/>
+                <a:ea typeface="Meiryo" pitchFamily="34" charset="-122"/>
+                <a:cs typeface="Meiryo" pitchFamily="34" charset="-120"/>
+              </a:rPr>
+              <a:t>調査日：</a:t>
+            </a:r>
+            <a:pPr indent="0" marL="0">
+              <a:lnSpc>
+                <a:spcPts val="1400"/>
+              </a:lnSpc>
+              <a:buNone/>
+            </a:pPr>
+            <a:r>
+              <a:rPr lang="en-US" sz="1050" dirty="0">
+                <a:solidFill>
+                  <a:srgbClr val="1E2433"/>
+                </a:solidFill>
+                <a:latin typeface="Meiryo" pitchFamily="34" charset="0"/>
+                <a:ea typeface="Meiryo" pitchFamily="34" charset="-122"/>
+                <a:cs typeface="Meiryo" pitchFamily="34" charset="-120"/>
+              </a:rPr>
+              <a:t>2026-10-28</a:t>
+            </a:r>
+            <a:endParaRPr lang="en-US" sz="1050" dirty="0"/>
+          </a:p>
+          <a:p>
+            <a:pPr indent="0" marL="0">
+              <a:lnSpc>
+                <a:spcPts val="1400"/>
+              </a:lnSpc>
+              <a:buNone/>
+            </a:pPr>
+            <a:r>
+              <a:rPr lang="en-US" sz="1050" b="1" dirty="0">
+                <a:solidFill>
+                  <a:srgbClr val="1E2433"/>
+                </a:solidFill>
+                <a:latin typeface="Meiryo" pitchFamily="34" charset="0"/>
+                <a:ea typeface="Meiryo" pitchFamily="34" charset="-122"/>
+                <a:cs typeface="Meiryo" pitchFamily="34" charset="-120"/>
+              </a:rPr>
+              <a:t>確認範囲：</a:t>
+            </a:r>
+            <a:pPr indent="0" marL="0">
+              <a:lnSpc>
+                <a:spcPts val="1400"/>
+              </a:lnSpc>
+              <a:buNone/>
+            </a:pPr>
+            <a:r>
+              <a:rPr lang="en-US" sz="1050" dirty="0">
+                <a:solidFill>
+                  <a:srgbClr val="1E2433"/>
+                </a:solidFill>
+                <a:latin typeface="Meiryo" pitchFamily="34" charset="0"/>
+                <a:ea typeface="Meiryo" pitchFamily="34" charset="-122"/>
+                <a:cs typeface="Meiryo" pitchFamily="34" charset="-120"/>
+              </a:rPr>
+              <a:t>全文（問題提起・手法・実験・結果・考察）</a:t>
+            </a:r>
+            <a:endParaRPr lang="en-US" sz="1050" dirty="0"/>
+          </a:p>
+        </p:txBody>
+      </p:sp>
+      <p:sp>
+        <p:nvSpPr>
+          <p:cNvPr id="12" name="Text 20"/>
+          <p:cNvSpPr/>
+          <p:nvPr>
+            <p:ph idx="130" type="body" hasCustomPrompt="1"/>
+          </p:nvPr>
+        </p:nvSpPr>
+        <p:spPr>
+          <a:xfrm>
+            <a:off x="457200" y="6446520"/>
+            <a:ext cx="9144000" cy="274320"/>
+          </a:xfrm>
+          <a:prstGeom prst="rect">
+            <a:avLst/>
+          </a:prstGeom>
+          <a:noFill/>
+          <a:ln/>
+        </p:spPr>
+        <p:txBody>
+          <a:bodyPr wrap="square" lIns="0" tIns="0" rIns="0" bIns="0" rtlCol="0" anchor="ctr"/>
+          <a:lstStyle/>
+          <a:p>
+            <a:pPr indent="0" marL="0">
+              <a:buNone/>
+            </a:pPr>
+            <a:r>
+              <a:rPr lang="en-US" sz="1000" dirty="0">
+                <a:solidFill>
+                  <a:srgbClr val="5B6478"/>
+                </a:solidFill>
+                <a:latin typeface="Meiryo" pitchFamily="34" charset="0"/>
+                <a:ea typeface="Meiryo" pitchFamily="34" charset="-122"/>
+                <a:cs typeface="Meiryo" pitchFamily="34" charset="-120"/>
+              </a:rPr>
+              <a:t>Research Survey ｜ 学会調査 › NeurIPS：受賞・注目論文</a:t>
+            </a:r>
+            <a:endParaRPr lang="en-US" sz="1000" dirty="0"/>
+          </a:p>
+        </p:txBody>
+      </p:sp>
+      <p:pic>
+        <p:nvPicPr>
+          <p:cNvPr id="13" name="Image 0" descr="/tmp/claude-0/-home-user-researches/dc3d135a-4bab-5b84-bcb3-e0d06fe39570/scratchpad/stage/conferences/neurips/figures/stde.png">    </p:cNvPr>
+          <p:cNvPicPr>
+            <a:picLocks noChangeAspect="1"/>
+          </p:cNvPicPr>
+          <p:nvPr/>
+        </p:nvPicPr>
+        <p:blipFill>
+          <a:blip r:embed="rId2"/>
+          <a:stretch>
+            <a:fillRect/>
+          </a:stretch>
+        </p:blipFill>
+        <p:spPr>
+          <a:xfrm>
+            <a:off x="8366760" y="2397114"/>
+            <a:ext cx="3367735" cy="600731"/>
+          </a:xfrm>
+          <a:prstGeom prst="rect">
+            <a:avLst/>
+          </a:prstGeom>
+        </p:spPr>
+      </p:pic>
+      <p:sp>
+        <p:nvSpPr>
+          <p:cNvPr id="14" name="Text 11"/>
+          <p:cNvSpPr txBox="1"/>
+          <p:nvPr/>
+        </p:nvSpPr>
+        <p:spPr>
+          <a:xfrm>
+            <a:off x="8366760" y="3931920"/>
+            <a:ext cx="3367735" cy="320040"/>
+          </a:xfrm>
+          <a:prstGeom prst="rect">
+            <a:avLst/>
+          </a:prstGeom>
+          <a:noFill/>
+          <a:ln/>
+        </p:spPr>
+        <p:txBody>
+          <a:bodyPr wrap="square" lIns="0" tIns="0" rIns="0" bIns="0" rtlCol="0" anchor="t"/>
+          <a:lstStyle/>
+          <a:p>
+            <a:pPr indent="0" marL="0">
+              <a:buNone/>
+            </a:pPr>
+            <a:r>
+              <a:rPr lang="en-US" sz="950" dirty="0">
+                <a:solidFill>
+                  <a:srgbClr val="5B6478"/>
+                </a:solidFill>
+                <a:latin typeface="Meiryo" pitchFamily="34" charset="0"/>
+                <a:ea typeface="Meiryo" pitchFamily="34" charset="-122"/>
+                <a:cs typeface="Meiryo" pitchFamily="34" charset="-120"/>
+              </a:rPr>
+              <a:t>出典：STDE (Shi+ 2024) Fig. 2（4 つの基本演算からなる F の 2-ジェットの押し出し d²F の計算グラフ）</a:t>
+            </a:r>
+            <a:endParaRPr lang="en-US" sz="950" dirty="0"/>
+          </a:p>
+        </p:txBody>
+      </p:sp>
+      <p:sp>
+        <p:nvSpPr>
+          <p:cNvPr id="25" name="Slide Number Placeholder 0"/>
+          <p:cNvSpPr>
+            <a:spLocks noGrp="1"/>
+          </p:cNvSpPr>
+          <p:nvPr>
+            <p:ph type="sldNum" sz="quarter" idx="4294967295"/>
+          </p:nvPr>
+        </p:nvSpPr>
+        <p:spPr>
+          <a:xfrm>
+            <a:off x="11185855" y="6446520"/>
+            <a:ext cx="548640" cy="274320"/>
+          </a:xfrm>
+          <a:prstGeom prst="rect">
+            <a:avLst/>
+          </a:prstGeom>
+          <a:extLst>
+            <a:ext uri="{C572A759-6A51-4108-AA02-DFA0A04FC94B}">
+              <ma14:wrappingTextBoxFlag xmlns:ma14="http://schemas.microsoft.com/office/mac/drawingml/2011/main" val="0"/>
+            </a:ext>
+          </a:extLst>
+        </p:spPr>
+        <p:txBody>
+          <a:bodyPr/>
+          <a:lstStyle>
+            <a:lvl1pPr>
+              <a:defRPr sz="1000">
+                <a:solidFill>
+                  <a:srgbClr val="5B6478"/>
+                </a:solidFill>
+                <a:latin typeface="Meiryo"/>
+                <a:ea typeface="Meiryo"/>
+                <a:cs typeface="Meiryo"/>
+              </a:defRPr>
+            </a:lvl1pPr>
+          </a:lstStyle>
+          <a:p>
+            <a:pPr algn="r"/>
+            <a:fld id="{F7021451-1387-4CA6-816F-3879F97B5CBC}" type="slidenum">
+              <a:rPr b="0" lang="en-US"/>
+              <a:t>28</a:t>
+            </a:fld>
+            <a:endParaRPr lang="en-US"/>
+          </a:p>
+        </p:txBody>
+      </p:sp>
+    </p:spTree>
+  </p:cSld>
+  <p:clrMapOvr>
+    <a:masterClrMapping/>
+  </p:clrMapOvr>
+</p:sld>
+</file>
+
+<file path=ppt/slides/slide29.xml><?xml version="1.0" encoding="utf-8"?>
+<p:sld xmlns:a="http://schemas.openxmlformats.org/drawingml/2006/main" xmlns:r="http://schemas.openxmlformats.org/officeDocument/2006/relationships" xmlns:p="http://schemas.openxmlformats.org/presentationml/2006/main">
+  <p:cSld name="Slide 29">
+    <p:spTree>
+      <p:nvGrpSpPr>
+        <p:cNvPr id="1" name=""/>
+        <p:cNvGrpSpPr/>
+        <p:nvPr/>
+      </p:nvGrpSpPr>
+      <p:grpSpPr>
+        <a:xfrm>
+          <a:off x="0" y="0"/>
+          <a:ext cx="0" cy="0"/>
+          <a:chOff x="0" y="0"/>
+          <a:chExt cx="0" cy="0"/>
+        </a:xfrm>
+      </p:grpSpPr>
+      <p:sp>
+        <p:nvSpPr>
+          <p:cNvPr id="2" name="Text 6"/>
+          <p:cNvSpPr/>
+          <p:nvPr>
+            <p:ph idx="109" type="body" hasCustomPrompt="1"/>
+          </p:nvPr>
+        </p:nvSpPr>
+        <p:spPr>
+          <a:xfrm>
+            <a:off x="457200" y="274320"/>
+            <a:ext cx="11277295" cy="256032"/>
+          </a:xfrm>
+          <a:prstGeom prst="rect">
+            <a:avLst/>
+          </a:prstGeom>
+          <a:noFill/>
+          <a:ln/>
+        </p:spPr>
+        <p:txBody>
+          <a:bodyPr wrap="square" lIns="0" tIns="0" rIns="0" bIns="0" rtlCol="0" anchor="ctr"/>
+          <a:lstStyle/>
+          <a:p>
+            <a:pPr indent="0" marL="0">
+              <a:buNone/>
+            </a:pPr>
+            <a:r>
+              <a:rPr lang="en-US" sz="1100" b="1" dirty="0">
+                <a:solidFill>
+                  <a:srgbClr val="1F6F78"/>
+                </a:solidFill>
+                <a:latin typeface="Meiryo" pitchFamily="34" charset="0"/>
+                <a:ea typeface="Meiryo" pitchFamily="34" charset="-122"/>
+                <a:cs typeface="Meiryo" pitchFamily="34" charset="-120"/>
+              </a:rPr>
+              <a:t>学会調査 › NeurIPS：受賞・注目論文 ｜ NeurIPS 2024 Best Paper Award ｜ 詳細・評価ポイント</a:t>
+            </a:r>
+            <a:endParaRPr lang="en-US" sz="1100" dirty="0"/>
+          </a:p>
+        </p:txBody>
+      </p:sp>
+      <p:sp>
+        <p:nvSpPr>
+          <p:cNvPr id="3" name="Text 6"/>
+          <p:cNvSpPr/>
+          <p:nvPr>
+            <p:ph idx="110" type="body" hasCustomPrompt="1"/>
+          </p:nvPr>
+        </p:nvSpPr>
+        <p:spPr>
+          <a:xfrm>
+            <a:off x="457200" y="530352"/>
+            <a:ext cx="11277295" cy="566928"/>
+          </a:xfrm>
+          <a:prstGeom prst="rect">
+            <a:avLst/>
+          </a:prstGeom>
+          <a:noFill/>
+          <a:ln/>
+        </p:spPr>
+        <p:txBody>
+          <a:bodyPr wrap="square" lIns="0" tIns="0" rIns="0" bIns="0" rtlCol="0" anchor="ctr"/>
+          <a:lstStyle/>
+          <a:p>
+            <a:pPr indent="0" marL="0">
+              <a:lnSpc>
+                <a:spcPts val="2150"/>
+              </a:lnSpc>
+              <a:buNone/>
+            </a:pPr>
+            <a:r>
+              <a:rPr lang="en-US" sz="1600" b="1" dirty="0">
+                <a:solidFill>
+                  <a:srgbClr val="1E2433"/>
+                </a:solidFill>
+                <a:latin typeface="Meiryo" pitchFamily="34" charset="0"/>
+                <a:ea typeface="Meiryo" pitchFamily="34" charset="-122"/>
+                <a:cs typeface="Meiryo" pitchFamily="34" charset="-120"/>
+              </a:rPr>
+              <a:t>Stochastic Taylor Derivative Estimator: Efficient amortization for arbitrary differential operators</a:t>
+            </a:r>
+            <a:endParaRPr lang="en-US" sz="2400" dirty="0"/>
+          </a:p>
+        </p:txBody>
+      </p:sp>
+      <p:sp>
+        <p:nvSpPr>
+          <p:cNvPr id="4" name="Text 6"/>
+          <p:cNvSpPr/>
+          <p:nvPr>
+            <p:ph idx="111" type="body" hasCustomPrompt="1"/>
+          </p:nvPr>
+        </p:nvSpPr>
+        <p:spPr>
+          <a:xfrm>
+            <a:off x="457200" y="1115568"/>
+            <a:ext cx="11277295" cy="274320"/>
+          </a:xfrm>
+          <a:prstGeom prst="rect">
+            <a:avLst/>
+          </a:prstGeom>
+          <a:noFill/>
+          <a:ln/>
+        </p:spPr>
+        <p:txBody>
+          <a:bodyPr wrap="square" lIns="0" tIns="0" rIns="0" bIns="0" rtlCol="0" anchor="ctr"/>
+          <a:lstStyle/>
+          <a:p>
+            <a:pPr indent="0" marL="0">
+              <a:buNone/>
+            </a:pPr>
+            <a:r>
+              <a:rPr lang="en-US" sz="1200" dirty="0">
+                <a:solidFill>
+                  <a:srgbClr val="5B6478"/>
+                </a:solidFill>
+                <a:latin typeface="Meiryo" pitchFamily="34" charset="0"/>
+                <a:ea typeface="Meiryo" pitchFamily="34" charset="-122"/>
+                <a:cs typeface="Meiryo" pitchFamily="34" charset="-120"/>
+              </a:rPr>
+              <a:t>Zekun Shi, Zheyuan Hu, Min Lin, Kenji Kawaguchi（シンガポール国立大学・Sea AI Lab）｜ NeurIPS 2024</a:t>
+            </a:r>
+            <a:endParaRPr lang="en-US" sz="1200" dirty="0"/>
+          </a:p>
+        </p:txBody>
+      </p:sp>
+      <p:sp>
+        <p:nvSpPr>
+          <p:cNvPr id="5" name="Text 2"/>
+          <p:cNvSpPr/>
+          <p:nvPr>
+            <p:ph idx="102" type="body" hasCustomPrompt="1"/>
+          </p:nvPr>
+        </p:nvSpPr>
+        <p:spPr>
+          <a:xfrm>
+            <a:off x="621792" y="1984248"/>
+            <a:ext cx="7443216" cy="4251960"/>
+          </a:xfrm>
+          <a:prstGeom prst="rect">
+            <a:avLst/>
+          </a:prstGeom>
+          <a:noFill/>
+          <a:ln/>
+        </p:spPr>
+        <p:txBody>
+          <a:bodyPr wrap="square" lIns="0" tIns="0" rIns="0" bIns="0" rtlCol="0" anchor="t"/>
+          <a:lstStyle/>
+          <a:p>
+            <a:pPr indent="0" marL="0">
+              <a:lnSpc>
+                <a:spcPts val="1900"/>
+              </a:lnSpc>
+              <a:buNone/>
+            </a:pPr>
+            <a:r>
+              <a:rPr lang="en-US" sz="1400" dirty="0">
+                <a:solidFill>
+                  <a:srgbClr val="1E2433"/>
+                </a:solidFill>
+                <a:latin typeface="Meiryo" pitchFamily="34" charset="0"/>
+                <a:ea typeface="Meiryo" pitchFamily="34" charset="-122"/>
+                <a:cs typeface="Meiryo" pitchFamily="34" charset="-120"/>
+              </a:rPr>
+              <a:t>問題設定：物理情報 NN（PINN）など、損失に入力についての高階・高次元の微分作用素を含む最適化は、逆伝播を重ねると次元 d に多項式、階数 k に指数的にコストが増える。</a:t>
+            </a:r>
+            <a:endParaRPr lang="en-US" sz="1200" dirty="0"/>
+          </a:p>
+          <a:p>
+            <a:pPr indent="0" marL="0">
+              <a:lnSpc>
+                <a:spcPts val="1900"/>
+              </a:lnSpc>
+              <a:buNone/>
+            </a:pPr>
+            <a:r>
+              <a:rPr lang="en-US" sz="1400" dirty="0">
+                <a:solidFill>
+                  <a:srgbClr val="1E2433"/>
+                </a:solidFill>
+                <a:latin typeface="Meiryo" pitchFamily="34" charset="0"/>
+                <a:ea typeface="Meiryo" pitchFamily="34" charset="-122"/>
+                <a:cs typeface="Meiryo" pitchFamily="34" charset="-120"/>
+              </a:rPr>
+              <a:t>手法：k-ジェット（曲線の k 階までの接ベクトルの組）を Taylor モード AD で押し出すと、Faa di Bruno の公式により多変数微分テンソルの縮約が得られる。混合偏微分も、より高い階のジェットの一部の接ベクトルを零にすれば取り出せる。係数テンソルに期待値が一致するようジェットを乱択すれば不偏推定になり、1回の計算は O(k^2 dL)、メモリは O(kd)。HTE は等方的な密ジェットの特別な場合で、4階以上には一般化できないことも示した。</a:t>
+            </a:r>
+            <a:endParaRPr lang="en-US" sz="1200" dirty="0"/>
+          </a:p>
+          <a:p>
+            <a:pPr indent="0" marL="0">
+              <a:lnSpc>
+                <a:spcPts val="1900"/>
+              </a:lnSpc>
+              <a:buNone/>
+            </a:pPr>
+            <a:r>
+              <a:rPr lang="en-US" sz="1400" dirty="0">
+                <a:solidFill>
+                  <a:srgbClr val="1E2433"/>
+                </a:solidFill>
+                <a:latin typeface="Meiryo" pitchFamily="34" charset="0"/>
+                <a:ea typeface="Meiryo" pitchFamily="34" charset="-122"/>
+                <a:cs typeface="Meiryo" pitchFamily="34" charset="-120"/>
+              </a:rPr>
+              <a:t>結果：Allen-Cahn・Poisson・Sine-Gordon・放物型・KdV 等で SDGD より大幅に速く省メモリで、誤差は同程度。重み共有で 500 万次元も約30分。</a:t>
+            </a:r>
+            <a:endParaRPr lang="en-US" sz="1200" dirty="0"/>
+          </a:p>
+          <a:p>
+            <a:pPr indent="0" marL="0">
+              <a:lnSpc>
+                <a:spcPts val="1900"/>
+              </a:lnSpc>
+              <a:buNone/>
+            </a:pPr>
+            <a:r>
+              <a:rPr lang="en-US" sz="1400" dirty="0">
+                <a:solidFill>
+                  <a:srgbClr val="1E2433"/>
+                </a:solidFill>
+                <a:latin typeface="Meiryo" pitchFamily="34" charset="0"/>
+                <a:ea typeface="Meiryo" pitchFamily="34" charset="-122"/>
+                <a:cs typeface="Meiryo" pitchFamily="34" charset="-120"/>
+              </a:rPr>
+              <a:t>限界：分散低減は未検討。</a:t>
+            </a:r>
+            <a:endParaRPr lang="en-US" sz="1200" dirty="0"/>
+          </a:p>
+        </p:txBody>
+      </p:sp>
+      <p:sp>
+        <p:nvSpPr>
+          <p:cNvPr id="6" name="Text 4"/>
+          <p:cNvSpPr/>
+          <p:nvPr>
+            <p:ph idx="105" type="body" hasCustomPrompt="1"/>
+          </p:nvPr>
+        </p:nvSpPr>
+        <p:spPr>
+          <a:xfrm>
+            <a:off x="8531352" y="1984248"/>
+            <a:ext cx="3038551" cy="685800"/>
+          </a:xfrm>
+          <a:prstGeom prst="rect">
+            <a:avLst/>
+          </a:prstGeom>
+          <a:noFill/>
+          <a:ln/>
+        </p:spPr>
+        <p:txBody>
+          <a:bodyPr wrap="square" lIns="0" tIns="0" rIns="0" bIns="0" rtlCol="0" anchor="t"/>
+          <a:lstStyle/>
+          <a:p>
+            <a:pPr indent="0" marL="0">
+              <a:lnSpc>
+                <a:spcPts val="1750"/>
+              </a:lnSpc>
+              <a:buNone/>
+            </a:pPr>
+            <a:r>
+              <a:rPr lang="en-US" sz="1300" dirty="0">
+                <a:solidFill>
+                  <a:srgbClr val="1E2433"/>
+                </a:solidFill>
+                <a:latin typeface="Meiryo" pitchFamily="34" charset="0"/>
+                <a:ea typeface="Meiryo" pitchFamily="34" charset="-122"/>
+                <a:cs typeface="Meiryo" pitchFamily="34" charset="-120"/>
+              </a:rPr>
+              <a:t>NeurIPS 2024 Best Paper Award</a:t>
+            </a:r>
+            <a:endParaRPr lang="en-US" sz="1200" dirty="0"/>
+          </a:p>
+        </p:txBody>
+      </p:sp>
+      <p:sp>
+        <p:nvSpPr>
+          <p:cNvPr id="7" name="Text 6"/>
+          <p:cNvSpPr/>
+          <p:nvPr>
+            <p:ph idx="108" type="body" hasCustomPrompt="1"/>
+          </p:nvPr>
+        </p:nvSpPr>
+        <p:spPr>
+          <a:xfrm>
+            <a:off x="8531352" y="3355848"/>
+            <a:ext cx="3038551" cy="2880360"/>
+          </a:xfrm>
+          <a:prstGeom prst="rect">
+            <a:avLst/>
+          </a:prstGeom>
+          <a:noFill/>
+          <a:ln/>
+        </p:spPr>
+        <p:txBody>
+          <a:bodyPr wrap="square" lIns="0" tIns="0" rIns="0" bIns="0" rtlCol="0" anchor="t"/>
+          <a:lstStyle/>
+          <a:p>
+            <a:pPr indent="0" marL="0">
+              <a:lnSpc>
+                <a:spcPts val="1750"/>
+              </a:lnSpc>
+              <a:buNone/>
+            </a:pPr>
+            <a:r>
+              <a:rPr lang="en-US" sz="1300" dirty="0">
+                <a:solidFill>
+                  <a:srgbClr val="1E2433"/>
+                </a:solidFill>
+                <a:latin typeface="Meiryo" pitchFamily="34" charset="0"/>
+                <a:ea typeface="Meiryo" pitchFamily="34" charset="-122"/>
+                <a:cs typeface="Meiryo" pitchFamily="34" charset="-120"/>
+              </a:rPr>
+              <a:t>・高次元と高階という二つの「次元の呪い」を同時に扱う一般的な枠組み</a:t>
+            </a:r>
+            <a:endParaRPr lang="en-US" sz="1200" dirty="0"/>
+          </a:p>
+          <a:p>
+            <a:pPr indent="0" marL="0">
+              <a:lnSpc>
+                <a:spcPts val="1750"/>
+              </a:lnSpc>
+              <a:buNone/>
+            </a:pPr>
+            <a:r>
+              <a:rPr lang="en-US" sz="1300" dirty="0">
+                <a:solidFill>
+                  <a:srgbClr val="1E2433"/>
+                </a:solidFill>
+                <a:latin typeface="Meiryo" pitchFamily="34" charset="0"/>
+                <a:ea typeface="Meiryo" pitchFamily="34" charset="-122"/>
+                <a:cs typeface="Meiryo" pitchFamily="34" charset="-120"/>
+              </a:rPr>
+              <a:t>・Taylor モード AD と乱択推定を結ぶ、理論的に明快な洞察</a:t>
+            </a:r>
+            <a:endParaRPr lang="en-US" sz="1200" dirty="0"/>
+          </a:p>
+          <a:p>
+            <a:pPr indent="0" marL="0">
+              <a:lnSpc>
+                <a:spcPts val="1750"/>
+              </a:lnSpc>
+              <a:buNone/>
+            </a:pPr>
+            <a:r>
+              <a:rPr lang="en-US" sz="1300" dirty="0">
+                <a:solidFill>
+                  <a:srgbClr val="1E2433"/>
+                </a:solidFill>
+                <a:latin typeface="Meiryo" pitchFamily="34" charset="0"/>
+                <a:ea typeface="Meiryo" pitchFamily="34" charset="-122"/>
+                <a:cs typeface="Meiryo" pitchFamily="34" charset="-120"/>
+              </a:rPr>
+              <a:t>・100 万次元の PDE を GPU 1枚で解くという分かりやすい実証</a:t>
+            </a:r>
+            <a:endParaRPr lang="en-US" sz="1200" dirty="0"/>
+          </a:p>
+          <a:p>
+            <a:pPr indent="0" marL="0">
+              <a:lnSpc>
+                <a:spcPts val="1750"/>
+              </a:lnSpc>
+              <a:buNone/>
+            </a:pPr>
+            <a:r>
+              <a:rPr lang="en-US" sz="1300" dirty="0">
+                <a:solidFill>
+                  <a:srgbClr val="1E2433"/>
+                </a:solidFill>
+                <a:latin typeface="Meiryo" pitchFamily="34" charset="0"/>
+                <a:ea typeface="Meiryo" pitchFamily="34" charset="-122"/>
+                <a:cs typeface="Meiryo" pitchFamily="34" charset="-120"/>
+              </a:rPr>
+              <a:t>（調査者の見立て）</a:t>
+            </a:r>
+            <a:endParaRPr lang="en-US" sz="1200" dirty="0"/>
+          </a:p>
+        </p:txBody>
+      </p:sp>
+      <p:sp>
+        <p:nvSpPr>
+          <p:cNvPr id="8" name="Text 6"/>
+          <p:cNvSpPr/>
+          <p:nvPr>
+            <p:ph idx="112" type="body" hasCustomPrompt="1"/>
+          </p:nvPr>
+        </p:nvSpPr>
+        <p:spPr>
+          <a:xfrm>
+            <a:off x="457200" y="6446520"/>
+            <a:ext cx="9144000" cy="274320"/>
+          </a:xfrm>
+          <a:prstGeom prst="rect">
+            <a:avLst/>
+          </a:prstGeom>
+          <a:noFill/>
+          <a:ln/>
+        </p:spPr>
+        <p:txBody>
+          <a:bodyPr wrap="square" lIns="0" tIns="0" rIns="0" bIns="0" rtlCol="0" anchor="ctr"/>
+          <a:lstStyle/>
+          <a:p>
+            <a:pPr indent="0" marL="0">
+              <a:buNone/>
+            </a:pPr>
+            <a:r>
+              <a:rPr lang="en-US" sz="1000" dirty="0">
+                <a:solidFill>
+                  <a:srgbClr val="5B6478"/>
+                </a:solidFill>
+                <a:latin typeface="Meiryo" pitchFamily="34" charset="0"/>
+                <a:ea typeface="Meiryo" pitchFamily="34" charset="-122"/>
+                <a:cs typeface="Meiryo" pitchFamily="34" charset="-120"/>
+              </a:rPr>
+              <a:t>Research Survey ｜ 学会調査 › NeurIPS：受賞・注目論文</a:t>
+            </a:r>
+            <a:endParaRPr lang="en-US" sz="1000" dirty="0"/>
+          </a:p>
+        </p:txBody>
+      </p:sp>
+      <p:sp>
+        <p:nvSpPr>
+          <p:cNvPr id="25" name="Slide Number Placeholder 0"/>
+          <p:cNvSpPr>
+            <a:spLocks noGrp="1"/>
+          </p:cNvSpPr>
+          <p:nvPr>
+            <p:ph type="sldNum" sz="quarter" idx="4294967295"/>
+          </p:nvPr>
+        </p:nvSpPr>
+        <p:spPr>
+          <a:xfrm>
+            <a:off x="11185855" y="6446520"/>
+            <a:ext cx="548640" cy="274320"/>
+          </a:xfrm>
+          <a:prstGeom prst="rect">
+            <a:avLst/>
+          </a:prstGeom>
+          <a:extLst>
+            <a:ext uri="{C572A759-6A51-4108-AA02-DFA0A04FC94B}">
+              <ma14:wrappingTextBoxFlag xmlns:ma14="http://schemas.microsoft.com/office/mac/drawingml/2011/main" val="0"/>
+            </a:ext>
+          </a:extLst>
+        </p:spPr>
+        <p:txBody>
+          <a:bodyPr/>
+          <a:lstStyle>
+            <a:lvl1pPr>
+              <a:defRPr sz="1000">
+                <a:solidFill>
+                  <a:srgbClr val="5B6478"/>
+                </a:solidFill>
+                <a:latin typeface="Meiryo"/>
+                <a:ea typeface="Meiryo"/>
+                <a:cs typeface="Meiryo"/>
+              </a:defRPr>
+            </a:lvl1pPr>
+          </a:lstStyle>
+          <a:p>
+            <a:pPr algn="r"/>
+            <a:fld id="{F7021451-1387-4CA6-816F-3879F97B5CBC}" type="slidenum">
+              <a:rPr b="0" lang="en-US"/>
+              <a:t>29</a:t>
+            </a:fld>
+            <a:endParaRPr lang="en-US"/>
+          </a:p>
+        </p:txBody>
+      </p:sp>
+    </p:spTree>
+  </p:cSld>
+  <p:clrMapOvr>
+    <a:masterClrMapping/>
+  </p:clrMapOvr>
+</p:sld>
+</file>
+
 <file path=ppt/slides/slide3.xml><?xml version="1.0" encoding="utf-8"?>
 <p:sld xmlns:a="http://schemas.openxmlformats.org/drawingml/2006/main" xmlns:r="http://schemas.openxmlformats.org/officeDocument/2006/relationships" xmlns:p="http://schemas.openxmlformats.org/presentationml/2006/main">
   <p:cSld name="Slide 3">
@@ -21749,7 +26499,7 @@
                 <a:ea typeface="Meiryo" pitchFamily="34" charset="-122"/>
                 <a:cs typeface="Meiryo" pitchFamily="34" charset="-120"/>
               </a:rPr>
-              <a:t>・著者記載では Oral 採択率 0.36%</a:t>
+              <a:t>・公式 Oral 一覧（Atlanta 会場）に掲載。著者記載の採択率は 0.36%</a:t>
             </a:r>
             <a:endParaRPr lang="en-US" sz="1200" dirty="0"/>
           </a:p>
@@ -21859,6 +26609,2696 @@
             <a:fld id="{F7021451-1387-4CA6-816F-3879F97B5CBC}" type="slidenum">
               <a:rPr b="0" lang="en-US"/>
               <a:t>3</a:t>
+            </a:fld>
+            <a:endParaRPr lang="en-US"/>
+          </a:p>
+        </p:txBody>
+      </p:sp>
+    </p:spTree>
+  </p:cSld>
+  <p:clrMapOvr>
+    <a:masterClrMapping/>
+  </p:clrMapOvr>
+</p:sld>
+</file>
+
+<file path=ppt/slides/slide30.xml><?xml version="1.0" encoding="utf-8"?>
+<p:sld xmlns:a="http://schemas.openxmlformats.org/drawingml/2006/main" xmlns:r="http://schemas.openxmlformats.org/officeDocument/2006/relationships" xmlns:p="http://schemas.openxmlformats.org/presentationml/2006/main">
+  <p:cSld name="Slide 30">
+    <p:spTree>
+      <p:nvGrpSpPr>
+        <p:cNvPr id="1" name=""/>
+        <p:cNvGrpSpPr/>
+        <p:nvPr/>
+      </p:nvGrpSpPr>
+      <p:grpSpPr>
+        <a:xfrm>
+          <a:off x="0" y="0"/>
+          <a:ext cx="0" cy="0"/>
+          <a:chOff x="0" y="0"/>
+          <a:chExt cx="0" cy="0"/>
+        </a:xfrm>
+      </p:grpSpPr>
+      <p:sp>
+        <p:nvSpPr>
+          <p:cNvPr id="2" name="Text 20"/>
+          <p:cNvSpPr/>
+          <p:nvPr>
+            <p:ph idx="126" type="body" hasCustomPrompt="1"/>
+          </p:nvPr>
+        </p:nvSpPr>
+        <p:spPr>
+          <a:xfrm>
+            <a:off x="457200" y="274320"/>
+            <a:ext cx="11277295" cy="256032"/>
+          </a:xfrm>
+          <a:prstGeom prst="rect">
+            <a:avLst/>
+          </a:prstGeom>
+          <a:noFill/>
+          <a:ln/>
+        </p:spPr>
+        <p:txBody>
+          <a:bodyPr wrap="square" lIns="0" tIns="0" rIns="0" bIns="0" rtlCol="0" anchor="ctr"/>
+          <a:lstStyle/>
+          <a:p>
+            <a:pPr indent="0" marL="0">
+              <a:buNone/>
+            </a:pPr>
+            <a:r>
+              <a:rPr lang="en-US" sz="1100" b="1" dirty="0">
+                <a:solidFill>
+                  <a:srgbClr val="1F6F78"/>
+                </a:solidFill>
+                <a:latin typeface="Meiryo" pitchFamily="34" charset="0"/>
+                <a:ea typeface="Meiryo" pitchFamily="34" charset="-122"/>
+                <a:cs typeface="Meiryo" pitchFamily="34" charset="-120"/>
+              </a:rPr>
+              <a:t>学会調査 › NeurIPS：受賞・注目論文 ｜ NeurIPS 2024 Best Paper Runner-up</a:t>
+            </a:r>
+            <a:endParaRPr lang="en-US" sz="1100" dirty="0"/>
+          </a:p>
+        </p:txBody>
+      </p:sp>
+      <p:sp>
+        <p:nvSpPr>
+          <p:cNvPr id="3" name="Text 20"/>
+          <p:cNvSpPr/>
+          <p:nvPr>
+            <p:ph idx="127" type="body" hasCustomPrompt="1"/>
+          </p:nvPr>
+        </p:nvSpPr>
+        <p:spPr>
+          <a:xfrm>
+            <a:off x="457200" y="530352"/>
+            <a:ext cx="11277295" cy="566928"/>
+          </a:xfrm>
+          <a:prstGeom prst="rect">
+            <a:avLst/>
+          </a:prstGeom>
+          <a:noFill/>
+          <a:ln/>
+        </p:spPr>
+        <p:txBody>
+          <a:bodyPr wrap="square" lIns="0" tIns="0" rIns="0" bIns="0" rtlCol="0" anchor="ctr"/>
+          <a:lstStyle/>
+          <a:p>
+            <a:pPr indent="0" marL="0">
+              <a:lnSpc>
+                <a:spcPts val="3250"/>
+              </a:lnSpc>
+              <a:buNone/>
+            </a:pPr>
+            <a:r>
+              <a:rPr lang="en-US" sz="2400" b="1" dirty="0">
+                <a:solidFill>
+                  <a:srgbClr val="1E2433"/>
+                </a:solidFill>
+                <a:latin typeface="Meiryo" pitchFamily="34" charset="0"/>
+                <a:ea typeface="Meiryo" pitchFamily="34" charset="-122"/>
+                <a:cs typeface="Meiryo" pitchFamily="34" charset="-120"/>
+              </a:rPr>
+              <a:t>Guiding a Diffusion Model with a Bad Version of Itself</a:t>
+            </a:r>
+            <a:endParaRPr lang="en-US" sz="2400" dirty="0"/>
+          </a:p>
+        </p:txBody>
+      </p:sp>
+      <p:sp>
+        <p:nvSpPr>
+          <p:cNvPr id="4" name="Text 20"/>
+          <p:cNvSpPr/>
+          <p:nvPr>
+            <p:ph idx="128" type="body" hasCustomPrompt="1"/>
+          </p:nvPr>
+        </p:nvSpPr>
+        <p:spPr>
+          <a:xfrm>
+            <a:off x="457200" y="1115568"/>
+            <a:ext cx="11277295" cy="274320"/>
+          </a:xfrm>
+          <a:prstGeom prst="rect">
+            <a:avLst/>
+          </a:prstGeom>
+          <a:noFill/>
+          <a:ln/>
+        </p:spPr>
+        <p:txBody>
+          <a:bodyPr wrap="square" lIns="0" tIns="0" rIns="0" bIns="0" rtlCol="0" anchor="ctr"/>
+          <a:lstStyle/>
+          <a:p>
+            <a:pPr indent="0" marL="0">
+              <a:buNone/>
+            </a:pPr>
+            <a:r>
+              <a:rPr lang="en-US" sz="1000" dirty="0">
+                <a:solidFill>
+                  <a:srgbClr val="5B6478"/>
+                </a:solidFill>
+                <a:latin typeface="Meiryo" pitchFamily="34" charset="0"/>
+                <a:ea typeface="Meiryo" pitchFamily="34" charset="-122"/>
+                <a:cs typeface="Meiryo" pitchFamily="34" charset="-120"/>
+              </a:rPr>
+              <a:t>Tero Karras, Miika Aittala, Tuomas Kynkäänniemi, Jaakko Lehtinen, Timo Aila, Samuli Laine（NVIDIA・Aalto 大学）｜ NeurIPS 2024</a:t>
+            </a:r>
+            <a:endParaRPr lang="en-US" sz="1200" dirty="0"/>
+          </a:p>
+        </p:txBody>
+      </p:sp>
+      <p:sp>
+        <p:nvSpPr>
+          <p:cNvPr id="5" name="Text 20"/>
+          <p:cNvSpPr/>
+          <p:nvPr>
+            <p:ph idx="120" type="body" hasCustomPrompt="1"/>
+          </p:nvPr>
+        </p:nvSpPr>
+        <p:spPr>
+          <a:xfrm>
+            <a:off x="621792" y="1984248"/>
+            <a:ext cx="3465576" cy="960120"/>
+          </a:xfrm>
+          <a:prstGeom prst="rect">
+            <a:avLst/>
+          </a:prstGeom>
+          <a:noFill/>
+          <a:ln/>
+        </p:spPr>
+        <p:txBody>
+          <a:bodyPr wrap="square" lIns="0" tIns="0" rIns="0" bIns="0" rtlCol="0" anchor="t"/>
+          <a:lstStyle/>
+          <a:p>
+            <a:pPr indent="0" marL="0">
+              <a:lnSpc>
+                <a:spcPts val="1350"/>
+              </a:lnSpc>
+              <a:buNone/>
+            </a:pPr>
+            <a:r>
+              <a:rPr lang="en-US" sz="1000" dirty="0">
+                <a:solidFill>
+                  <a:srgbClr val="1E2433"/>
+                </a:solidFill>
+                <a:latin typeface="Meiryo" pitchFamily="34" charset="0"/>
+                <a:ea typeface="Meiryo" pitchFamily="34" charset="-122"/>
+                <a:cs typeface="Meiryo" pitchFamily="34" charset="-120"/>
+              </a:rPr>
+              <a:t>拡散モデルの誘導に、無条件モデルではなく「小さく学習の浅い自分自身」を使う autoguidance を提案。多様性を損なわずに画質だけを高め、ImageNet-512 で FID 1.25、ImageNet-64 で 1.01 の記録を出した。</a:t>
+            </a:r>
+            <a:endParaRPr lang="en-US" sz="1200" dirty="0"/>
+          </a:p>
+        </p:txBody>
+      </p:sp>
+      <p:sp>
+        <p:nvSpPr>
+          <p:cNvPr id="6" name="Text 20"/>
+          <p:cNvSpPr/>
+          <p:nvPr>
+            <p:ph idx="121" type="body" hasCustomPrompt="1"/>
+          </p:nvPr>
+        </p:nvSpPr>
+        <p:spPr>
+          <a:xfrm>
+            <a:off x="4553712" y="1984248"/>
+            <a:ext cx="3465576" cy="960120"/>
+          </a:xfrm>
+          <a:prstGeom prst="rect">
+            <a:avLst/>
+          </a:prstGeom>
+          <a:noFill/>
+          <a:ln/>
+        </p:spPr>
+        <p:txBody>
+          <a:bodyPr wrap="square" lIns="0" tIns="0" rIns="0" bIns="0" rtlCol="0" anchor="t"/>
+          <a:lstStyle/>
+          <a:p>
+            <a:pPr indent="0" marL="0">
+              <a:lnSpc>
+                <a:spcPts val="1400"/>
+              </a:lnSpc>
+              <a:buNone/>
+            </a:pPr>
+            <a:r>
+              <a:rPr lang="en-US" sz="1050" dirty="0">
+                <a:solidFill>
+                  <a:srgbClr val="1E2433"/>
+                </a:solidFill>
+                <a:latin typeface="Meiryo" pitchFamily="34" charset="0"/>
+                <a:ea typeface="Meiryo" pitchFamily="34" charset="-122"/>
+                <a:cs typeface="Meiryo" pitchFamily="34" charset="-120"/>
+              </a:rPr>
+              <a:t>標準の classifier-free guidance（CFG）は、条件への整合・画質の向上・多様性の低下が絡み合い、別々に制御できない。条件付き生成にしか使えず、軌道が行き過ぎて構図が単純化する問題もあった。</a:t>
+            </a:r>
+            <a:endParaRPr lang="en-US" sz="1200" dirty="0"/>
+          </a:p>
+        </p:txBody>
+      </p:sp>
+      <p:sp>
+        <p:nvSpPr>
+          <p:cNvPr id="7" name="Text 20"/>
+          <p:cNvSpPr/>
+          <p:nvPr>
+            <p:ph idx="122" type="body" hasCustomPrompt="1"/>
+          </p:nvPr>
+        </p:nvSpPr>
+        <p:spPr>
+          <a:xfrm>
+            <a:off x="621792" y="3630168"/>
+            <a:ext cx="3465576" cy="960120"/>
+          </a:xfrm>
+          <a:prstGeom prst="rect">
+            <a:avLst/>
+          </a:prstGeom>
+          <a:noFill/>
+          <a:ln/>
+        </p:spPr>
+        <p:txBody>
+          <a:bodyPr wrap="square" lIns="0" tIns="0" rIns="0" bIns="0" rtlCol="0" anchor="t"/>
+          <a:lstStyle/>
+          <a:p>
+            <a:pPr indent="0" marL="0">
+              <a:lnSpc>
+                <a:spcPts val="1350"/>
+              </a:lnSpc>
+              <a:buNone/>
+            </a:pPr>
+            <a:r>
+              <a:rPr lang="en-US" sz="1000" dirty="0">
+                <a:solidFill>
+                  <a:srgbClr val="1E2433"/>
+                </a:solidFill>
+                <a:latin typeface="Meiryo" pitchFamily="34" charset="0"/>
+                <a:ea typeface="Meiryo" pitchFamily="34" charset="-122"/>
+                <a:cs typeface="Meiryo" pitchFamily="34" charset="-120"/>
+              </a:rPr>
+              <a:t>2次元のフラクタル状の玩具分布で、CFG の画質向上は「弱い無条件モデルとの密度比の勾配が多様体の内側を指す」ことによると分析。そこで同じ条件・同じ課題で、容量を減らし学習を短くした劣化版 D0 で主モデル D1 を外挿誘導する。</a:t>
+            </a:r>
+            <a:endParaRPr lang="en-US" sz="1200" dirty="0"/>
+          </a:p>
+        </p:txBody>
+      </p:sp>
+      <p:sp>
+        <p:nvSpPr>
+          <p:cNvPr id="8" name="Text 20"/>
+          <p:cNvSpPr/>
+          <p:nvPr>
+            <p:ph idx="123" type="body" hasCustomPrompt="1"/>
+          </p:nvPr>
+        </p:nvSpPr>
+        <p:spPr>
+          <a:xfrm>
+            <a:off x="4553712" y="3630168"/>
+            <a:ext cx="3465576" cy="960120"/>
+          </a:xfrm>
+          <a:prstGeom prst="rect">
+            <a:avLst/>
+          </a:prstGeom>
+          <a:noFill/>
+          <a:ln/>
+        </p:spPr>
+        <p:txBody>
+          <a:bodyPr wrap="square" lIns="0" tIns="0" rIns="0" bIns="0" rtlCol="0" anchor="t"/>
+          <a:lstStyle/>
+          <a:p>
+            <a:pPr indent="0" marL="0">
+              <a:lnSpc>
+                <a:spcPts val="1350"/>
+              </a:lnSpc>
+              <a:buNone/>
+            </a:pPr>
+            <a:r>
+              <a:rPr lang="en-US" sz="1000" dirty="0">
+                <a:solidFill>
+                  <a:srgbClr val="1E2433"/>
+                </a:solidFill>
+                <a:latin typeface="Meiryo" pitchFamily="34" charset="0"/>
+                <a:ea typeface="Meiryo" pitchFamily="34" charset="-122"/>
+                <a:cs typeface="Meiryo" pitchFamily="34" charset="-120"/>
+              </a:rPr>
+              <a:t>EDM2-S（ImageNet-512）で FID 2.56→1.34（CFG 2.23、Guidance Interval 1.68）、EDM2-XXL で 1.25（Table 1）。無条件生成でも 11.67→3.86。学習短縮のみなら 1.51、容量削減のみなら 2.13。追加の学習コストは S/XS の組で +3.6%。</a:t>
+            </a:r>
+            <a:endParaRPr lang="en-US" sz="1200" dirty="0"/>
+          </a:p>
+        </p:txBody>
+      </p:sp>
+      <p:sp>
+        <p:nvSpPr>
+          <p:cNvPr id="9" name="Text 20"/>
+          <p:cNvSpPr/>
+          <p:nvPr>
+            <p:ph idx="124" type="body" hasCustomPrompt="1"/>
+          </p:nvPr>
+        </p:nvSpPr>
+        <p:spPr>
+          <a:xfrm>
+            <a:off x="621792" y="5276088"/>
+            <a:ext cx="3465576" cy="960120"/>
+          </a:xfrm>
+          <a:prstGeom prst="rect">
+            <a:avLst/>
+          </a:prstGeom>
+          <a:noFill/>
+          <a:ln/>
+        </p:spPr>
+        <p:txBody>
+          <a:bodyPr wrap="square" lIns="0" tIns="0" rIns="0" bIns="0" rtlCol="0" anchor="t"/>
+          <a:lstStyle/>
+          <a:p>
+            <a:pPr indent="0" marL="0">
+              <a:lnSpc>
+                <a:spcPts val="1350"/>
+              </a:lnSpc>
+              <a:buNone/>
+            </a:pPr>
+            <a:r>
+              <a:rPr lang="en-US" sz="1000" dirty="0">
+                <a:solidFill>
+                  <a:srgbClr val="1E2433"/>
+                </a:solidFill>
+                <a:latin typeface="Meiryo" pitchFamily="34" charset="0"/>
+                <a:ea typeface="Meiryo" pitchFamily="34" charset="-122"/>
+                <a:cs typeface="Meiryo" pitchFamily="34" charset="-120"/>
+              </a:rPr>
+              <a:t>著者：誘導モデルが有効になる条件の理論や選び方は未解明。大規模生成器では早期のスナップショットが手に入りにくい。</a:t>
+            </a:r>
+            <a:endParaRPr lang="en-US" sz="1200" dirty="0"/>
+          </a:p>
+          <a:p>
+            <a:pPr indent="0" marL="0">
+              <a:lnSpc>
+                <a:spcPts val="1350"/>
+              </a:lnSpc>
+              <a:buNone/>
+            </a:pPr>
+            <a:r>
+              <a:rPr lang="en-US" sz="1000" dirty="0">
+                <a:solidFill>
+                  <a:srgbClr val="1E2433"/>
+                </a:solidFill>
+                <a:latin typeface="Meiryo" pitchFamily="34" charset="0"/>
+                <a:ea typeface="Meiryo" pitchFamily="34" charset="-122"/>
+                <a:cs typeface="Meiryo" pitchFamily="34" charset="-120"/>
+              </a:rPr>
+              <a:t>所感：CFG が「なぜ効くか」を解きほぐし、画質と多様性を分離した。単純で応用範囲が広い。</a:t>
+            </a:r>
+            <a:endParaRPr lang="en-US" sz="1200" dirty="0"/>
+          </a:p>
+        </p:txBody>
+      </p:sp>
+      <p:sp>
+        <p:nvSpPr>
+          <p:cNvPr id="10" name="Text 20"/>
+          <p:cNvSpPr/>
+          <p:nvPr>
+            <p:ph idx="125" type="body" hasCustomPrompt="1"/>
+          </p:nvPr>
+        </p:nvSpPr>
+        <p:spPr>
+          <a:xfrm>
+            <a:off x="4553712" y="5276088"/>
+            <a:ext cx="3465576" cy="960120"/>
+          </a:xfrm>
+          <a:prstGeom prst="rect">
+            <a:avLst/>
+          </a:prstGeom>
+          <a:noFill/>
+          <a:ln/>
+        </p:spPr>
+        <p:txBody>
+          <a:bodyPr wrap="square" lIns="0" tIns="0" rIns="0" bIns="0" rtlCol="0" anchor="t"/>
+          <a:lstStyle/>
+          <a:p>
+            <a:pPr indent="0" marL="0">
+              <a:lnSpc>
+                <a:spcPts val="1350"/>
+              </a:lnSpc>
+              <a:buNone/>
+            </a:pPr>
+            <a:r>
+              <a:rPr lang="en-US" sz="1000" dirty="0">
+                <a:solidFill>
+                  <a:srgbClr val="1E2433"/>
+                </a:solidFill>
+                <a:latin typeface="Meiryo" pitchFamily="34" charset="0"/>
+                <a:ea typeface="Meiryo" pitchFamily="34" charset="-122"/>
+                <a:cs typeface="Meiryo" pitchFamily="34" charset="-120"/>
+              </a:rPr>
+              <a:t>・Classifier-Free Guidance (Ho &amp; Salimans 2022)（未調査）</a:t>
+            </a:r>
+            <a:endParaRPr lang="en-US" sz="1200" dirty="0"/>
+          </a:p>
+          <a:p>
+            <a:pPr indent="0" marL="0">
+              <a:lnSpc>
+                <a:spcPts val="1350"/>
+              </a:lnSpc>
+              <a:buNone/>
+            </a:pPr>
+            <a:r>
+              <a:rPr lang="en-US" sz="1000" dirty="0">
+                <a:solidFill>
+                  <a:srgbClr val="1E2433"/>
+                </a:solidFill>
+                <a:latin typeface="Meiryo" pitchFamily="34" charset="0"/>
+                <a:ea typeface="Meiryo" pitchFamily="34" charset="-122"/>
+                <a:cs typeface="Meiryo" pitchFamily="34" charset="-120"/>
+              </a:rPr>
+              <a:t>・EDM2 (Karras+ 2024)（未調査）</a:t>
+            </a:r>
+            <a:endParaRPr lang="en-US" sz="1200" dirty="0"/>
+          </a:p>
+          <a:p>
+            <a:pPr indent="0" marL="0">
+              <a:lnSpc>
+                <a:spcPts val="1350"/>
+              </a:lnSpc>
+              <a:buNone/>
+            </a:pPr>
+            <a:r>
+              <a:rPr lang="en-US" sz="1000" dirty="0">
+                <a:solidFill>
+                  <a:srgbClr val="1E2433"/>
+                </a:solidFill>
+                <a:latin typeface="Meiryo" pitchFamily="34" charset="0"/>
+                <a:ea typeface="Meiryo" pitchFamily="34" charset="-122"/>
+                <a:cs typeface="Meiryo" pitchFamily="34" charset="-120"/>
+              </a:rPr>
+              <a:t>・Guidance Interval (Kynkäänniemi+ 2024)（未調査）</a:t>
+            </a:r>
+            <a:endParaRPr lang="en-US" sz="1200" dirty="0"/>
+          </a:p>
+        </p:txBody>
+      </p:sp>
+      <p:sp>
+        <p:nvSpPr>
+          <p:cNvPr id="11" name="Text 20"/>
+          <p:cNvSpPr/>
+          <p:nvPr>
+            <p:ph idx="129" type="body" hasCustomPrompt="1"/>
+          </p:nvPr>
+        </p:nvSpPr>
+        <p:spPr>
+          <a:xfrm>
+            <a:off x="8503920" y="4828032"/>
+            <a:ext cx="3093415" cy="1408176"/>
+          </a:xfrm>
+          <a:prstGeom prst="rect">
+            <a:avLst/>
+          </a:prstGeom>
+          <a:noFill/>
+          <a:ln/>
+        </p:spPr>
+        <p:txBody>
+          <a:bodyPr wrap="square" lIns="0" tIns="0" rIns="0" bIns="0" rtlCol="0" anchor="t"/>
+          <a:lstStyle/>
+          <a:p>
+            <a:pPr indent="0" marL="0">
+              <a:lnSpc>
+                <a:spcPts val="1350"/>
+              </a:lnSpc>
+              <a:buNone/>
+            </a:pPr>
+            <a:r>
+              <a:rPr lang="en-US" sz="1000" b="1" dirty="0">
+                <a:solidFill>
+                  <a:srgbClr val="1E2433"/>
+                </a:solidFill>
+                <a:latin typeface="Meiryo" pitchFamily="34" charset="0"/>
+                <a:ea typeface="Meiryo" pitchFamily="34" charset="-122"/>
+                <a:cs typeface="Meiryo" pitchFamily="34" charset="-120"/>
+              </a:rPr>
+              <a:t>発表：</a:t>
+            </a:r>
+            <a:pPr indent="0" marL="0">
+              <a:lnSpc>
+                <a:spcPts val="1350"/>
+              </a:lnSpc>
+              <a:buNone/>
+            </a:pPr>
+            <a:r>
+              <a:rPr lang="en-US" sz="1000" dirty="0">
+                <a:solidFill>
+                  <a:srgbClr val="1E2433"/>
+                </a:solidFill>
+                <a:latin typeface="Meiryo" pitchFamily="34" charset="0"/>
+                <a:ea typeface="Meiryo" pitchFamily="34" charset="-122"/>
+                <a:cs typeface="Meiryo" pitchFamily="34" charset="-120"/>
+              </a:rPr>
+              <a:t>NeurIPS 2024</a:t>
+            </a:r>
+            <a:endParaRPr lang="en-US" sz="1050" dirty="0"/>
+          </a:p>
+          <a:p>
+            <a:pPr indent="0" marL="0">
+              <a:lnSpc>
+                <a:spcPts val="1350"/>
+              </a:lnSpc>
+              <a:buNone/>
+            </a:pPr>
+            <a:r>
+              <a:rPr lang="en-US" sz="1000" b="1" dirty="0">
+                <a:solidFill>
+                  <a:srgbClr val="1E2433"/>
+                </a:solidFill>
+                <a:latin typeface="Meiryo" pitchFamily="34" charset="0"/>
+                <a:ea typeface="Meiryo" pitchFamily="34" charset="-122"/>
+                <a:cs typeface="Meiryo" pitchFamily="34" charset="-120"/>
+              </a:rPr>
+              <a:t>リンク：</a:t>
+            </a:r>
+            <a:pPr indent="0" marL="0">
+              <a:lnSpc>
+                <a:spcPts val="1350"/>
+              </a:lnSpc>
+              <a:buNone/>
+            </a:pPr>
+            <a:r>
+              <a:rPr lang="en-US" sz="1000" u="sng" dirty="0">
+                <a:solidFill>
+                  <a:srgbClr val="1E2433"/>
+                </a:solidFill>
+                <a:latin typeface="Meiryo" pitchFamily="34" charset="0"/>
+                <a:ea typeface="Meiryo" pitchFamily="34" charset="-122"/>
+                <a:cs typeface="Meiryo" pitchFamily="34" charset="-120"/>
+                <a:hlinkClick r:id="rId1" invalidUrl="" action="" tgtFrame="" tooltip="" history="1" highlightClick="0" endSnd="0">
+                  <a:extLst>
+                    <a:ext uri="{A12FA001-AC4F-418D-AE19-62706E023703}">
+                      <ahyp:hlinkClr xmlns:ahyp="http://schemas.microsoft.com/office/drawing/2018/hyperlinkcolor" val="tx"/>
+                    </a:ext>
+                  </a:extLst>
+                </a:hlinkClick>
+              </a:rPr>
+              <a:t>https://arxiv.org/abs/2406.02507</a:t>
+            </a:r>
+            <a:endParaRPr lang="en-US" sz="1050" dirty="0"/>
+          </a:p>
+          <a:p>
+            <a:pPr indent="0" marL="0">
+              <a:lnSpc>
+                <a:spcPts val="1350"/>
+              </a:lnSpc>
+              <a:buNone/>
+            </a:pPr>
+            <a:r>
+              <a:rPr lang="en-US" sz="1000" b="1" dirty="0">
+                <a:solidFill>
+                  <a:srgbClr val="1E2433"/>
+                </a:solidFill>
+                <a:latin typeface="Meiryo" pitchFamily="34" charset="0"/>
+                <a:ea typeface="Meiryo" pitchFamily="34" charset="-122"/>
+                <a:cs typeface="Meiryo" pitchFamily="34" charset="-120"/>
+              </a:rPr>
+              <a:t>受賞：</a:t>
+            </a:r>
+            <a:pPr indent="0" marL="0">
+              <a:lnSpc>
+                <a:spcPts val="1350"/>
+              </a:lnSpc>
+              <a:buNone/>
+            </a:pPr>
+            <a:r>
+              <a:rPr lang="en-US" sz="1000" dirty="0">
+                <a:solidFill>
+                  <a:srgbClr val="1E2433"/>
+                </a:solidFill>
+                <a:latin typeface="Meiryo" pitchFamily="34" charset="0"/>
+                <a:ea typeface="Meiryo" pitchFamily="34" charset="-122"/>
+                <a:cs typeface="Meiryo" pitchFamily="34" charset="-120"/>
+              </a:rPr>
+              <a:t>NeurIPS 2024 Best Paper Runner-up</a:t>
+            </a:r>
+            <a:endParaRPr lang="en-US" sz="1050" dirty="0"/>
+          </a:p>
+          <a:p>
+            <a:pPr indent="0" marL="0">
+              <a:lnSpc>
+                <a:spcPts val="1350"/>
+              </a:lnSpc>
+              <a:buNone/>
+            </a:pPr>
+            <a:r>
+              <a:rPr lang="en-US" sz="1000" b="1" dirty="0">
+                <a:solidFill>
+                  <a:srgbClr val="1E2433"/>
+                </a:solidFill>
+                <a:latin typeface="Meiryo" pitchFamily="34" charset="0"/>
+                <a:ea typeface="Meiryo" pitchFamily="34" charset="-122"/>
+                <a:cs typeface="Meiryo" pitchFamily="34" charset="-120"/>
+              </a:rPr>
+              <a:t>調査日：</a:t>
+            </a:r>
+            <a:pPr indent="0" marL="0">
+              <a:lnSpc>
+                <a:spcPts val="1350"/>
+              </a:lnSpc>
+              <a:buNone/>
+            </a:pPr>
+            <a:r>
+              <a:rPr lang="en-US" sz="1000" dirty="0">
+                <a:solidFill>
+                  <a:srgbClr val="1E2433"/>
+                </a:solidFill>
+                <a:latin typeface="Meiryo" pitchFamily="34" charset="0"/>
+                <a:ea typeface="Meiryo" pitchFamily="34" charset="-122"/>
+                <a:cs typeface="Meiryo" pitchFamily="34" charset="-120"/>
+              </a:rPr>
+              <a:t>2026-10-28</a:t>
+            </a:r>
+            <a:endParaRPr lang="en-US" sz="1050" dirty="0"/>
+          </a:p>
+          <a:p>
+            <a:pPr indent="0" marL="0">
+              <a:lnSpc>
+                <a:spcPts val="1350"/>
+              </a:lnSpc>
+              <a:buNone/>
+            </a:pPr>
+            <a:r>
+              <a:rPr lang="en-US" sz="1000" b="1" dirty="0">
+                <a:solidFill>
+                  <a:srgbClr val="1E2433"/>
+                </a:solidFill>
+                <a:latin typeface="Meiryo" pitchFamily="34" charset="0"/>
+                <a:ea typeface="Meiryo" pitchFamily="34" charset="-122"/>
+                <a:cs typeface="Meiryo" pitchFamily="34" charset="-120"/>
+              </a:rPr>
+              <a:t>確認範囲：</a:t>
+            </a:r>
+            <a:pPr indent="0" marL="0">
+              <a:lnSpc>
+                <a:spcPts val="1350"/>
+              </a:lnSpc>
+              <a:buNone/>
+            </a:pPr>
+            <a:r>
+              <a:rPr lang="en-US" sz="1000" dirty="0">
+                <a:solidFill>
+                  <a:srgbClr val="1E2433"/>
+                </a:solidFill>
+                <a:latin typeface="Meiryo" pitchFamily="34" charset="0"/>
+                <a:ea typeface="Meiryo" pitchFamily="34" charset="-122"/>
+                <a:cs typeface="Meiryo" pitchFamily="34" charset="-120"/>
+              </a:rPr>
+              <a:t>全文（問題提起・手法・実験・結果・考察）</a:t>
+            </a:r>
+            <a:endParaRPr lang="en-US" sz="1050" dirty="0"/>
+          </a:p>
+        </p:txBody>
+      </p:sp>
+      <p:sp>
+        <p:nvSpPr>
+          <p:cNvPr id="12" name="Text 20"/>
+          <p:cNvSpPr/>
+          <p:nvPr>
+            <p:ph idx="130" type="body" hasCustomPrompt="1"/>
+          </p:nvPr>
+        </p:nvSpPr>
+        <p:spPr>
+          <a:xfrm>
+            <a:off x="457200" y="6446520"/>
+            <a:ext cx="9144000" cy="274320"/>
+          </a:xfrm>
+          <a:prstGeom prst="rect">
+            <a:avLst/>
+          </a:prstGeom>
+          <a:noFill/>
+          <a:ln/>
+        </p:spPr>
+        <p:txBody>
+          <a:bodyPr wrap="square" lIns="0" tIns="0" rIns="0" bIns="0" rtlCol="0" anchor="ctr"/>
+          <a:lstStyle/>
+          <a:p>
+            <a:pPr indent="0" marL="0">
+              <a:buNone/>
+            </a:pPr>
+            <a:r>
+              <a:rPr lang="en-US" sz="1000" dirty="0">
+                <a:solidFill>
+                  <a:srgbClr val="5B6478"/>
+                </a:solidFill>
+                <a:latin typeface="Meiryo" pitchFamily="34" charset="0"/>
+                <a:ea typeface="Meiryo" pitchFamily="34" charset="-122"/>
+                <a:cs typeface="Meiryo" pitchFamily="34" charset="-120"/>
+              </a:rPr>
+              <a:t>Research Survey ｜ 学会調査 › NeurIPS：受賞・注目論文</a:t>
+            </a:r>
+            <a:endParaRPr lang="en-US" sz="1000" dirty="0"/>
+          </a:p>
+        </p:txBody>
+      </p:sp>
+      <p:pic>
+        <p:nvPicPr>
+          <p:cNvPr id="13" name="Image 0" descr="/tmp/claude-0/-home-user-researches/dc3d135a-4bab-5b84-bcb3-e0d06fe39570/scratchpad/stage/conferences/neurips/figures/autoguide.png">    </p:cNvPr>
+          <p:cNvPicPr>
+            <a:picLocks noChangeAspect="1"/>
+          </p:cNvPicPr>
+          <p:nvPr/>
+        </p:nvPicPr>
+        <p:blipFill>
+          <a:blip r:embed="rId2"/>
+          <a:stretch>
+            <a:fillRect/>
+          </a:stretch>
+        </p:blipFill>
+        <p:spPr>
+          <a:xfrm>
+            <a:off x="8366760" y="2312818"/>
+            <a:ext cx="3367735" cy="769323"/>
+          </a:xfrm>
+          <a:prstGeom prst="rect">
+            <a:avLst/>
+          </a:prstGeom>
+        </p:spPr>
+      </p:pic>
+      <p:sp>
+        <p:nvSpPr>
+          <p:cNvPr id="14" name="Text 11"/>
+          <p:cNvSpPr txBox="1"/>
+          <p:nvPr/>
+        </p:nvSpPr>
+        <p:spPr>
+          <a:xfrm>
+            <a:off x="8366760" y="3931920"/>
+            <a:ext cx="3367735" cy="320040"/>
+          </a:xfrm>
+          <a:prstGeom prst="rect">
+            <a:avLst/>
+          </a:prstGeom>
+          <a:noFill/>
+          <a:ln/>
+        </p:spPr>
+        <p:txBody>
+          <a:bodyPr wrap="square" lIns="0" tIns="0" rIns="0" bIns="0" rtlCol="0" anchor="t"/>
+          <a:lstStyle/>
+          <a:p>
+            <a:pPr indent="0" marL="0">
+              <a:buNone/>
+            </a:pPr>
+            <a:r>
+              <a:rPr lang="en-US" sz="950" dirty="0">
+                <a:solidFill>
+                  <a:srgbClr val="5B6478"/>
+                </a:solidFill>
+                <a:latin typeface="Meiryo" pitchFamily="34" charset="0"/>
+                <a:ea typeface="Meiryo" pitchFamily="34" charset="-122"/>
+                <a:cs typeface="Meiryo" pitchFamily="34" charset="-120"/>
+              </a:rPr>
+              <a:t>出典：Autoguidance (Karras+ 2024) Fig. 1（2次元玩具分布。左から 正解・誘導なし・CFG・単純な切り詰め・autoguidance）</a:t>
+            </a:r>
+            <a:endParaRPr lang="en-US" sz="950" dirty="0"/>
+          </a:p>
+        </p:txBody>
+      </p:sp>
+      <p:sp>
+        <p:nvSpPr>
+          <p:cNvPr id="25" name="Slide Number Placeholder 0"/>
+          <p:cNvSpPr>
+            <a:spLocks noGrp="1"/>
+          </p:cNvSpPr>
+          <p:nvPr>
+            <p:ph type="sldNum" sz="quarter" idx="4294967295"/>
+          </p:nvPr>
+        </p:nvSpPr>
+        <p:spPr>
+          <a:xfrm>
+            <a:off x="11185855" y="6446520"/>
+            <a:ext cx="548640" cy="274320"/>
+          </a:xfrm>
+          <a:prstGeom prst="rect">
+            <a:avLst/>
+          </a:prstGeom>
+          <a:extLst>
+            <a:ext uri="{C572A759-6A51-4108-AA02-DFA0A04FC94B}">
+              <ma14:wrappingTextBoxFlag xmlns:ma14="http://schemas.microsoft.com/office/mac/drawingml/2011/main" val="0"/>
+            </a:ext>
+          </a:extLst>
+        </p:spPr>
+        <p:txBody>
+          <a:bodyPr/>
+          <a:lstStyle>
+            <a:lvl1pPr>
+              <a:defRPr sz="1000">
+                <a:solidFill>
+                  <a:srgbClr val="5B6478"/>
+                </a:solidFill>
+                <a:latin typeface="Meiryo"/>
+                <a:ea typeface="Meiryo"/>
+                <a:cs typeface="Meiryo"/>
+              </a:defRPr>
+            </a:lvl1pPr>
+          </a:lstStyle>
+          <a:p>
+            <a:pPr algn="r"/>
+            <a:fld id="{F7021451-1387-4CA6-816F-3879F97B5CBC}" type="slidenum">
+              <a:rPr b="0" lang="en-US"/>
+              <a:t>30</a:t>
+            </a:fld>
+            <a:endParaRPr lang="en-US"/>
+          </a:p>
+        </p:txBody>
+      </p:sp>
+    </p:spTree>
+  </p:cSld>
+  <p:clrMapOvr>
+    <a:masterClrMapping/>
+  </p:clrMapOvr>
+</p:sld>
+</file>
+
+<file path=ppt/slides/slide31.xml><?xml version="1.0" encoding="utf-8"?>
+<p:sld xmlns:a="http://schemas.openxmlformats.org/drawingml/2006/main" xmlns:r="http://schemas.openxmlformats.org/officeDocument/2006/relationships" xmlns:p="http://schemas.openxmlformats.org/presentationml/2006/main">
+  <p:cSld name="Slide 31">
+    <p:spTree>
+      <p:nvGrpSpPr>
+        <p:cNvPr id="1" name=""/>
+        <p:cNvGrpSpPr/>
+        <p:nvPr/>
+      </p:nvGrpSpPr>
+      <p:grpSpPr>
+        <a:xfrm>
+          <a:off x="0" y="0"/>
+          <a:ext cx="0" cy="0"/>
+          <a:chOff x="0" y="0"/>
+          <a:chExt cx="0" cy="0"/>
+        </a:xfrm>
+      </p:grpSpPr>
+      <p:sp>
+        <p:nvSpPr>
+          <p:cNvPr id="2" name="Text 6"/>
+          <p:cNvSpPr/>
+          <p:nvPr>
+            <p:ph idx="109" type="body" hasCustomPrompt="1"/>
+          </p:nvPr>
+        </p:nvSpPr>
+        <p:spPr>
+          <a:xfrm>
+            <a:off x="457200" y="274320"/>
+            <a:ext cx="11277295" cy="256032"/>
+          </a:xfrm>
+          <a:prstGeom prst="rect">
+            <a:avLst/>
+          </a:prstGeom>
+          <a:noFill/>
+          <a:ln/>
+        </p:spPr>
+        <p:txBody>
+          <a:bodyPr wrap="square" lIns="0" tIns="0" rIns="0" bIns="0" rtlCol="0" anchor="ctr"/>
+          <a:lstStyle/>
+          <a:p>
+            <a:pPr indent="0" marL="0">
+              <a:buNone/>
+            </a:pPr>
+            <a:r>
+              <a:rPr lang="en-US" sz="1100" b="1" dirty="0">
+                <a:solidFill>
+                  <a:srgbClr val="1F6F78"/>
+                </a:solidFill>
+                <a:latin typeface="Meiryo" pitchFamily="34" charset="0"/>
+                <a:ea typeface="Meiryo" pitchFamily="34" charset="-122"/>
+                <a:cs typeface="Meiryo" pitchFamily="34" charset="-120"/>
+              </a:rPr>
+              <a:t>学会調査 › NeurIPS：受賞・注目論文 ｜ NeurIPS 2024 Best Paper Runner-up ｜ 詳細・評価ポイント</a:t>
+            </a:r>
+            <a:endParaRPr lang="en-US" sz="1100" dirty="0"/>
+          </a:p>
+        </p:txBody>
+      </p:sp>
+      <p:sp>
+        <p:nvSpPr>
+          <p:cNvPr id="3" name="Text 6"/>
+          <p:cNvSpPr/>
+          <p:nvPr>
+            <p:ph idx="110" type="body" hasCustomPrompt="1"/>
+          </p:nvPr>
+        </p:nvSpPr>
+        <p:spPr>
+          <a:xfrm>
+            <a:off x="457200" y="530352"/>
+            <a:ext cx="11277295" cy="566928"/>
+          </a:xfrm>
+          <a:prstGeom prst="rect">
+            <a:avLst/>
+          </a:prstGeom>
+          <a:noFill/>
+          <a:ln/>
+        </p:spPr>
+        <p:txBody>
+          <a:bodyPr wrap="square" lIns="0" tIns="0" rIns="0" bIns="0" rtlCol="0" anchor="ctr"/>
+          <a:lstStyle/>
+          <a:p>
+            <a:pPr indent="0" marL="0">
+              <a:lnSpc>
+                <a:spcPts val="3250"/>
+              </a:lnSpc>
+              <a:buNone/>
+            </a:pPr>
+            <a:r>
+              <a:rPr lang="en-US" sz="2400" b="1" dirty="0">
+                <a:solidFill>
+                  <a:srgbClr val="1E2433"/>
+                </a:solidFill>
+                <a:latin typeface="Meiryo" pitchFamily="34" charset="0"/>
+                <a:ea typeface="Meiryo" pitchFamily="34" charset="-122"/>
+                <a:cs typeface="Meiryo" pitchFamily="34" charset="-120"/>
+              </a:rPr>
+              <a:t>Guiding a Diffusion Model with a Bad Version of Itself</a:t>
+            </a:r>
+            <a:endParaRPr lang="en-US" sz="2400" dirty="0"/>
+          </a:p>
+        </p:txBody>
+      </p:sp>
+      <p:sp>
+        <p:nvSpPr>
+          <p:cNvPr id="4" name="Text 6"/>
+          <p:cNvSpPr/>
+          <p:nvPr>
+            <p:ph idx="111" type="body" hasCustomPrompt="1"/>
+          </p:nvPr>
+        </p:nvSpPr>
+        <p:spPr>
+          <a:xfrm>
+            <a:off x="457200" y="1115568"/>
+            <a:ext cx="11277295" cy="274320"/>
+          </a:xfrm>
+          <a:prstGeom prst="rect">
+            <a:avLst/>
+          </a:prstGeom>
+          <a:noFill/>
+          <a:ln/>
+        </p:spPr>
+        <p:txBody>
+          <a:bodyPr wrap="square" lIns="0" tIns="0" rIns="0" bIns="0" rtlCol="0" anchor="ctr"/>
+          <a:lstStyle/>
+          <a:p>
+            <a:pPr indent="0" marL="0">
+              <a:buNone/>
+            </a:pPr>
+            <a:r>
+              <a:rPr lang="en-US" sz="1000" dirty="0">
+                <a:solidFill>
+                  <a:srgbClr val="5B6478"/>
+                </a:solidFill>
+                <a:latin typeface="Meiryo" pitchFamily="34" charset="0"/>
+                <a:ea typeface="Meiryo" pitchFamily="34" charset="-122"/>
+                <a:cs typeface="Meiryo" pitchFamily="34" charset="-120"/>
+              </a:rPr>
+              <a:t>Tero Karras, Miika Aittala, Tuomas Kynkäänniemi, Jaakko Lehtinen, Timo Aila, Samuli Laine（NVIDIA・Aalto 大学）｜ NeurIPS 2024</a:t>
+            </a:r>
+            <a:endParaRPr lang="en-US" sz="1200" dirty="0"/>
+          </a:p>
+        </p:txBody>
+      </p:sp>
+      <p:sp>
+        <p:nvSpPr>
+          <p:cNvPr id="5" name="Text 2"/>
+          <p:cNvSpPr/>
+          <p:nvPr>
+            <p:ph idx="102" type="body" hasCustomPrompt="1"/>
+          </p:nvPr>
+        </p:nvSpPr>
+        <p:spPr>
+          <a:xfrm>
+            <a:off x="621792" y="1984248"/>
+            <a:ext cx="7443216" cy="4251960"/>
+          </a:xfrm>
+          <a:prstGeom prst="rect">
+            <a:avLst/>
+          </a:prstGeom>
+          <a:noFill/>
+          <a:ln/>
+        </p:spPr>
+        <p:txBody>
+          <a:bodyPr wrap="square" lIns="0" tIns="0" rIns="0" bIns="0" rtlCol="0" anchor="t"/>
+          <a:lstStyle/>
+          <a:p>
+            <a:pPr indent="0" marL="0">
+              <a:lnSpc>
+                <a:spcPts val="1900"/>
+              </a:lnSpc>
+              <a:buNone/>
+            </a:pPr>
+            <a:r>
+              <a:rPr lang="en-US" sz="1400" dirty="0">
+                <a:solidFill>
+                  <a:srgbClr val="1E2433"/>
+                </a:solidFill>
+                <a:latin typeface="Meiryo" pitchFamily="34" charset="0"/>
+                <a:ea typeface="Meiryo" pitchFamily="34" charset="-122"/>
+                <a:cs typeface="Meiryo" pitchFamily="34" charset="-120"/>
+              </a:rPr>
+              <a:t>問題設定：CFG は画像拡散の標準的な「温度を下げる」手法だが、なぜ画質が上がるのかは曖昧で、多様性の低下と切り離せなかった。</a:t>
+            </a:r>
+            <a:endParaRPr lang="en-US" sz="1200" dirty="0"/>
+          </a:p>
+          <a:p>
+            <a:pPr indent="0" marL="0">
+              <a:lnSpc>
+                <a:spcPts val="1900"/>
+              </a:lnSpc>
+              <a:buNone/>
+            </a:pPr>
+            <a:r>
+              <a:rPr lang="en-US" sz="1400" dirty="0">
+                <a:solidFill>
+                  <a:srgbClr val="1E2433"/>
+                </a:solidFill>
+                <a:latin typeface="Meiryo" pitchFamily="34" charset="0"/>
+                <a:ea typeface="Meiryo" pitchFamily="34" charset="-122"/>
+                <a:cs typeface="Meiryo" pitchFamily="34" charset="-120"/>
+              </a:rPr>
+              <a:t>分析：有限容量のモデルはスコアマッチングにより、学習の不十分な低確率領域まで分布を広げて外れ値を生む。無条件モデルは課題が難しく、さらに広がった密度を学ぶ。このため両者の密度比の勾配はデータ多様体の内側を指し、外れ値を引き戻す。これが CFG の画質向上の正体で、条件の強調とは別の効果だと示した。</a:t>
+            </a:r>
+            <a:endParaRPr lang="en-US" sz="1200" dirty="0"/>
+          </a:p>
+          <a:p>
+            <a:pPr indent="0" marL="0">
+              <a:lnSpc>
+                <a:spcPts val="1900"/>
+              </a:lnSpc>
+              <a:buNone/>
+            </a:pPr>
+            <a:r>
+              <a:rPr lang="en-US" sz="1400" dirty="0">
+                <a:solidFill>
+                  <a:srgbClr val="1E2433"/>
+                </a:solidFill>
+                <a:latin typeface="Meiryo" pitchFamily="34" charset="0"/>
+                <a:ea typeface="Meiryo" pitchFamily="34" charset="-122"/>
+                <a:cs typeface="Meiryo" pitchFamily="34" charset="-120"/>
+              </a:rPr>
+              <a:t>手法：同じ種類の誤差をより強く持つ劣化版（小容量・学習 1/16）で自分を誘導する。人工的な劣化（dropout と入力ノイズ）では、主モデルと誘導モデルの劣化の種類が一致するときだけ効くことを確かめた。</a:t>
+            </a:r>
+            <a:endParaRPr lang="en-US" sz="1200" dirty="0"/>
+          </a:p>
+          <a:p>
+            <a:pPr indent="0" marL="0">
+              <a:lnSpc>
+                <a:spcPts val="1900"/>
+              </a:lnSpc>
+              <a:buNone/>
+            </a:pPr>
+            <a:r>
+              <a:rPr lang="en-US" sz="1400" dirty="0">
+                <a:solidFill>
+                  <a:srgbClr val="1E2433"/>
+                </a:solidFill>
+                <a:latin typeface="Meiryo" pitchFamily="34" charset="0"/>
+                <a:ea typeface="Meiryo" pitchFamily="34" charset="-122"/>
+                <a:cs typeface="Meiryo" pitchFamily="34" charset="-120"/>
+              </a:rPr>
+              <a:t>結果：ImageNet の FID・FD_DINOv2 で記録を更新し、DeepFloyd IF でも画風や複雑さを保ったまま画質が上がった。</a:t>
+            </a:r>
+            <a:endParaRPr lang="en-US" sz="1200" dirty="0"/>
+          </a:p>
+          <a:p>
+            <a:pPr indent="0" marL="0">
+              <a:lnSpc>
+                <a:spcPts val="1900"/>
+              </a:lnSpc>
+              <a:buNone/>
+            </a:pPr>
+            <a:r>
+              <a:rPr lang="en-US" sz="1400" dirty="0">
+                <a:solidFill>
+                  <a:srgbClr val="1E2433"/>
+                </a:solidFill>
+                <a:latin typeface="Meiryo" pitchFamily="34" charset="0"/>
+                <a:ea typeface="Meiryo" pitchFamily="34" charset="-122"/>
+                <a:cs typeface="Meiryo" pitchFamily="34" charset="-120"/>
+              </a:rPr>
+              <a:t>限界：別モデルの学習が必要。</a:t>
+            </a:r>
+            <a:endParaRPr lang="en-US" sz="1200" dirty="0"/>
+          </a:p>
+        </p:txBody>
+      </p:sp>
+      <p:sp>
+        <p:nvSpPr>
+          <p:cNvPr id="6" name="Text 4"/>
+          <p:cNvSpPr/>
+          <p:nvPr>
+            <p:ph idx="105" type="body" hasCustomPrompt="1"/>
+          </p:nvPr>
+        </p:nvSpPr>
+        <p:spPr>
+          <a:xfrm>
+            <a:off x="8531352" y="1984248"/>
+            <a:ext cx="3038551" cy="685800"/>
+          </a:xfrm>
+          <a:prstGeom prst="rect">
+            <a:avLst/>
+          </a:prstGeom>
+          <a:noFill/>
+          <a:ln/>
+        </p:spPr>
+        <p:txBody>
+          <a:bodyPr wrap="square" lIns="0" tIns="0" rIns="0" bIns="0" rtlCol="0" anchor="t"/>
+          <a:lstStyle/>
+          <a:p>
+            <a:pPr indent="0" marL="0">
+              <a:lnSpc>
+                <a:spcPts val="1750"/>
+              </a:lnSpc>
+              <a:buNone/>
+            </a:pPr>
+            <a:r>
+              <a:rPr lang="en-US" sz="1300" dirty="0">
+                <a:solidFill>
+                  <a:srgbClr val="1E2433"/>
+                </a:solidFill>
+                <a:latin typeface="Meiryo" pitchFamily="34" charset="0"/>
+                <a:ea typeface="Meiryo" pitchFamily="34" charset="-122"/>
+                <a:cs typeface="Meiryo" pitchFamily="34" charset="-120"/>
+              </a:rPr>
+              <a:t>NeurIPS 2024 Best Paper Runner-up</a:t>
+            </a:r>
+            <a:endParaRPr lang="en-US" sz="1200" dirty="0"/>
+          </a:p>
+        </p:txBody>
+      </p:sp>
+      <p:sp>
+        <p:nvSpPr>
+          <p:cNvPr id="7" name="Text 6"/>
+          <p:cNvSpPr/>
+          <p:nvPr>
+            <p:ph idx="108" type="body" hasCustomPrompt="1"/>
+          </p:nvPr>
+        </p:nvSpPr>
+        <p:spPr>
+          <a:xfrm>
+            <a:off x="8531352" y="3355848"/>
+            <a:ext cx="3038551" cy="2880360"/>
+          </a:xfrm>
+          <a:prstGeom prst="rect">
+            <a:avLst/>
+          </a:prstGeom>
+          <a:noFill/>
+          <a:ln/>
+        </p:spPr>
+        <p:txBody>
+          <a:bodyPr wrap="square" lIns="0" tIns="0" rIns="0" bIns="0" rtlCol="0" anchor="t"/>
+          <a:lstStyle/>
+          <a:p>
+            <a:pPr indent="0" marL="0">
+              <a:lnSpc>
+                <a:spcPts val="1750"/>
+              </a:lnSpc>
+              <a:buNone/>
+            </a:pPr>
+            <a:r>
+              <a:rPr lang="en-US" sz="1300" dirty="0">
+                <a:solidFill>
+                  <a:srgbClr val="1E2433"/>
+                </a:solidFill>
+                <a:latin typeface="Meiryo" pitchFamily="34" charset="0"/>
+                <a:ea typeface="Meiryo" pitchFamily="34" charset="-122"/>
+                <a:cs typeface="Meiryo" pitchFamily="34" charset="-120"/>
+              </a:rPr>
+              <a:t>・CFG の画質向上の機構を、密度比という明快な描像で説明</a:t>
+            </a:r>
+            <a:endParaRPr lang="en-US" sz="1200" dirty="0"/>
+          </a:p>
+          <a:p>
+            <a:pPr indent="0" marL="0">
+              <a:lnSpc>
+                <a:spcPts val="1750"/>
+              </a:lnSpc>
+              <a:buNone/>
+            </a:pPr>
+            <a:r>
+              <a:rPr lang="en-US" sz="1300" dirty="0">
+                <a:solidFill>
+                  <a:srgbClr val="1E2433"/>
+                </a:solidFill>
+                <a:latin typeface="Meiryo" pitchFamily="34" charset="0"/>
+                <a:ea typeface="Meiryo" pitchFamily="34" charset="-122"/>
+                <a:cs typeface="Meiryo" pitchFamily="34" charset="-120"/>
+              </a:rPr>
+              <a:t>・画質と多様性を切り分け、無条件生成にも誘導を可能にした</a:t>
+            </a:r>
+            <a:endParaRPr lang="en-US" sz="1200" dirty="0"/>
+          </a:p>
+          <a:p>
+            <a:pPr indent="0" marL="0">
+              <a:lnSpc>
+                <a:spcPts val="1750"/>
+              </a:lnSpc>
+              <a:buNone/>
+            </a:pPr>
+            <a:r>
+              <a:rPr lang="en-US" sz="1300" dirty="0">
+                <a:solidFill>
+                  <a:srgbClr val="1E2433"/>
+                </a:solidFill>
+                <a:latin typeface="Meiryo" pitchFamily="34" charset="0"/>
+                <a:ea typeface="Meiryo" pitchFamily="34" charset="-122"/>
+                <a:cs typeface="Meiryo" pitchFamily="34" charset="-120"/>
+              </a:rPr>
+              <a:t>・わずかな追加学習で ImageNet の FID の記録を更新</a:t>
+            </a:r>
+            <a:endParaRPr lang="en-US" sz="1200" dirty="0"/>
+          </a:p>
+          <a:p>
+            <a:pPr indent="0" marL="0">
+              <a:lnSpc>
+                <a:spcPts val="1750"/>
+              </a:lnSpc>
+              <a:buNone/>
+            </a:pPr>
+            <a:r>
+              <a:rPr lang="en-US" sz="1300" dirty="0">
+                <a:solidFill>
+                  <a:srgbClr val="1E2433"/>
+                </a:solidFill>
+                <a:latin typeface="Meiryo" pitchFamily="34" charset="0"/>
+                <a:ea typeface="Meiryo" pitchFamily="34" charset="-122"/>
+                <a:cs typeface="Meiryo" pitchFamily="34" charset="-120"/>
+              </a:rPr>
+              <a:t>（調査者の見立て）</a:t>
+            </a:r>
+            <a:endParaRPr lang="en-US" sz="1200" dirty="0"/>
+          </a:p>
+        </p:txBody>
+      </p:sp>
+      <p:sp>
+        <p:nvSpPr>
+          <p:cNvPr id="8" name="Text 6"/>
+          <p:cNvSpPr/>
+          <p:nvPr>
+            <p:ph idx="112" type="body" hasCustomPrompt="1"/>
+          </p:nvPr>
+        </p:nvSpPr>
+        <p:spPr>
+          <a:xfrm>
+            <a:off x="457200" y="6446520"/>
+            <a:ext cx="9144000" cy="274320"/>
+          </a:xfrm>
+          <a:prstGeom prst="rect">
+            <a:avLst/>
+          </a:prstGeom>
+          <a:noFill/>
+          <a:ln/>
+        </p:spPr>
+        <p:txBody>
+          <a:bodyPr wrap="square" lIns="0" tIns="0" rIns="0" bIns="0" rtlCol="0" anchor="ctr"/>
+          <a:lstStyle/>
+          <a:p>
+            <a:pPr indent="0" marL="0">
+              <a:buNone/>
+            </a:pPr>
+            <a:r>
+              <a:rPr lang="en-US" sz="1000" dirty="0">
+                <a:solidFill>
+                  <a:srgbClr val="5B6478"/>
+                </a:solidFill>
+                <a:latin typeface="Meiryo" pitchFamily="34" charset="0"/>
+                <a:ea typeface="Meiryo" pitchFamily="34" charset="-122"/>
+                <a:cs typeface="Meiryo" pitchFamily="34" charset="-120"/>
+              </a:rPr>
+              <a:t>Research Survey ｜ 学会調査 › NeurIPS：受賞・注目論文</a:t>
+            </a:r>
+            <a:endParaRPr lang="en-US" sz="1000" dirty="0"/>
+          </a:p>
+        </p:txBody>
+      </p:sp>
+      <p:sp>
+        <p:nvSpPr>
+          <p:cNvPr id="25" name="Slide Number Placeholder 0"/>
+          <p:cNvSpPr>
+            <a:spLocks noGrp="1"/>
+          </p:cNvSpPr>
+          <p:nvPr>
+            <p:ph type="sldNum" sz="quarter" idx="4294967295"/>
+          </p:nvPr>
+        </p:nvSpPr>
+        <p:spPr>
+          <a:xfrm>
+            <a:off x="11185855" y="6446520"/>
+            <a:ext cx="548640" cy="274320"/>
+          </a:xfrm>
+          <a:prstGeom prst="rect">
+            <a:avLst/>
+          </a:prstGeom>
+          <a:extLst>
+            <a:ext uri="{C572A759-6A51-4108-AA02-DFA0A04FC94B}">
+              <ma14:wrappingTextBoxFlag xmlns:ma14="http://schemas.microsoft.com/office/mac/drawingml/2011/main" val="0"/>
+            </a:ext>
+          </a:extLst>
+        </p:spPr>
+        <p:txBody>
+          <a:bodyPr/>
+          <a:lstStyle>
+            <a:lvl1pPr>
+              <a:defRPr sz="1000">
+                <a:solidFill>
+                  <a:srgbClr val="5B6478"/>
+                </a:solidFill>
+                <a:latin typeface="Meiryo"/>
+                <a:ea typeface="Meiryo"/>
+                <a:cs typeface="Meiryo"/>
+              </a:defRPr>
+            </a:lvl1pPr>
+          </a:lstStyle>
+          <a:p>
+            <a:pPr algn="r"/>
+            <a:fld id="{F7021451-1387-4CA6-816F-3879F97B5CBC}" type="slidenum">
+              <a:rPr b="0" lang="en-US"/>
+              <a:t>31</a:t>
+            </a:fld>
+            <a:endParaRPr lang="en-US"/>
+          </a:p>
+        </p:txBody>
+      </p:sp>
+    </p:spTree>
+  </p:cSld>
+  <p:clrMapOvr>
+    <a:masterClrMapping/>
+  </p:clrMapOvr>
+</p:sld>
+</file>
+
+<file path=ppt/slides/slide32.xml><?xml version="1.0" encoding="utf-8"?>
+<p:sld xmlns:a="http://schemas.openxmlformats.org/drawingml/2006/main" xmlns:r="http://schemas.openxmlformats.org/officeDocument/2006/relationships" xmlns:p="http://schemas.openxmlformats.org/presentationml/2006/main">
+  <p:cSld name="Slide 32">
+    <p:spTree>
+      <p:nvGrpSpPr>
+        <p:cNvPr id="1" name=""/>
+        <p:cNvGrpSpPr/>
+        <p:nvPr/>
+      </p:nvGrpSpPr>
+      <p:grpSpPr>
+        <a:xfrm>
+          <a:off x="0" y="0"/>
+          <a:ext cx="0" cy="0"/>
+          <a:chOff x="0" y="0"/>
+          <a:chExt cx="0" cy="0"/>
+        </a:xfrm>
+      </p:grpSpPr>
+      <p:sp>
+        <p:nvSpPr>
+          <p:cNvPr id="2" name="Text 20"/>
+          <p:cNvSpPr/>
+          <p:nvPr>
+            <p:ph idx="126" type="body" hasCustomPrompt="1"/>
+          </p:nvPr>
+        </p:nvSpPr>
+        <p:spPr>
+          <a:xfrm>
+            <a:off x="457200" y="274320"/>
+            <a:ext cx="11277295" cy="256032"/>
+          </a:xfrm>
+          <a:prstGeom prst="rect">
+            <a:avLst/>
+          </a:prstGeom>
+          <a:noFill/>
+          <a:ln/>
+        </p:spPr>
+        <p:txBody>
+          <a:bodyPr wrap="square" lIns="0" tIns="0" rIns="0" bIns="0" rtlCol="0" anchor="ctr"/>
+          <a:lstStyle/>
+          <a:p>
+            <a:pPr indent="0" marL="0">
+              <a:buNone/>
+            </a:pPr>
+            <a:r>
+              <a:rPr lang="en-US" sz="1100" b="1" dirty="0">
+                <a:solidFill>
+                  <a:srgbClr val="1F6F78"/>
+                </a:solidFill>
+                <a:latin typeface="Meiryo" pitchFamily="34" charset="0"/>
+                <a:ea typeface="Meiryo" pitchFamily="34" charset="-122"/>
+                <a:cs typeface="Meiryo" pitchFamily="34" charset="-120"/>
+              </a:rPr>
+              <a:t>学会調査 › NeurIPS：受賞・注目論文 ｜ NeurIPS 2024 Best Paper Runner-up</a:t>
+            </a:r>
+            <a:endParaRPr lang="en-US" sz="1100" dirty="0"/>
+          </a:p>
+        </p:txBody>
+      </p:sp>
+      <p:sp>
+        <p:nvSpPr>
+          <p:cNvPr id="3" name="Text 20"/>
+          <p:cNvSpPr/>
+          <p:nvPr>
+            <p:ph idx="127" type="body" hasCustomPrompt="1"/>
+          </p:nvPr>
+        </p:nvSpPr>
+        <p:spPr>
+          <a:xfrm>
+            <a:off x="457200" y="530352"/>
+            <a:ext cx="11277295" cy="566928"/>
+          </a:xfrm>
+          <a:prstGeom prst="rect">
+            <a:avLst/>
+          </a:prstGeom>
+          <a:noFill/>
+          <a:ln/>
+        </p:spPr>
+        <p:txBody>
+          <a:bodyPr wrap="square" lIns="0" tIns="0" rIns="0" bIns="0" rtlCol="0" anchor="ctr"/>
+          <a:lstStyle/>
+          <a:p>
+            <a:pPr indent="0" marL="0">
+              <a:lnSpc>
+                <a:spcPts val="3250"/>
+              </a:lnSpc>
+              <a:buNone/>
+            </a:pPr>
+            <a:r>
+              <a:rPr lang="en-US" sz="2400" b="1" dirty="0">
+                <a:solidFill>
+                  <a:srgbClr val="1E2433"/>
+                </a:solidFill>
+                <a:latin typeface="Meiryo" pitchFamily="34" charset="0"/>
+                <a:ea typeface="Meiryo" pitchFamily="34" charset="-122"/>
+                <a:cs typeface="Meiryo" pitchFamily="34" charset="-120"/>
+              </a:rPr>
+              <a:t>Not All Tokens Are What You Need for Pretraining</a:t>
+            </a:r>
+            <a:endParaRPr lang="en-US" sz="2400" dirty="0"/>
+          </a:p>
+        </p:txBody>
+      </p:sp>
+      <p:sp>
+        <p:nvSpPr>
+          <p:cNvPr id="4" name="Text 20"/>
+          <p:cNvSpPr/>
+          <p:nvPr>
+            <p:ph idx="128" type="body" hasCustomPrompt="1"/>
+          </p:nvPr>
+        </p:nvSpPr>
+        <p:spPr>
+          <a:xfrm>
+            <a:off x="457200" y="1115568"/>
+            <a:ext cx="11277295" cy="274320"/>
+          </a:xfrm>
+          <a:prstGeom prst="rect">
+            <a:avLst/>
+          </a:prstGeom>
+          <a:noFill/>
+          <a:ln/>
+        </p:spPr>
+        <p:txBody>
+          <a:bodyPr wrap="square" lIns="0" tIns="0" rIns="0" bIns="0" rtlCol="0" anchor="ctr"/>
+          <a:lstStyle/>
+          <a:p>
+            <a:pPr indent="0" marL="0">
+              <a:buNone/>
+            </a:pPr>
+            <a:r>
+              <a:rPr lang="en-US" sz="1200" dirty="0">
+                <a:solidFill>
+                  <a:srgbClr val="5B6478"/>
+                </a:solidFill>
+                <a:latin typeface="Meiryo" pitchFamily="34" charset="0"/>
+                <a:ea typeface="Meiryo" pitchFamily="34" charset="-122"/>
+                <a:cs typeface="Meiryo" pitchFamily="34" charset="-120"/>
+              </a:rPr>
+              <a:t>Zhenghao Lin, Zhibin Gou, Yeyun Gong, Xiao Liu ほか（厦門大学・清華大学・Microsoft）｜ NeurIPS 2024</a:t>
+            </a:r>
+            <a:endParaRPr lang="en-US" sz="1200" dirty="0"/>
+          </a:p>
+        </p:txBody>
+      </p:sp>
+      <p:sp>
+        <p:nvSpPr>
+          <p:cNvPr id="5" name="Text 20"/>
+          <p:cNvSpPr/>
+          <p:nvPr>
+            <p:ph idx="120" type="body" hasCustomPrompt="1"/>
+          </p:nvPr>
+        </p:nvSpPr>
+        <p:spPr>
+          <a:xfrm>
+            <a:off x="621792" y="1984248"/>
+            <a:ext cx="3465576" cy="960120"/>
+          </a:xfrm>
+          <a:prstGeom prst="rect">
+            <a:avLst/>
+          </a:prstGeom>
+          <a:noFill/>
+          <a:ln/>
+        </p:spPr>
+        <p:txBody>
+          <a:bodyPr wrap="square" lIns="0" tIns="0" rIns="0" bIns="0" rtlCol="0" anchor="t"/>
+          <a:lstStyle/>
+          <a:p>
+            <a:pPr indent="0" marL="0">
+              <a:lnSpc>
+                <a:spcPts val="1350"/>
+              </a:lnSpc>
+              <a:buNone/>
+            </a:pPr>
+            <a:r>
+              <a:rPr lang="en-US" sz="1000" dirty="0">
+                <a:solidFill>
+                  <a:srgbClr val="1E2433"/>
+                </a:solidFill>
+                <a:latin typeface="Meiryo" pitchFamily="34" charset="0"/>
+                <a:ea typeface="Meiryo" pitchFamily="34" charset="-122"/>
+                <a:cs typeface="Meiryo" pitchFamily="34" charset="-120"/>
+              </a:rPr>
+              <a:t>事前学習で全トークンに一律の次トークン損失をかける慣行を見直し、参照モデルとの「超過損失」が大きいトークンだけを学ぶ Selective Language Modeling（SLM）を提案。数学の継続事前学習で few-shot 精度を最大30%改善した。</a:t>
+            </a:r>
+            <a:endParaRPr lang="en-US" sz="1200" dirty="0"/>
+          </a:p>
+        </p:txBody>
+      </p:sp>
+      <p:sp>
+        <p:nvSpPr>
+          <p:cNvPr id="6" name="Text 20"/>
+          <p:cNvSpPr/>
+          <p:nvPr>
+            <p:ph idx="121" type="body" hasCustomPrompt="1"/>
+          </p:nvPr>
+        </p:nvSpPr>
+        <p:spPr>
+          <a:xfrm>
+            <a:off x="4553712" y="1984248"/>
+            <a:ext cx="3465576" cy="960120"/>
+          </a:xfrm>
+          <a:prstGeom prst="rect">
+            <a:avLst/>
+          </a:prstGeom>
+          <a:noFill/>
+          <a:ln/>
+        </p:spPr>
+        <p:txBody>
+          <a:bodyPr wrap="square" lIns="0" tIns="0" rIns="0" bIns="0" rtlCol="0" anchor="t"/>
+          <a:lstStyle/>
+          <a:p>
+            <a:pPr indent="0" marL="0">
+              <a:lnSpc>
+                <a:spcPts val="1350"/>
+              </a:lnSpc>
+              <a:buNone/>
+            </a:pPr>
+            <a:r>
+              <a:rPr lang="en-US" sz="1000" dirty="0">
+                <a:solidFill>
+                  <a:srgbClr val="1E2433"/>
+                </a:solidFill>
+                <a:latin typeface="Meiryo" pitchFamily="34" charset="0"/>
+                <a:ea typeface="Meiryo" pitchFamily="34" charset="-122"/>
+                <a:cs typeface="Meiryo" pitchFamily="34" charset="-120"/>
+              </a:rPr>
+              <a:t>文書単位でフィルタしたコーパスにも、トークン単位の雑音（日時・ID 等）が残る。学習中のトークン損失を追うと、大きく下がるのは 26% だけで、51% は学習済み、11% は下がらない難トークンで、多くの勾配更新が無駄になっていた。</a:t>
+            </a:r>
+            <a:endParaRPr lang="en-US" sz="1200" dirty="0"/>
+          </a:p>
+        </p:txBody>
+      </p:sp>
+      <p:sp>
+        <p:nvSpPr>
+          <p:cNvPr id="7" name="Text 20"/>
+          <p:cNvSpPr/>
+          <p:nvPr>
+            <p:ph idx="122" type="body" hasCustomPrompt="1"/>
+          </p:nvPr>
+        </p:nvSpPr>
+        <p:spPr>
+          <a:xfrm>
+            <a:off x="621792" y="3630168"/>
+            <a:ext cx="3465576" cy="960120"/>
+          </a:xfrm>
+          <a:prstGeom prst="rect">
+            <a:avLst/>
+          </a:prstGeom>
+          <a:noFill/>
+          <a:ln/>
+        </p:spPr>
+        <p:txBody>
+          <a:bodyPr wrap="square" lIns="0" tIns="0" rIns="0" bIns="0" rtlCol="0" anchor="t"/>
+          <a:lstStyle/>
+          <a:p>
+            <a:pPr indent="0" marL="0">
+              <a:lnSpc>
+                <a:spcPts val="1350"/>
+              </a:lnSpc>
+              <a:buNone/>
+            </a:pPr>
+            <a:r>
+              <a:rPr lang="en-US" sz="1000" dirty="0">
+                <a:solidFill>
+                  <a:srgbClr val="1E2433"/>
+                </a:solidFill>
+                <a:latin typeface="Meiryo" pitchFamily="34" charset="0"/>
+                <a:ea typeface="Meiryo" pitchFamily="34" charset="-122"/>
+                <a:cs typeface="Meiryo" pitchFamily="34" charset="-120"/>
+              </a:rPr>
+              <a:t>①高品質データ（数学 0.5B、一般 1.9B トークン）で参照モデルを学習 ②コーパスの各トークンの参照損失を計算 ③学習中モデルの損失との差（超過損失）が上位 k%（1B で 60%、7B で 70%）のトークンにだけ損失をかける。</a:t>
+            </a:r>
+            <a:endParaRPr lang="en-US" sz="1200" dirty="0"/>
+          </a:p>
+        </p:txBody>
+      </p:sp>
+      <p:sp>
+        <p:nvSpPr>
+          <p:cNvPr id="8" name="Text 20"/>
+          <p:cNvSpPr/>
+          <p:nvPr>
+            <p:ph idx="123" type="body" hasCustomPrompt="1"/>
+          </p:nvPr>
+        </p:nvSpPr>
+        <p:spPr>
+          <a:xfrm>
+            <a:off x="4553712" y="3630168"/>
+            <a:ext cx="3465576" cy="960120"/>
+          </a:xfrm>
+          <a:prstGeom prst="rect">
+            <a:avLst/>
+          </a:prstGeom>
+          <a:noFill/>
+          <a:ln/>
+        </p:spPr>
+        <p:txBody>
+          <a:bodyPr wrap="square" lIns="0" tIns="0" rIns="0" bIns="0" rtlCol="0" anchor="t"/>
+          <a:lstStyle/>
+          <a:p>
+            <a:pPr indent="0" marL="0">
+              <a:lnSpc>
+                <a:spcPts val="1200"/>
+              </a:lnSpc>
+              <a:buNone/>
+            </a:pPr>
+            <a:r>
+              <a:rPr lang="en-US" sz="900" dirty="0">
+                <a:solidFill>
+                  <a:srgbClr val="1E2433"/>
+                </a:solidFill>
+                <a:latin typeface="Meiryo" pitchFamily="34" charset="0"/>
+                <a:ea typeface="Meiryo" pitchFamily="34" charset="-122"/>
+                <a:cs typeface="Meiryo" pitchFamily="34" charset="-120"/>
+              </a:rPr>
+              <a:t>OpenWebMath 15B トークンの継続学習で、平均 few-shot が 1B で +16.5%、7B で +10.4%（Table 1）。Rho-1-7B は 15B トークンで、500B を使う DeepSeekMath-7B に匹敵。微調整後の MATH は 40.6%（1B）・51.8%（7B）（Table 2）。一般 80B でも 15 課題平均 +6.8%（Fig. 5）。</a:t>
+            </a:r>
+            <a:endParaRPr lang="en-US" sz="1200" dirty="0"/>
+          </a:p>
+        </p:txBody>
+      </p:sp>
+      <p:sp>
+        <p:nvSpPr>
+          <p:cNvPr id="9" name="Text 20"/>
+          <p:cNvSpPr/>
+          <p:nvPr>
+            <p:ph idx="124" type="body" hasCustomPrompt="1"/>
+          </p:nvPr>
+        </p:nvSpPr>
+        <p:spPr>
+          <a:xfrm>
+            <a:off x="621792" y="5276088"/>
+            <a:ext cx="3465576" cy="960120"/>
+          </a:xfrm>
+          <a:prstGeom prst="rect">
+            <a:avLst/>
+          </a:prstGeom>
+          <a:noFill/>
+          <a:ln/>
+        </p:spPr>
+        <p:txBody>
+          <a:bodyPr wrap="square" lIns="0" tIns="0" rIns="0" bIns="0" rtlCol="0" anchor="t"/>
+          <a:lstStyle/>
+          <a:p>
+            <a:pPr indent="0" marL="0">
+              <a:lnSpc>
+                <a:spcPts val="1350"/>
+              </a:lnSpc>
+              <a:buNone/>
+            </a:pPr>
+            <a:r>
+              <a:rPr lang="en-US" sz="1000" dirty="0">
+                <a:solidFill>
+                  <a:srgbClr val="1E2433"/>
+                </a:solidFill>
+                <a:latin typeface="Meiryo" pitchFamily="34" charset="0"/>
+                <a:ea typeface="Meiryo" pitchFamily="34" charset="-122"/>
+                <a:cs typeface="Meiryo" pitchFamily="34" charset="-120"/>
+              </a:rPr>
+              <a:t>著者：検証は 7B 以下・100B トークン未満に限られ、超大規模で効くかは未確認。選ばなかったトークンの損失は上がる。</a:t>
+            </a:r>
+            <a:endParaRPr lang="en-US" sz="1200" dirty="0"/>
+          </a:p>
+          <a:p>
+            <a:pPr indent="0" marL="0">
+              <a:lnSpc>
+                <a:spcPts val="1350"/>
+              </a:lnSpc>
+              <a:buNone/>
+            </a:pPr>
+            <a:r>
+              <a:rPr lang="en-US" sz="1000" dirty="0">
+                <a:solidFill>
+                  <a:srgbClr val="1E2433"/>
+                </a:solidFill>
+                <a:latin typeface="Meiryo" pitchFamily="34" charset="0"/>
+                <a:ea typeface="Meiryo" pitchFamily="34" charset="-122"/>
+                <a:cs typeface="Meiryo" pitchFamily="34" charset="-120"/>
+              </a:rPr>
+              <a:t>所感：データ選択を文書からトークンへと細かくした発想が明快で、実装も軽い。</a:t>
+            </a:r>
+            <a:endParaRPr lang="en-US" sz="1200" dirty="0"/>
+          </a:p>
+        </p:txBody>
+      </p:sp>
+      <p:sp>
+        <p:nvSpPr>
+          <p:cNvPr id="10" name="Text 20"/>
+          <p:cNvSpPr/>
+          <p:nvPr>
+            <p:ph idx="125" type="body" hasCustomPrompt="1"/>
+          </p:nvPr>
+        </p:nvSpPr>
+        <p:spPr>
+          <a:xfrm>
+            <a:off x="4553712" y="5276088"/>
+            <a:ext cx="3465576" cy="960120"/>
+          </a:xfrm>
+          <a:prstGeom prst="rect">
+            <a:avLst/>
+          </a:prstGeom>
+          <a:noFill/>
+          <a:ln/>
+        </p:spPr>
+        <p:txBody>
+          <a:bodyPr wrap="square" lIns="0" tIns="0" rIns="0" bIns="0" rtlCol="0" anchor="t"/>
+          <a:lstStyle/>
+          <a:p>
+            <a:pPr indent="0" marL="0">
+              <a:lnSpc>
+                <a:spcPts val="1600"/>
+              </a:lnSpc>
+              <a:buNone/>
+            </a:pPr>
+            <a:r>
+              <a:rPr lang="en-US" sz="1200" dirty="0">
+                <a:solidFill>
+                  <a:srgbClr val="1E2433"/>
+                </a:solidFill>
+                <a:latin typeface="Meiryo" pitchFamily="34" charset="0"/>
+                <a:ea typeface="Meiryo" pitchFamily="34" charset="-122"/>
+                <a:cs typeface="Meiryo" pitchFamily="34" charset="-120"/>
+              </a:rPr>
+              <a:t>・RHO-LOSS (Mindermann+ 2022)（未調査）</a:t>
+            </a:r>
+            <a:endParaRPr lang="en-US" sz="1200" dirty="0"/>
+          </a:p>
+          <a:p>
+            <a:pPr indent="0" marL="0">
+              <a:lnSpc>
+                <a:spcPts val="1600"/>
+              </a:lnSpc>
+              <a:buNone/>
+            </a:pPr>
+            <a:r>
+              <a:rPr lang="en-US" sz="1200" dirty="0">
+                <a:solidFill>
+                  <a:srgbClr val="1E2433"/>
+                </a:solidFill>
+                <a:latin typeface="Meiryo" pitchFamily="34" charset="0"/>
+                <a:ea typeface="Meiryo" pitchFamily="34" charset="-122"/>
+                <a:cs typeface="Meiryo" pitchFamily="34" charset="-120"/>
+              </a:rPr>
+              <a:t>・DeepSeekMath (Shao+ 2024)（未調査）</a:t>
+            </a:r>
+            <a:endParaRPr lang="en-US" sz="1200" dirty="0"/>
+          </a:p>
+          <a:p>
+            <a:pPr indent="0" marL="0">
+              <a:lnSpc>
+                <a:spcPts val="1600"/>
+              </a:lnSpc>
+              <a:buNone/>
+            </a:pPr>
+            <a:r>
+              <a:rPr lang="en-US" sz="1200" dirty="0">
+                <a:solidFill>
+                  <a:srgbClr val="1E2433"/>
+                </a:solidFill>
+                <a:latin typeface="Meiryo" pitchFamily="34" charset="0"/>
+                <a:ea typeface="Meiryo" pitchFamily="34" charset="-122"/>
+                <a:cs typeface="Meiryo" pitchFamily="34" charset="-120"/>
+              </a:rPr>
+              <a:t>・DoReMi (Xie+ 2023)（未調査）</a:t>
+            </a:r>
+            <a:endParaRPr lang="en-US" sz="1200" dirty="0"/>
+          </a:p>
+        </p:txBody>
+      </p:sp>
+      <p:sp>
+        <p:nvSpPr>
+          <p:cNvPr id="11" name="Text 20"/>
+          <p:cNvSpPr/>
+          <p:nvPr>
+            <p:ph idx="129" type="body" hasCustomPrompt="1"/>
+          </p:nvPr>
+        </p:nvSpPr>
+        <p:spPr>
+          <a:xfrm>
+            <a:off x="8503920" y="4828032"/>
+            <a:ext cx="3093415" cy="1408176"/>
+          </a:xfrm>
+          <a:prstGeom prst="rect">
+            <a:avLst/>
+          </a:prstGeom>
+          <a:noFill/>
+          <a:ln/>
+        </p:spPr>
+        <p:txBody>
+          <a:bodyPr wrap="square" lIns="0" tIns="0" rIns="0" bIns="0" rtlCol="0" anchor="t"/>
+          <a:lstStyle/>
+          <a:p>
+            <a:pPr indent="0" marL="0">
+              <a:lnSpc>
+                <a:spcPts val="1350"/>
+              </a:lnSpc>
+              <a:buNone/>
+            </a:pPr>
+            <a:r>
+              <a:rPr lang="en-US" sz="1000" b="1" dirty="0">
+                <a:solidFill>
+                  <a:srgbClr val="1E2433"/>
+                </a:solidFill>
+                <a:latin typeface="Meiryo" pitchFamily="34" charset="0"/>
+                <a:ea typeface="Meiryo" pitchFamily="34" charset="-122"/>
+                <a:cs typeface="Meiryo" pitchFamily="34" charset="-120"/>
+              </a:rPr>
+              <a:t>発表：</a:t>
+            </a:r>
+            <a:pPr indent="0" marL="0">
+              <a:lnSpc>
+                <a:spcPts val="1350"/>
+              </a:lnSpc>
+              <a:buNone/>
+            </a:pPr>
+            <a:r>
+              <a:rPr lang="en-US" sz="1000" dirty="0">
+                <a:solidFill>
+                  <a:srgbClr val="1E2433"/>
+                </a:solidFill>
+                <a:latin typeface="Meiryo" pitchFamily="34" charset="0"/>
+                <a:ea typeface="Meiryo" pitchFamily="34" charset="-122"/>
+                <a:cs typeface="Meiryo" pitchFamily="34" charset="-120"/>
+              </a:rPr>
+              <a:t>NeurIPS 2024</a:t>
+            </a:r>
+            <a:endParaRPr lang="en-US" sz="1050" dirty="0"/>
+          </a:p>
+          <a:p>
+            <a:pPr indent="0" marL="0">
+              <a:lnSpc>
+                <a:spcPts val="1350"/>
+              </a:lnSpc>
+              <a:buNone/>
+            </a:pPr>
+            <a:r>
+              <a:rPr lang="en-US" sz="1000" b="1" dirty="0">
+                <a:solidFill>
+                  <a:srgbClr val="1E2433"/>
+                </a:solidFill>
+                <a:latin typeface="Meiryo" pitchFamily="34" charset="0"/>
+                <a:ea typeface="Meiryo" pitchFamily="34" charset="-122"/>
+                <a:cs typeface="Meiryo" pitchFamily="34" charset="-120"/>
+              </a:rPr>
+              <a:t>リンク：</a:t>
+            </a:r>
+            <a:pPr indent="0" marL="0">
+              <a:lnSpc>
+                <a:spcPts val="1350"/>
+              </a:lnSpc>
+              <a:buNone/>
+            </a:pPr>
+            <a:r>
+              <a:rPr lang="en-US" sz="1000" u="sng" dirty="0">
+                <a:solidFill>
+                  <a:srgbClr val="1E2433"/>
+                </a:solidFill>
+                <a:latin typeface="Meiryo" pitchFamily="34" charset="0"/>
+                <a:ea typeface="Meiryo" pitchFamily="34" charset="-122"/>
+                <a:cs typeface="Meiryo" pitchFamily="34" charset="-120"/>
+                <a:hlinkClick r:id="rId1" invalidUrl="" action="" tgtFrame="" tooltip="" history="1" highlightClick="0" endSnd="0">
+                  <a:extLst>
+                    <a:ext uri="{A12FA001-AC4F-418D-AE19-62706E023703}">
+                      <ahyp:hlinkClr xmlns:ahyp="http://schemas.microsoft.com/office/drawing/2018/hyperlinkcolor" val="tx"/>
+                    </a:ext>
+                  </a:extLst>
+                </a:hlinkClick>
+              </a:rPr>
+              <a:t>https://arxiv.org/abs/2404.07965</a:t>
+            </a:r>
+            <a:endParaRPr lang="en-US" sz="1050" dirty="0"/>
+          </a:p>
+          <a:p>
+            <a:pPr indent="0" marL="0">
+              <a:lnSpc>
+                <a:spcPts val="1350"/>
+              </a:lnSpc>
+              <a:buNone/>
+            </a:pPr>
+            <a:r>
+              <a:rPr lang="en-US" sz="1000" b="1" dirty="0">
+                <a:solidFill>
+                  <a:srgbClr val="1E2433"/>
+                </a:solidFill>
+                <a:latin typeface="Meiryo" pitchFamily="34" charset="0"/>
+                <a:ea typeface="Meiryo" pitchFamily="34" charset="-122"/>
+                <a:cs typeface="Meiryo" pitchFamily="34" charset="-120"/>
+              </a:rPr>
+              <a:t>受賞：</a:t>
+            </a:r>
+            <a:pPr indent="0" marL="0">
+              <a:lnSpc>
+                <a:spcPts val="1350"/>
+              </a:lnSpc>
+              <a:buNone/>
+            </a:pPr>
+            <a:r>
+              <a:rPr lang="en-US" sz="1000" dirty="0">
+                <a:solidFill>
+                  <a:srgbClr val="1E2433"/>
+                </a:solidFill>
+                <a:latin typeface="Meiryo" pitchFamily="34" charset="0"/>
+                <a:ea typeface="Meiryo" pitchFamily="34" charset="-122"/>
+                <a:cs typeface="Meiryo" pitchFamily="34" charset="-120"/>
+              </a:rPr>
+              <a:t>NeurIPS 2024 Best Paper Runner-up</a:t>
+            </a:r>
+            <a:endParaRPr lang="en-US" sz="1050" dirty="0"/>
+          </a:p>
+          <a:p>
+            <a:pPr indent="0" marL="0">
+              <a:lnSpc>
+                <a:spcPts val="1350"/>
+              </a:lnSpc>
+              <a:buNone/>
+            </a:pPr>
+            <a:r>
+              <a:rPr lang="en-US" sz="1000" b="1" dirty="0">
+                <a:solidFill>
+                  <a:srgbClr val="1E2433"/>
+                </a:solidFill>
+                <a:latin typeface="Meiryo" pitchFamily="34" charset="0"/>
+                <a:ea typeface="Meiryo" pitchFamily="34" charset="-122"/>
+                <a:cs typeface="Meiryo" pitchFamily="34" charset="-120"/>
+              </a:rPr>
+              <a:t>調査日：</a:t>
+            </a:r>
+            <a:pPr indent="0" marL="0">
+              <a:lnSpc>
+                <a:spcPts val="1350"/>
+              </a:lnSpc>
+              <a:buNone/>
+            </a:pPr>
+            <a:r>
+              <a:rPr lang="en-US" sz="1000" dirty="0">
+                <a:solidFill>
+                  <a:srgbClr val="1E2433"/>
+                </a:solidFill>
+                <a:latin typeface="Meiryo" pitchFamily="34" charset="0"/>
+                <a:ea typeface="Meiryo" pitchFamily="34" charset="-122"/>
+                <a:cs typeface="Meiryo" pitchFamily="34" charset="-120"/>
+              </a:rPr>
+              <a:t>2026-10-28</a:t>
+            </a:r>
+            <a:endParaRPr lang="en-US" sz="1050" dirty="0"/>
+          </a:p>
+          <a:p>
+            <a:pPr indent="0" marL="0">
+              <a:lnSpc>
+                <a:spcPts val="1350"/>
+              </a:lnSpc>
+              <a:buNone/>
+            </a:pPr>
+            <a:r>
+              <a:rPr lang="en-US" sz="1000" b="1" dirty="0">
+                <a:solidFill>
+                  <a:srgbClr val="1E2433"/>
+                </a:solidFill>
+                <a:latin typeface="Meiryo" pitchFamily="34" charset="0"/>
+                <a:ea typeface="Meiryo" pitchFamily="34" charset="-122"/>
+                <a:cs typeface="Meiryo" pitchFamily="34" charset="-120"/>
+              </a:rPr>
+              <a:t>確認範囲：</a:t>
+            </a:r>
+            <a:pPr indent="0" marL="0">
+              <a:lnSpc>
+                <a:spcPts val="1350"/>
+              </a:lnSpc>
+              <a:buNone/>
+            </a:pPr>
+            <a:r>
+              <a:rPr lang="en-US" sz="1000" dirty="0">
+                <a:solidFill>
+                  <a:srgbClr val="1E2433"/>
+                </a:solidFill>
+                <a:latin typeface="Meiryo" pitchFamily="34" charset="0"/>
+                <a:ea typeface="Meiryo" pitchFamily="34" charset="-122"/>
+                <a:cs typeface="Meiryo" pitchFamily="34" charset="-120"/>
+              </a:rPr>
+              <a:t>全文（問題提起・手法・実験・結果・考察）</a:t>
+            </a:r>
+            <a:endParaRPr lang="en-US" sz="1050" dirty="0"/>
+          </a:p>
+        </p:txBody>
+      </p:sp>
+      <p:sp>
+        <p:nvSpPr>
+          <p:cNvPr id="12" name="Text 20"/>
+          <p:cNvSpPr/>
+          <p:nvPr>
+            <p:ph idx="130" type="body" hasCustomPrompt="1"/>
+          </p:nvPr>
+        </p:nvSpPr>
+        <p:spPr>
+          <a:xfrm>
+            <a:off x="457200" y="6446520"/>
+            <a:ext cx="9144000" cy="274320"/>
+          </a:xfrm>
+          <a:prstGeom prst="rect">
+            <a:avLst/>
+          </a:prstGeom>
+          <a:noFill/>
+          <a:ln/>
+        </p:spPr>
+        <p:txBody>
+          <a:bodyPr wrap="square" lIns="0" tIns="0" rIns="0" bIns="0" rtlCol="0" anchor="ctr"/>
+          <a:lstStyle/>
+          <a:p>
+            <a:pPr indent="0" marL="0">
+              <a:buNone/>
+            </a:pPr>
+            <a:r>
+              <a:rPr lang="en-US" sz="1000" dirty="0">
+                <a:solidFill>
+                  <a:srgbClr val="5B6478"/>
+                </a:solidFill>
+                <a:latin typeface="Meiryo" pitchFamily="34" charset="0"/>
+                <a:ea typeface="Meiryo" pitchFamily="34" charset="-122"/>
+                <a:cs typeface="Meiryo" pitchFamily="34" charset="-120"/>
+              </a:rPr>
+              <a:t>Research Survey ｜ 学会調査 › NeurIPS：受賞・注目論文</a:t>
+            </a:r>
+            <a:endParaRPr lang="en-US" sz="1000" dirty="0"/>
+          </a:p>
+        </p:txBody>
+      </p:sp>
+      <p:pic>
+        <p:nvPicPr>
+          <p:cNvPr id="13" name="Image 0" descr="/tmp/claude-0/-home-user-researches/dc3d135a-4bab-5b84-bcb3-e0d06fe39570/scratchpad/stage/conferences/neurips/figures/rho1.png">    </p:cNvPr>
+          <p:cNvPicPr>
+            <a:picLocks noChangeAspect="1"/>
+          </p:cNvPicPr>
+          <p:nvPr/>
+        </p:nvPicPr>
+        <p:blipFill>
+          <a:blip r:embed="rId2"/>
+          <a:stretch>
+            <a:fillRect/>
+          </a:stretch>
+        </p:blipFill>
+        <p:spPr>
+          <a:xfrm>
+            <a:off x="8366760" y="2047689"/>
+            <a:ext cx="3367735" cy="1299582"/>
+          </a:xfrm>
+          <a:prstGeom prst="rect">
+            <a:avLst/>
+          </a:prstGeom>
+        </p:spPr>
+      </p:pic>
+      <p:sp>
+        <p:nvSpPr>
+          <p:cNvPr id="14" name="Text 11"/>
+          <p:cNvSpPr txBox="1"/>
+          <p:nvPr/>
+        </p:nvSpPr>
+        <p:spPr>
+          <a:xfrm>
+            <a:off x="8366760" y="3931920"/>
+            <a:ext cx="3367735" cy="320040"/>
+          </a:xfrm>
+          <a:prstGeom prst="rect">
+            <a:avLst/>
+          </a:prstGeom>
+          <a:noFill/>
+          <a:ln/>
+        </p:spPr>
+        <p:txBody>
+          <a:bodyPr wrap="square" lIns="0" tIns="0" rIns="0" bIns="0" rtlCol="0" anchor="t"/>
+          <a:lstStyle/>
+          <a:p>
+            <a:pPr indent="0" marL="0">
+              <a:buNone/>
+            </a:pPr>
+            <a:r>
+              <a:rPr lang="en-US" sz="950" dirty="0">
+                <a:solidFill>
+                  <a:srgbClr val="5B6478"/>
+                </a:solidFill>
+                <a:latin typeface="Meiryo" pitchFamily="34" charset="0"/>
+                <a:ea typeface="Meiryo" pitchFamily="34" charset="-122"/>
+                <a:cs typeface="Meiryo" pitchFamily="34" charset="-120"/>
+              </a:rPr>
+              <a:t>出典：Rho-1 (Lin+ 2024) Fig. 2（雑音を含むコーパスで、通常の CLM と、望ましいトークンにだけ損失をかける SLM の比較）</a:t>
+            </a:r>
+            <a:endParaRPr lang="en-US" sz="950" dirty="0"/>
+          </a:p>
+        </p:txBody>
+      </p:sp>
+      <p:sp>
+        <p:nvSpPr>
+          <p:cNvPr id="25" name="Slide Number Placeholder 0"/>
+          <p:cNvSpPr>
+            <a:spLocks noGrp="1"/>
+          </p:cNvSpPr>
+          <p:nvPr>
+            <p:ph type="sldNum" sz="quarter" idx="4294967295"/>
+          </p:nvPr>
+        </p:nvSpPr>
+        <p:spPr>
+          <a:xfrm>
+            <a:off x="11185855" y="6446520"/>
+            <a:ext cx="548640" cy="274320"/>
+          </a:xfrm>
+          <a:prstGeom prst="rect">
+            <a:avLst/>
+          </a:prstGeom>
+          <a:extLst>
+            <a:ext uri="{C572A759-6A51-4108-AA02-DFA0A04FC94B}">
+              <ma14:wrappingTextBoxFlag xmlns:ma14="http://schemas.microsoft.com/office/mac/drawingml/2011/main" val="0"/>
+            </a:ext>
+          </a:extLst>
+        </p:spPr>
+        <p:txBody>
+          <a:bodyPr/>
+          <a:lstStyle>
+            <a:lvl1pPr>
+              <a:defRPr sz="1000">
+                <a:solidFill>
+                  <a:srgbClr val="5B6478"/>
+                </a:solidFill>
+                <a:latin typeface="Meiryo"/>
+                <a:ea typeface="Meiryo"/>
+                <a:cs typeface="Meiryo"/>
+              </a:defRPr>
+            </a:lvl1pPr>
+          </a:lstStyle>
+          <a:p>
+            <a:pPr algn="r"/>
+            <a:fld id="{F7021451-1387-4CA6-816F-3879F97B5CBC}" type="slidenum">
+              <a:rPr b="0" lang="en-US"/>
+              <a:t>32</a:t>
+            </a:fld>
+            <a:endParaRPr lang="en-US"/>
+          </a:p>
+        </p:txBody>
+      </p:sp>
+    </p:spTree>
+  </p:cSld>
+  <p:clrMapOvr>
+    <a:masterClrMapping/>
+  </p:clrMapOvr>
+</p:sld>
+</file>
+
+<file path=ppt/slides/slide33.xml><?xml version="1.0" encoding="utf-8"?>
+<p:sld xmlns:a="http://schemas.openxmlformats.org/drawingml/2006/main" xmlns:r="http://schemas.openxmlformats.org/officeDocument/2006/relationships" xmlns:p="http://schemas.openxmlformats.org/presentationml/2006/main">
+  <p:cSld name="Slide 33">
+    <p:spTree>
+      <p:nvGrpSpPr>
+        <p:cNvPr id="1" name=""/>
+        <p:cNvGrpSpPr/>
+        <p:nvPr/>
+      </p:nvGrpSpPr>
+      <p:grpSpPr>
+        <a:xfrm>
+          <a:off x="0" y="0"/>
+          <a:ext cx="0" cy="0"/>
+          <a:chOff x="0" y="0"/>
+          <a:chExt cx="0" cy="0"/>
+        </a:xfrm>
+      </p:grpSpPr>
+      <p:sp>
+        <p:nvSpPr>
+          <p:cNvPr id="2" name="Text 6"/>
+          <p:cNvSpPr/>
+          <p:nvPr>
+            <p:ph idx="109" type="body" hasCustomPrompt="1"/>
+          </p:nvPr>
+        </p:nvSpPr>
+        <p:spPr>
+          <a:xfrm>
+            <a:off x="457200" y="274320"/>
+            <a:ext cx="11277295" cy="256032"/>
+          </a:xfrm>
+          <a:prstGeom prst="rect">
+            <a:avLst/>
+          </a:prstGeom>
+          <a:noFill/>
+          <a:ln/>
+        </p:spPr>
+        <p:txBody>
+          <a:bodyPr wrap="square" lIns="0" tIns="0" rIns="0" bIns="0" rtlCol="0" anchor="ctr"/>
+          <a:lstStyle/>
+          <a:p>
+            <a:pPr indent="0" marL="0">
+              <a:buNone/>
+            </a:pPr>
+            <a:r>
+              <a:rPr lang="en-US" sz="1100" b="1" dirty="0">
+                <a:solidFill>
+                  <a:srgbClr val="1F6F78"/>
+                </a:solidFill>
+                <a:latin typeface="Meiryo" pitchFamily="34" charset="0"/>
+                <a:ea typeface="Meiryo" pitchFamily="34" charset="-122"/>
+                <a:cs typeface="Meiryo" pitchFamily="34" charset="-120"/>
+              </a:rPr>
+              <a:t>学会調査 › NeurIPS：受賞・注目論文 ｜ NeurIPS 2024 Best Paper Runner-up ｜ 詳細・評価ポイント</a:t>
+            </a:r>
+            <a:endParaRPr lang="en-US" sz="1100" dirty="0"/>
+          </a:p>
+        </p:txBody>
+      </p:sp>
+      <p:sp>
+        <p:nvSpPr>
+          <p:cNvPr id="3" name="Text 6"/>
+          <p:cNvSpPr/>
+          <p:nvPr>
+            <p:ph idx="110" type="body" hasCustomPrompt="1"/>
+          </p:nvPr>
+        </p:nvSpPr>
+        <p:spPr>
+          <a:xfrm>
+            <a:off x="457200" y="530352"/>
+            <a:ext cx="11277295" cy="566928"/>
+          </a:xfrm>
+          <a:prstGeom prst="rect">
+            <a:avLst/>
+          </a:prstGeom>
+          <a:noFill/>
+          <a:ln/>
+        </p:spPr>
+        <p:txBody>
+          <a:bodyPr wrap="square" lIns="0" tIns="0" rIns="0" bIns="0" rtlCol="0" anchor="ctr"/>
+          <a:lstStyle/>
+          <a:p>
+            <a:pPr indent="0" marL="0">
+              <a:lnSpc>
+                <a:spcPts val="3250"/>
+              </a:lnSpc>
+              <a:buNone/>
+            </a:pPr>
+            <a:r>
+              <a:rPr lang="en-US" sz="2400" b="1" dirty="0">
+                <a:solidFill>
+                  <a:srgbClr val="1E2433"/>
+                </a:solidFill>
+                <a:latin typeface="Meiryo" pitchFamily="34" charset="0"/>
+                <a:ea typeface="Meiryo" pitchFamily="34" charset="-122"/>
+                <a:cs typeface="Meiryo" pitchFamily="34" charset="-120"/>
+              </a:rPr>
+              <a:t>Not All Tokens Are What You Need for Pretraining</a:t>
+            </a:r>
+            <a:endParaRPr lang="en-US" sz="2400" dirty="0"/>
+          </a:p>
+        </p:txBody>
+      </p:sp>
+      <p:sp>
+        <p:nvSpPr>
+          <p:cNvPr id="4" name="Text 6"/>
+          <p:cNvSpPr/>
+          <p:nvPr>
+            <p:ph idx="111" type="body" hasCustomPrompt="1"/>
+          </p:nvPr>
+        </p:nvSpPr>
+        <p:spPr>
+          <a:xfrm>
+            <a:off x="457200" y="1115568"/>
+            <a:ext cx="11277295" cy="274320"/>
+          </a:xfrm>
+          <a:prstGeom prst="rect">
+            <a:avLst/>
+          </a:prstGeom>
+          <a:noFill/>
+          <a:ln/>
+        </p:spPr>
+        <p:txBody>
+          <a:bodyPr wrap="square" lIns="0" tIns="0" rIns="0" bIns="0" rtlCol="0" anchor="ctr"/>
+          <a:lstStyle/>
+          <a:p>
+            <a:pPr indent="0" marL="0">
+              <a:buNone/>
+            </a:pPr>
+            <a:r>
+              <a:rPr lang="en-US" sz="1200" dirty="0">
+                <a:solidFill>
+                  <a:srgbClr val="5B6478"/>
+                </a:solidFill>
+                <a:latin typeface="Meiryo" pitchFamily="34" charset="0"/>
+                <a:ea typeface="Meiryo" pitchFamily="34" charset="-122"/>
+                <a:cs typeface="Meiryo" pitchFamily="34" charset="-120"/>
+              </a:rPr>
+              <a:t>Zhenghao Lin, Zhibin Gou, Yeyun Gong, Xiao Liu ほか（厦門大学・清華大学・Microsoft）｜ NeurIPS 2024</a:t>
+            </a:r>
+            <a:endParaRPr lang="en-US" sz="1200" dirty="0"/>
+          </a:p>
+        </p:txBody>
+      </p:sp>
+      <p:sp>
+        <p:nvSpPr>
+          <p:cNvPr id="5" name="Text 2"/>
+          <p:cNvSpPr/>
+          <p:nvPr>
+            <p:ph idx="102" type="body" hasCustomPrompt="1"/>
+          </p:nvPr>
+        </p:nvSpPr>
+        <p:spPr>
+          <a:xfrm>
+            <a:off x="621792" y="1984248"/>
+            <a:ext cx="7443216" cy="4251960"/>
+          </a:xfrm>
+          <a:prstGeom prst="rect">
+            <a:avLst/>
+          </a:prstGeom>
+          <a:noFill/>
+          <a:ln/>
+        </p:spPr>
+        <p:txBody>
+          <a:bodyPr wrap="square" lIns="0" tIns="0" rIns="0" bIns="0" rtlCol="0" anchor="t"/>
+          <a:lstStyle/>
+          <a:p>
+            <a:pPr indent="0" marL="0">
+              <a:lnSpc>
+                <a:spcPts val="1900"/>
+              </a:lnSpc>
+              <a:buNone/>
+            </a:pPr>
+            <a:r>
+              <a:rPr lang="en-US" sz="1400" dirty="0">
+                <a:solidFill>
+                  <a:srgbClr val="1E2433"/>
+                </a:solidFill>
+                <a:latin typeface="Meiryo" pitchFamily="34" charset="0"/>
+                <a:ea typeface="Meiryo" pitchFamily="34" charset="-122"/>
+                <a:cs typeface="Meiryo" pitchFamily="34" charset="-120"/>
+              </a:rPr>
+              <a:t>問題設定：LLM の事前学習は全トークンに等しく損失をかけるが、トークンごとに学習の進み方は大きく異なり、雑音や学習済みのトークンに計算が費やされている。</a:t>
+            </a:r>
+            <a:endParaRPr lang="en-US" sz="1200" dirty="0"/>
+          </a:p>
+          <a:p>
+            <a:pPr indent="0" marL="0">
+              <a:lnSpc>
+                <a:spcPts val="1900"/>
+              </a:lnSpc>
+              <a:buNone/>
+            </a:pPr>
+            <a:r>
+              <a:rPr lang="en-US" sz="1400" dirty="0">
+                <a:solidFill>
+                  <a:srgbClr val="1E2433"/>
+                </a:solidFill>
+                <a:latin typeface="Meiryo" pitchFamily="34" charset="0"/>
+                <a:ea typeface="Meiryo" pitchFamily="34" charset="-122"/>
+                <a:cs typeface="Meiryo" pitchFamily="34" charset="-120"/>
+              </a:rPr>
+              <a:t>手法：望ましい分布を表す少量の高品質データで参照モデルを作り、学習中モデルの損失から参照損失を引いた超過損失でトークンを順位付けする。バッチ内の上位 k% だけに交差エントロピーをかけるので、追加コストはほぼない。参照データがない場合も、同じコーパスで学んだ参照モデルの損失とエントロピーで雑音を除く「自己参照」で平均 +3.3%（Table 3）。</a:t>
+            </a:r>
+            <a:endParaRPr lang="en-US" sz="1200" dirty="0"/>
+          </a:p>
+          <a:p>
+            <a:pPr indent="0" marL="0">
+              <a:lnSpc>
+                <a:spcPts val="1900"/>
+              </a:lnSpc>
+              <a:buNone/>
+            </a:pPr>
+            <a:r>
+              <a:rPr lang="en-US" sz="1400" dirty="0">
+                <a:solidFill>
+                  <a:srgbClr val="1E2433"/>
+                </a:solidFill>
+                <a:latin typeface="Meiryo" pitchFamily="34" charset="0"/>
+                <a:ea typeface="Meiryo" pitchFamily="34" charset="-122"/>
+                <a:cs typeface="Meiryo" pitchFamily="34" charset="-120"/>
+              </a:rPr>
+              <a:t>分析：選んだトークンの損失は下流性能とべき則で相関し、選ばなかったトークンの損失は相関しない（Fig. 7）。選択比は約60%がよい（Fig. 9）。</a:t>
+            </a:r>
+            <a:endParaRPr lang="en-US" sz="1200" dirty="0"/>
+          </a:p>
+          <a:p>
+            <a:pPr indent="0" marL="0">
+              <a:lnSpc>
+                <a:spcPts val="1900"/>
+              </a:lnSpc>
+              <a:buNone/>
+            </a:pPr>
+            <a:r>
+              <a:rPr lang="en-US" sz="1400" dirty="0">
+                <a:solidFill>
+                  <a:srgbClr val="1E2433"/>
+                </a:solidFill>
+                <a:latin typeface="Meiryo" pitchFamily="34" charset="0"/>
+                <a:ea typeface="Meiryo" pitchFamily="34" charset="-122"/>
+                <a:cs typeface="Meiryo" pitchFamily="34" charset="-120"/>
+              </a:rPr>
+              <a:t>限界：7B・100B トークン以下での検証のみ。参照モデルの分布に急速に寄るため、一般の損失との併用が望ましい。</a:t>
+            </a:r>
+            <a:endParaRPr lang="en-US" sz="1200" dirty="0"/>
+          </a:p>
+        </p:txBody>
+      </p:sp>
+      <p:sp>
+        <p:nvSpPr>
+          <p:cNvPr id="6" name="Text 4"/>
+          <p:cNvSpPr/>
+          <p:nvPr>
+            <p:ph idx="105" type="body" hasCustomPrompt="1"/>
+          </p:nvPr>
+        </p:nvSpPr>
+        <p:spPr>
+          <a:xfrm>
+            <a:off x="8531352" y="1984248"/>
+            <a:ext cx="3038551" cy="685800"/>
+          </a:xfrm>
+          <a:prstGeom prst="rect">
+            <a:avLst/>
+          </a:prstGeom>
+          <a:noFill/>
+          <a:ln/>
+        </p:spPr>
+        <p:txBody>
+          <a:bodyPr wrap="square" lIns="0" tIns="0" rIns="0" bIns="0" rtlCol="0" anchor="t"/>
+          <a:lstStyle/>
+          <a:p>
+            <a:pPr indent="0" marL="0">
+              <a:lnSpc>
+                <a:spcPts val="1750"/>
+              </a:lnSpc>
+              <a:buNone/>
+            </a:pPr>
+            <a:r>
+              <a:rPr lang="en-US" sz="1300" dirty="0">
+                <a:solidFill>
+                  <a:srgbClr val="1E2433"/>
+                </a:solidFill>
+                <a:latin typeface="Meiryo" pitchFamily="34" charset="0"/>
+                <a:ea typeface="Meiryo" pitchFamily="34" charset="-122"/>
+                <a:cs typeface="Meiryo" pitchFamily="34" charset="-120"/>
+              </a:rPr>
+              <a:t>NeurIPS 2024 Best Paper Runner-up</a:t>
+            </a:r>
+            <a:endParaRPr lang="en-US" sz="1200" dirty="0"/>
+          </a:p>
+        </p:txBody>
+      </p:sp>
+      <p:sp>
+        <p:nvSpPr>
+          <p:cNvPr id="7" name="Text 6"/>
+          <p:cNvSpPr/>
+          <p:nvPr>
+            <p:ph idx="108" type="body" hasCustomPrompt="1"/>
+          </p:nvPr>
+        </p:nvSpPr>
+        <p:spPr>
+          <a:xfrm>
+            <a:off x="8531352" y="3355848"/>
+            <a:ext cx="3038551" cy="2880360"/>
+          </a:xfrm>
+          <a:prstGeom prst="rect">
+            <a:avLst/>
+          </a:prstGeom>
+          <a:noFill/>
+          <a:ln/>
+        </p:spPr>
+        <p:txBody>
+          <a:bodyPr wrap="square" lIns="0" tIns="0" rIns="0" bIns="0" rtlCol="0" anchor="t"/>
+          <a:lstStyle/>
+          <a:p>
+            <a:pPr indent="0" marL="0">
+              <a:lnSpc>
+                <a:spcPts val="1750"/>
+              </a:lnSpc>
+              <a:buNone/>
+            </a:pPr>
+            <a:r>
+              <a:rPr lang="en-US" sz="1300" dirty="0">
+                <a:solidFill>
+                  <a:srgbClr val="1E2433"/>
+                </a:solidFill>
+                <a:latin typeface="Meiryo" pitchFamily="34" charset="0"/>
+                <a:ea typeface="Meiryo" pitchFamily="34" charset="-122"/>
+                <a:cs typeface="Meiryo" pitchFamily="34" charset="-120"/>
+              </a:rPr>
+              <a:t>・「全トークンを学ぶ」という前提を覆す、単純で効く目的関数</a:t>
+            </a:r>
+            <a:endParaRPr lang="en-US" sz="1200" dirty="0"/>
+          </a:p>
+          <a:p>
+            <a:pPr indent="0" marL="0">
+              <a:lnSpc>
+                <a:spcPts val="1750"/>
+              </a:lnSpc>
+              <a:buNone/>
+            </a:pPr>
+            <a:r>
+              <a:rPr lang="en-US" sz="1300" dirty="0">
+                <a:solidFill>
+                  <a:srgbClr val="1E2433"/>
+                </a:solidFill>
+                <a:latin typeface="Meiryo" pitchFamily="34" charset="0"/>
+                <a:ea typeface="Meiryo" pitchFamily="34" charset="-122"/>
+                <a:cs typeface="Meiryo" pitchFamily="34" charset="-120"/>
+              </a:rPr>
+              <a:t>・トークン損失の動態の分析から手法を導いた筋のよさ</a:t>
+            </a:r>
+            <a:endParaRPr lang="en-US" sz="1200" dirty="0"/>
+          </a:p>
+          <a:p>
+            <a:pPr indent="0" marL="0">
+              <a:lnSpc>
+                <a:spcPts val="1750"/>
+              </a:lnSpc>
+              <a:buNone/>
+            </a:pPr>
+            <a:r>
+              <a:rPr lang="en-US" sz="1300" dirty="0">
+                <a:solidFill>
+                  <a:srgbClr val="1E2433"/>
+                </a:solidFill>
+                <a:latin typeface="Meiryo" pitchFamily="34" charset="0"/>
+                <a:ea typeface="Meiryo" pitchFamily="34" charset="-122"/>
+                <a:cs typeface="Meiryo" pitchFamily="34" charset="-120"/>
+              </a:rPr>
+              <a:t>・3% のトークン量で最先端の数学モデルに並ぶデータ効率</a:t>
+            </a:r>
+            <a:endParaRPr lang="en-US" sz="1200" dirty="0"/>
+          </a:p>
+          <a:p>
+            <a:pPr indent="0" marL="0">
+              <a:lnSpc>
+                <a:spcPts val="1750"/>
+              </a:lnSpc>
+              <a:buNone/>
+            </a:pPr>
+            <a:r>
+              <a:rPr lang="en-US" sz="1300" dirty="0">
+                <a:solidFill>
+                  <a:srgbClr val="1E2433"/>
+                </a:solidFill>
+                <a:latin typeface="Meiryo" pitchFamily="34" charset="0"/>
+                <a:ea typeface="Meiryo" pitchFamily="34" charset="-122"/>
+                <a:cs typeface="Meiryo" pitchFamily="34" charset="-120"/>
+              </a:rPr>
+              <a:t>（調査者の見立て）</a:t>
+            </a:r>
+            <a:endParaRPr lang="en-US" sz="1200" dirty="0"/>
+          </a:p>
+        </p:txBody>
+      </p:sp>
+      <p:sp>
+        <p:nvSpPr>
+          <p:cNvPr id="8" name="Text 6"/>
+          <p:cNvSpPr/>
+          <p:nvPr>
+            <p:ph idx="112" type="body" hasCustomPrompt="1"/>
+          </p:nvPr>
+        </p:nvSpPr>
+        <p:spPr>
+          <a:xfrm>
+            <a:off x="457200" y="6446520"/>
+            <a:ext cx="9144000" cy="274320"/>
+          </a:xfrm>
+          <a:prstGeom prst="rect">
+            <a:avLst/>
+          </a:prstGeom>
+          <a:noFill/>
+          <a:ln/>
+        </p:spPr>
+        <p:txBody>
+          <a:bodyPr wrap="square" lIns="0" tIns="0" rIns="0" bIns="0" rtlCol="0" anchor="ctr"/>
+          <a:lstStyle/>
+          <a:p>
+            <a:pPr indent="0" marL="0">
+              <a:buNone/>
+            </a:pPr>
+            <a:r>
+              <a:rPr lang="en-US" sz="1000" dirty="0">
+                <a:solidFill>
+                  <a:srgbClr val="5B6478"/>
+                </a:solidFill>
+                <a:latin typeface="Meiryo" pitchFamily="34" charset="0"/>
+                <a:ea typeface="Meiryo" pitchFamily="34" charset="-122"/>
+                <a:cs typeface="Meiryo" pitchFamily="34" charset="-120"/>
+              </a:rPr>
+              <a:t>Research Survey ｜ 学会調査 › NeurIPS：受賞・注目論文</a:t>
+            </a:r>
+            <a:endParaRPr lang="en-US" sz="1000" dirty="0"/>
+          </a:p>
+        </p:txBody>
+      </p:sp>
+      <p:sp>
+        <p:nvSpPr>
+          <p:cNvPr id="25" name="Slide Number Placeholder 0"/>
+          <p:cNvSpPr>
+            <a:spLocks noGrp="1"/>
+          </p:cNvSpPr>
+          <p:nvPr>
+            <p:ph type="sldNum" sz="quarter" idx="4294967295"/>
+          </p:nvPr>
+        </p:nvSpPr>
+        <p:spPr>
+          <a:xfrm>
+            <a:off x="11185855" y="6446520"/>
+            <a:ext cx="548640" cy="274320"/>
+          </a:xfrm>
+          <a:prstGeom prst="rect">
+            <a:avLst/>
+          </a:prstGeom>
+          <a:extLst>
+            <a:ext uri="{C572A759-6A51-4108-AA02-DFA0A04FC94B}">
+              <ma14:wrappingTextBoxFlag xmlns:ma14="http://schemas.microsoft.com/office/mac/drawingml/2011/main" val="0"/>
+            </a:ext>
+          </a:extLst>
+        </p:spPr>
+        <p:txBody>
+          <a:bodyPr/>
+          <a:lstStyle>
+            <a:lvl1pPr>
+              <a:defRPr sz="1000">
+                <a:solidFill>
+                  <a:srgbClr val="5B6478"/>
+                </a:solidFill>
+                <a:latin typeface="Meiryo"/>
+                <a:ea typeface="Meiryo"/>
+                <a:cs typeface="Meiryo"/>
+              </a:defRPr>
+            </a:lvl1pPr>
+          </a:lstStyle>
+          <a:p>
+            <a:pPr algn="r"/>
+            <a:fld id="{F7021451-1387-4CA6-816F-3879F97B5CBC}" type="slidenum">
+              <a:rPr b="0" lang="en-US"/>
+              <a:t>33</a:t>
             </a:fld>
             <a:endParaRPr lang="en-US"/>
           </a:p>
@@ -22512,7 +29952,7 @@
                 <a:ea typeface="Meiryo" pitchFamily="34" charset="-122"/>
                 <a:cs typeface="Meiryo" pitchFamily="34" charset="-120"/>
               </a:rPr>
-              <a:t>2026-10-27</a:t>
+              <a:t>2026-10-28</a:t>
             </a:r>
             <a:endParaRPr lang="en-US" sz="1050" dirty="0"/>
           </a:p>
@@ -23084,6 +30524,26 @@
                 <a:ea typeface="Meiryo" pitchFamily="34" charset="-122"/>
                 <a:cs typeface="Meiryo" pitchFamily="34" charset="-120"/>
               </a:rPr>
+              <a:t>・公式 Oral 一覧（Paris 会場）に掲載</a:t>
+            </a:r>
+            <a:endParaRPr lang="en-US" sz="1200" dirty="0"/>
+          </a:p>
+          <a:p>
+            <a:pPr indent="0" marL="0">
+              <a:lnSpc>
+                <a:spcPts val="1750"/>
+              </a:lnSpc>
+              <a:buNone/>
+            </a:pPr>
+            <a:r>
+              <a:rPr lang="en-US" sz="1300" dirty="0">
+                <a:solidFill>
+                  <a:srgbClr val="1E2433"/>
+                </a:solidFill>
+                <a:latin typeface="Meiryo" pitchFamily="34" charset="0"/>
+                <a:ea typeface="Meiryo" pitchFamily="34" charset="-122"/>
+                <a:cs typeface="Meiryo" pitchFamily="34" charset="-120"/>
+              </a:rPr>
               <a:t>（調査者の見立て）</a:t>
             </a:r>
             <a:endParaRPr lang="en-US" sz="1200" dirty="0"/>
@@ -23827,7 +31287,7 @@
                 <a:ea typeface="Meiryo" pitchFamily="34" charset="-122"/>
                 <a:cs typeface="Meiryo" pitchFamily="34" charset="-120"/>
               </a:rPr>
-              <a:t>2026-10-27</a:t>
+              <a:t>2026-10-28</a:t>
             </a:r>
             <a:endParaRPr lang="en-US" sz="1050" dirty="0"/>
           </a:p>
@@ -24419,6 +31879,26 @@
                 <a:ea typeface="Meiryo" pitchFamily="34" charset="-122"/>
                 <a:cs typeface="Meiryo" pitchFamily="34" charset="-120"/>
               </a:rPr>
+              <a:t>・公式 Oral 一覧（Sydney 会場）に掲載</a:t>
+            </a:r>
+            <a:endParaRPr lang="en-US" sz="1200" dirty="0"/>
+          </a:p>
+          <a:p>
+            <a:pPr indent="0" marL="0">
+              <a:lnSpc>
+                <a:spcPts val="1750"/>
+              </a:lnSpc>
+              <a:buNone/>
+            </a:pPr>
+            <a:r>
+              <a:rPr lang="en-US" sz="1300" dirty="0">
+                <a:solidFill>
+                  <a:srgbClr val="1E2433"/>
+                </a:solidFill>
+                <a:latin typeface="Meiryo" pitchFamily="34" charset="0"/>
+                <a:ea typeface="Meiryo" pitchFamily="34" charset="-122"/>
+                <a:cs typeface="Meiryo" pitchFamily="34" charset="-120"/>
+              </a:rPr>
               <a:t>（調査者の見立て）</a:t>
             </a:r>
             <a:endParaRPr lang="en-US" sz="1200" dirty="0"/>
@@ -25162,7 +32642,7 @@
                 <a:ea typeface="Meiryo" pitchFamily="34" charset="-122"/>
                 <a:cs typeface="Meiryo" pitchFamily="34" charset="-120"/>
               </a:rPr>
-              <a:t>2026-10-27</a:t>
+              <a:t>2026-10-28</a:t>
             </a:r>
             <a:endParaRPr lang="en-US" sz="1050" dirty="0"/>
           </a:p>
@@ -25754,7 +33234,7 @@
                 <a:ea typeface="Meiryo" pitchFamily="34" charset="-122"/>
                 <a:cs typeface="Meiryo" pitchFamily="34" charset="-120"/>
               </a:rPr>
-              <a:t>・著者記載では Oral（上位 0.4%）</a:t>
+              <a:t>・公式 Oral 一覧（Sydney 会場）に掲載。著者記載は上位 0.4%</a:t>
             </a:r>
             <a:endParaRPr lang="en-US" sz="1200" dirty="0"/>
           </a:p>
